--- a/scripts/DVC_MLflow_MinIO使い方.pptx
+++ b/scripts/DVC_MLflow_MinIO使い方.pptx
@@ -15,6 +15,12 @@
     <p:sldId id="263" r:id="rId14"/>
     <p:sldId id="264" r:id="rId15"/>
     <p:sldId id="265" r:id="rId16"/>
+    <p:sldId id="266" r:id="rId17"/>
+    <p:sldId id="267" r:id="rId18"/>
+    <p:sldId id="268" r:id="rId19"/>
+    <p:sldId id="269" r:id="rId20"/>
+    <p:sldId id="270" r:id="rId21"/>
+    <p:sldId id="271" r:id="rId22"/>
   </p:sldIdLst>
   <p:sldSz cx="12191695" cy="6858000" type="screen4x3"/>
   <p:notesSz cx="6858000" cy="9144000"/>
@@ -3304,7 +3310,7 @@
                 <a:ea typeface="Yu Gothic"/>
                 <a:cs typeface="Yu Gothic"/>
               </a:rPr>
-              <a:t>ログイン: MinIO Console http://127.0.0.1:9001  /  MLflow http://127.0.0.1:5000</a:t>
+              <a:t>ログイン: MinIO Console http://127.0.0.1:9001  /  MLflow http://127.0.0.1:5001</a:t>
             </a:r>
           </a:p>
         </p:txBody>
@@ -3450,6 +3456,1812 @@
                 <a:ea typeface="Yu Gothic"/>
                 <a:cs typeface="Yu Gothic"/>
               </a:rPr>
+              <a:t>DVC：ポインタと最良選定</a:t>
+            </a:r>
+          </a:p>
+        </p:txBody>
+      </p:sp>
+      <p:sp>
+        <p:nvSpPr>
+          <p:cNvPr id="5" name="TextBox 4"/>
+          <p:cNvSpPr txBox="1"/>
+          <p:nvPr/>
+        </p:nvSpPr>
+        <p:spPr>
+          <a:xfrm>
+            <a:off x="411480" y="960120"/>
+            <a:ext cx="11338560" cy="365760"/>
+          </a:xfrm>
+          <a:prstGeom prst="rect">
+            <a:avLst/>
+          </a:prstGeom>
+          <a:noFill/>
+        </p:spPr>
+        <p:txBody>
+          <a:bodyPr wrap="square"/>
+          <a:lstStyle/>
+          <a:p>
+            <a:pPr algn="l">
+              <a:spcBef>
+                <a:spcPts val="0"/>
+              </a:spcBef>
+              <a:spcAft>
+                <a:spcPts val="0"/>
+              </a:spcAft>
+            </a:pPr>
+            <a:r>
+              <a:rPr sz="1300" b="0">
+                <a:solidFill>
+                  <a:srgbClr val="4A585C"/>
+                </a:solidFill>
+                <a:latin typeface="Yu Gothic"/>
+                <a:ea typeface="Yu Gothic"/>
+                <a:cs typeface="Yu Gothic"/>
+              </a:rPr>
+              <a:t>Git には .dvc、実体は MinIO。publish --select best で metrics から選ぶ</a:t>
+            </a:r>
+          </a:p>
+        </p:txBody>
+      </p:sp>
+      <p:sp>
+        <p:nvSpPr>
+          <p:cNvPr id="6" name="Rounded Rectangle 5"/>
+          <p:cNvSpPr/>
+          <p:nvPr/>
+        </p:nvSpPr>
+        <p:spPr>
+          <a:xfrm>
+            <a:off x="457200" y="1417320"/>
+            <a:ext cx="6766560" cy="4754880"/>
+          </a:xfrm>
+          <a:prstGeom prst="roundRect">
+            <a:avLst>
+              <a:gd name="adj" fmla="val 4000"/>
+            </a:avLst>
+          </a:prstGeom>
+          <a:solidFill>
+            <a:srgbClr val="FFFFFF"/>
+          </a:solidFill>
+          <a:ln>
+            <a:solidFill>
+              <a:srgbClr val="E8E4DC"/>
+            </a:solidFill>
+          </a:ln>
+        </p:spPr>
+        <p:style>
+          <a:lnRef idx="1">
+            <a:schemeClr val="accent1"/>
+          </a:lnRef>
+          <a:fillRef idx="3">
+            <a:schemeClr val="accent1"/>
+          </a:fillRef>
+          <a:effectRef idx="2">
+            <a:schemeClr val="accent1"/>
+          </a:effectRef>
+          <a:fontRef idx="minor">
+            <a:schemeClr val="lt1"/>
+          </a:fontRef>
+        </p:style>
+        <p:txBody>
+          <a:bodyPr rtlCol="0" anchor="ctr"/>
+          <a:lstStyle/>
+          <a:p>
+            <a:pPr algn="ctr"/>
+          </a:p>
+        </p:txBody>
+      </p:sp>
+      <p:pic>
+        <p:nvPicPr>
+          <p:cNvPr id="7" name="Picture 6" descr="dvc_status.png"/>
+          <p:cNvPicPr>
+            <a:picLocks noChangeAspect="1"/>
+          </p:cNvPicPr>
+          <p:nvPr/>
+        </p:nvPicPr>
+        <p:blipFill>
+          <a:blip r:embed="rId2"/>
+          <a:stretch>
+            <a:fillRect/>
+          </a:stretch>
+        </p:blipFill>
+        <p:spPr>
+          <a:xfrm>
+            <a:off x="548640" y="2537875"/>
+            <a:ext cx="6583680" cy="2513768"/>
+          </a:xfrm>
+          <a:prstGeom prst="rect">
+            <a:avLst/>
+          </a:prstGeom>
+        </p:spPr>
+      </p:pic>
+      <p:sp>
+        <p:nvSpPr>
+          <p:cNvPr id="8" name="TextBox 7"/>
+          <p:cNvSpPr txBox="1"/>
+          <p:nvPr/>
+        </p:nvSpPr>
+        <p:spPr>
+          <a:xfrm>
+            <a:off x="7498079" y="1645920"/>
+            <a:ext cx="4206240" cy="4389120"/>
+          </a:xfrm>
+          <a:prstGeom prst="rect">
+            <a:avLst/>
+          </a:prstGeom>
+          <a:noFill/>
+        </p:spPr>
+        <p:txBody>
+          <a:bodyPr wrap="square"/>
+          <a:lstStyle/>
+          <a:p>
+            <a:pPr algn="l">
+              <a:spcBef>
+                <a:spcPts val="0"/>
+              </a:spcBef>
+              <a:spcAft>
+                <a:spcPts val="600"/>
+              </a:spcAft>
+            </a:pPr>
+            <a:r>
+              <a:rPr sz="1500" b="0">
+                <a:solidFill>
+                  <a:srgbClr val="1C282C"/>
+                </a:solidFill>
+                <a:latin typeface="Yu Gothic"/>
+                <a:ea typeface="Yu Gothic"/>
+                <a:cs typeface="Yu Gothic"/>
+              </a:rPr>
+              <a:t>メニュー 9</a:t>
+            </a:r>
+          </a:p>
+          <a:p>
+            <a:pPr algn="l">
+              <a:spcBef>
+                <a:spcPts val="0"/>
+              </a:spcBef>
+              <a:spcAft>
+                <a:spcPts val="600"/>
+              </a:spcAft>
+            </a:pPr>
+            <a:r>
+              <a:rPr sz="1500" b="0">
+                <a:solidFill>
+                  <a:srgbClr val="1C282C"/>
+                </a:solidFill>
+                <a:latin typeface="Yu Gothic"/>
+                <a:ea typeface="Yu Gothic"/>
+                <a:cs typeface="Yu Gothic"/>
+              </a:rPr>
+              <a:t>3  最良を publish → push</a:t>
+            </a:r>
+          </a:p>
+          <a:p>
+            <a:pPr algn="l">
+              <a:spcBef>
+                <a:spcPts val="0"/>
+              </a:spcBef>
+              <a:spcAft>
+                <a:spcPts val="600"/>
+              </a:spcAft>
+            </a:pPr>
+            <a:r>
+              <a:rPr sz="1500" b="0">
+                <a:solidFill>
+                  <a:srgbClr val="1C282C"/>
+                </a:solidFill>
+                <a:latin typeface="Yu Gothic"/>
+                <a:ea typeface="Yu Gothic"/>
+                <a:cs typeface="Yu Gothic"/>
+              </a:rPr>
+              <a:t>4  最新を publish → push</a:t>
+            </a:r>
+          </a:p>
+          <a:p>
+            <a:pPr algn="l">
+              <a:spcBef>
+                <a:spcPts val="0"/>
+              </a:spcBef>
+              <a:spcAft>
+                <a:spcPts val="600"/>
+              </a:spcAft>
+            </a:pPr>
+            <a:r>
+              <a:rPr sz="1500" b="0">
+                <a:solidFill>
+                  <a:srgbClr val="1C282C"/>
+                </a:solidFill>
+                <a:latin typeface="Yu Gothic"/>
+                <a:ea typeface="Yu Gothic"/>
+                <a:cs typeface="Yu Gothic"/>
+              </a:rPr>
+              <a:t>6  最良で推論（best.pt）</a:t>
+            </a:r>
+          </a:p>
+          <a:p>
+            <a:pPr algn="l">
+              <a:spcBef>
+                <a:spcPts val="0"/>
+              </a:spcBef>
+              <a:spcAft>
+                <a:spcPts val="600"/>
+              </a:spcAft>
+            </a:pPr>
+            <a:r>
+              <a:rPr sz="1500" b="0">
+                <a:solidFill>
+                  <a:srgbClr val="1C282C"/>
+                </a:solidFill>
+                <a:latin typeface="Yu Gothic"/>
+                <a:ea typeface="Yu Gothic"/>
+                <a:cs typeface="Yu Gothic"/>
+              </a:rPr>
+              <a:t/>
+            </a:r>
+          </a:p>
+          <a:p>
+            <a:pPr algn="l">
+              <a:spcBef>
+                <a:spcPts val="0"/>
+              </a:spcBef>
+              <a:spcAft>
+                <a:spcPts val="600"/>
+              </a:spcAft>
+            </a:pPr>
+            <a:r>
+              <a:rPr sz="1500" b="0">
+                <a:solidFill>
+                  <a:srgbClr val="1C282C"/>
+                </a:solidFill>
+                <a:latin typeface="Yu Gothic"/>
+                <a:ea typeface="Yu Gothic"/>
+                <a:cs typeface="Yu Gothic"/>
+              </a:rPr>
+              <a:t>CLI 例</a:t>
+            </a:r>
+          </a:p>
+          <a:p>
+            <a:pPr algn="l">
+              <a:spcBef>
+                <a:spcPts val="0"/>
+              </a:spcBef>
+              <a:spcAft>
+                <a:spcPts val="600"/>
+              </a:spcAft>
+            </a:pPr>
+            <a:r>
+              <a:rPr sz="1500" b="0">
+                <a:solidFill>
+                  <a:srgbClr val="1C282C"/>
+                </a:solidFill>
+                <a:latin typeface="Yu Gothic"/>
+                <a:ea typeface="Yu Gothic"/>
+                <a:cs typeface="Yu Gothic"/>
+              </a:rPr>
+              <a:t>dvc_sync.py publish \</a:t>
+            </a:r>
+          </a:p>
+          <a:p>
+            <a:pPr algn="l">
+              <a:spcBef>
+                <a:spcPts val="0"/>
+              </a:spcBef>
+              <a:spcAft>
+                <a:spcPts val="600"/>
+              </a:spcAft>
+            </a:pPr>
+            <a:r>
+              <a:rPr sz="1500" b="0">
+                <a:solidFill>
+                  <a:srgbClr val="1C282C"/>
+                </a:solidFill>
+                <a:latin typeface="Yu Gothic"/>
+                <a:ea typeface="Yu Gothic"/>
+                <a:cs typeface="Yu Gothic"/>
+              </a:rPr>
+              <a:t>  --log-dir logs\... \</a:t>
+            </a:r>
+          </a:p>
+          <a:p>
+            <a:pPr algn="l">
+              <a:spcBef>
+                <a:spcPts val="0"/>
+              </a:spcBef>
+              <a:spcAft>
+                <a:spcPts val="600"/>
+              </a:spcAft>
+            </a:pPr>
+            <a:r>
+              <a:rPr sz="1500" b="0">
+                <a:solidFill>
+                  <a:srgbClr val="1C282C"/>
+                </a:solidFill>
+                <a:latin typeface="Yu Gothic"/>
+                <a:ea typeface="Yu Gothic"/>
+                <a:cs typeface="Yu Gothic"/>
+              </a:rPr>
+              <a:t>  --select best --push</a:t>
+            </a:r>
+          </a:p>
+          <a:p>
+            <a:pPr algn="l">
+              <a:spcBef>
+                <a:spcPts val="0"/>
+              </a:spcBef>
+              <a:spcAft>
+                <a:spcPts val="600"/>
+              </a:spcAft>
+            </a:pPr>
+            <a:r>
+              <a:rPr sz="1500" b="0">
+                <a:solidFill>
+                  <a:srgbClr val="1C282C"/>
+                </a:solidFill>
+                <a:latin typeface="Yu Gothic"/>
+                <a:ea typeface="Yu Gothic"/>
+                <a:cs typeface="Yu Gothic"/>
+              </a:rPr>
+              <a:t/>
+            </a:r>
+          </a:p>
+          <a:p>
+            <a:pPr algn="l">
+              <a:spcBef>
+                <a:spcPts val="0"/>
+              </a:spcBef>
+              <a:spcAft>
+                <a:spcPts val="600"/>
+              </a:spcAft>
+            </a:pPr>
+            <a:r>
+              <a:rPr sz="1500" b="0">
+                <a:solidFill>
+                  <a:srgbClr val="1C282C"/>
+                </a:solidFill>
+                <a:latin typeface="Yu Gothic"/>
+                <a:ea typeface="Yu Gothic"/>
+                <a:cs typeface="Yu Gothic"/>
+              </a:rPr>
+              <a:t>resolve で best.pt のパス表示</a:t>
+            </a:r>
+          </a:p>
+        </p:txBody>
+      </p:sp>
+    </p:spTree>
+  </p:cSld>
+  <p:clrMapOvr>
+    <a:masterClrMapping/>
+  </p:clrMapOvr>
+</p:sld>
+</file>
+
+<file path=ppt/slides/slide11.xml><?xml version="1.0" encoding="utf-8"?>
+<p:sld xmlns:a="http://schemas.openxmlformats.org/drawingml/2006/main" xmlns:p="http://schemas.openxmlformats.org/presentationml/2006/main" xmlns:r="http://schemas.openxmlformats.org/officeDocument/2006/relationships">
+  <p:cSld>
+    <p:spTree>
+      <p:nvGrpSpPr>
+        <p:cNvPr id="1" name=""/>
+        <p:cNvGrpSpPr/>
+        <p:nvPr/>
+      </p:nvGrpSpPr>
+      <p:grpSpPr/>
+      <p:sp>
+        <p:nvSpPr>
+          <p:cNvPr id="2" name="Rectangle 1"/>
+          <p:cNvSpPr/>
+          <p:nvPr/>
+        </p:nvSpPr>
+        <p:spPr>
+          <a:xfrm>
+            <a:off x="0" y="0"/>
+            <a:ext cx="12191695" cy="6858000"/>
+          </a:xfrm>
+          <a:prstGeom prst="rect">
+            <a:avLst/>
+          </a:prstGeom>
+          <a:solidFill>
+            <a:srgbClr val="F6F3EC"/>
+          </a:solidFill>
+          <a:ln>
+            <a:noFill/>
+          </a:ln>
+        </p:spPr>
+        <p:style>
+          <a:lnRef idx="1">
+            <a:schemeClr val="accent1"/>
+          </a:lnRef>
+          <a:fillRef idx="3">
+            <a:schemeClr val="accent1"/>
+          </a:fillRef>
+          <a:effectRef idx="2">
+            <a:schemeClr val="accent1"/>
+          </a:effectRef>
+          <a:fontRef idx="minor">
+            <a:schemeClr val="lt1"/>
+          </a:fontRef>
+        </p:style>
+        <p:txBody>
+          <a:bodyPr rtlCol="0" anchor="ctr"/>
+          <a:lstStyle/>
+          <a:p>
+            <a:pPr algn="ctr"/>
+          </a:p>
+        </p:txBody>
+      </p:sp>
+      <p:sp>
+        <p:nvSpPr>
+          <p:cNvPr id="3" name="Rectangle 2"/>
+          <p:cNvSpPr/>
+          <p:nvPr/>
+        </p:nvSpPr>
+        <p:spPr>
+          <a:xfrm>
+            <a:off x="0" y="0"/>
+            <a:ext cx="12191695" cy="868680"/>
+          </a:xfrm>
+          <a:prstGeom prst="rect">
+            <a:avLst/>
+          </a:prstGeom>
+          <a:solidFill>
+            <a:srgbClr val="1F4E5F"/>
+          </a:solidFill>
+          <a:ln>
+            <a:noFill/>
+          </a:ln>
+        </p:spPr>
+        <p:style>
+          <a:lnRef idx="1">
+            <a:schemeClr val="accent1"/>
+          </a:lnRef>
+          <a:fillRef idx="3">
+            <a:schemeClr val="accent1"/>
+          </a:fillRef>
+          <a:effectRef idx="2">
+            <a:schemeClr val="accent1"/>
+          </a:effectRef>
+          <a:fontRef idx="minor">
+            <a:schemeClr val="lt1"/>
+          </a:fontRef>
+        </p:style>
+        <p:txBody>
+          <a:bodyPr rtlCol="0" anchor="ctr"/>
+          <a:lstStyle/>
+          <a:p>
+            <a:pPr algn="ctr"/>
+          </a:p>
+        </p:txBody>
+      </p:sp>
+      <p:sp>
+        <p:nvSpPr>
+          <p:cNvPr id="4" name="TextBox 3"/>
+          <p:cNvSpPr txBox="1"/>
+          <p:nvPr/>
+        </p:nvSpPr>
+        <p:spPr>
+          <a:xfrm>
+            <a:off x="411480" y="164592"/>
+            <a:ext cx="11338560" cy="640080"/>
+          </a:xfrm>
+          <a:prstGeom prst="rect">
+            <a:avLst/>
+          </a:prstGeom>
+          <a:noFill/>
+        </p:spPr>
+        <p:txBody>
+          <a:bodyPr wrap="square"/>
+          <a:lstStyle/>
+          <a:p>
+            <a:pPr algn="l">
+              <a:spcBef>
+                <a:spcPts val="0"/>
+              </a:spcBef>
+              <a:spcAft>
+                <a:spcPts val="0"/>
+              </a:spcAft>
+            </a:pPr>
+            <a:r>
+              <a:rPr sz="2600" b="1">
+                <a:solidFill>
+                  <a:srgbClr val="FFFFFF"/>
+                </a:solidFill>
+                <a:latin typeface="Yu Gothic"/>
+                <a:ea typeface="Yu Gothic"/>
+                <a:cs typeface="Yu Gothic"/>
+              </a:rPr>
+              <a:t>MLflow：実験ノート（実画面）</a:t>
+            </a:r>
+          </a:p>
+        </p:txBody>
+      </p:sp>
+      <p:sp>
+        <p:nvSpPr>
+          <p:cNvPr id="5" name="TextBox 4"/>
+          <p:cNvSpPr txBox="1"/>
+          <p:nvPr/>
+        </p:nvSpPr>
+        <p:spPr>
+          <a:xfrm>
+            <a:off x="411480" y="960120"/>
+            <a:ext cx="11338560" cy="365760"/>
+          </a:xfrm>
+          <a:prstGeom prst="rect">
+            <a:avLst/>
+          </a:prstGeom>
+          <a:noFill/>
+        </p:spPr>
+        <p:txBody>
+          <a:bodyPr wrap="square"/>
+          <a:lstStyle/>
+          <a:p>
+            <a:pPr algn="l">
+              <a:spcBef>
+                <a:spcPts val="0"/>
+              </a:spcBef>
+              <a:spcAft>
+                <a:spcPts val="0"/>
+              </a:spcAft>
+            </a:pPr>
+            <a:r>
+              <a:rPr sz="1300" b="0">
+                <a:solidFill>
+                  <a:srgbClr val="4A585C"/>
+                </a:solidFill>
+                <a:latin typeface="Yu Gothic"/>
+                <a:ea typeface="Yu Gothic"/>
+                <a:cs typeface="Yu Gothic"/>
+              </a:rPr>
+              <a:t>起動: mlflow ui --backend-store-uri sqlite:///logs/mlflow/mlflow.db</a:t>
+            </a:r>
+          </a:p>
+        </p:txBody>
+      </p:sp>
+      <p:sp>
+        <p:nvSpPr>
+          <p:cNvPr id="6" name="Rounded Rectangle 5"/>
+          <p:cNvSpPr/>
+          <p:nvPr/>
+        </p:nvSpPr>
+        <p:spPr>
+          <a:xfrm>
+            <a:off x="457200" y="1417320"/>
+            <a:ext cx="11247120" cy="5029200"/>
+          </a:xfrm>
+          <a:prstGeom prst="roundRect">
+            <a:avLst>
+              <a:gd name="adj" fmla="val 4000"/>
+            </a:avLst>
+          </a:prstGeom>
+          <a:solidFill>
+            <a:srgbClr val="FFFFFF"/>
+          </a:solidFill>
+          <a:ln>
+            <a:solidFill>
+              <a:srgbClr val="E8E4DC"/>
+            </a:solidFill>
+          </a:ln>
+        </p:spPr>
+        <p:style>
+          <a:lnRef idx="1">
+            <a:schemeClr val="accent1"/>
+          </a:lnRef>
+          <a:fillRef idx="3">
+            <a:schemeClr val="accent1"/>
+          </a:fillRef>
+          <a:effectRef idx="2">
+            <a:schemeClr val="accent1"/>
+          </a:effectRef>
+          <a:fontRef idx="minor">
+            <a:schemeClr val="lt1"/>
+          </a:fontRef>
+        </p:style>
+        <p:txBody>
+          <a:bodyPr rtlCol="0" anchor="ctr"/>
+          <a:lstStyle/>
+          <a:p>
+            <a:pPr algn="ctr"/>
+          </a:p>
+        </p:txBody>
+      </p:sp>
+      <p:pic>
+        <p:nvPicPr>
+          <p:cNvPr id="7" name="Picture 6" descr="mlflow_home.png"/>
+          <p:cNvPicPr>
+            <a:picLocks noChangeAspect="1"/>
+          </p:cNvPicPr>
+          <p:nvPr/>
+        </p:nvPicPr>
+        <p:blipFill>
+          <a:blip r:embed="rId2"/>
+          <a:stretch>
+            <a:fillRect/>
+          </a:stretch>
+        </p:blipFill>
+        <p:spPr>
+          <a:xfrm>
+            <a:off x="2203704" y="1508760"/>
+            <a:ext cx="7754112" cy="4846320"/>
+          </a:xfrm>
+          <a:prstGeom prst="rect">
+            <a:avLst/>
+          </a:prstGeom>
+        </p:spPr>
+      </p:pic>
+    </p:spTree>
+  </p:cSld>
+  <p:clrMapOvr>
+    <a:masterClrMapping/>
+  </p:clrMapOvr>
+</p:sld>
+</file>
+
+<file path=ppt/slides/slide12.xml><?xml version="1.0" encoding="utf-8"?>
+<p:sld xmlns:a="http://schemas.openxmlformats.org/drawingml/2006/main" xmlns:p="http://schemas.openxmlformats.org/presentationml/2006/main" xmlns:r="http://schemas.openxmlformats.org/officeDocument/2006/relationships">
+  <p:cSld>
+    <p:spTree>
+      <p:nvGrpSpPr>
+        <p:cNvPr id="1" name=""/>
+        <p:cNvGrpSpPr/>
+        <p:nvPr/>
+      </p:nvGrpSpPr>
+      <p:grpSpPr/>
+      <p:sp>
+        <p:nvSpPr>
+          <p:cNvPr id="2" name="Rectangle 1"/>
+          <p:cNvSpPr/>
+          <p:nvPr/>
+        </p:nvSpPr>
+        <p:spPr>
+          <a:xfrm>
+            <a:off x="0" y="0"/>
+            <a:ext cx="12191695" cy="6858000"/>
+          </a:xfrm>
+          <a:prstGeom prst="rect">
+            <a:avLst/>
+          </a:prstGeom>
+          <a:solidFill>
+            <a:srgbClr val="F6F3EC"/>
+          </a:solidFill>
+          <a:ln>
+            <a:noFill/>
+          </a:ln>
+        </p:spPr>
+        <p:style>
+          <a:lnRef idx="1">
+            <a:schemeClr val="accent1"/>
+          </a:lnRef>
+          <a:fillRef idx="3">
+            <a:schemeClr val="accent1"/>
+          </a:fillRef>
+          <a:effectRef idx="2">
+            <a:schemeClr val="accent1"/>
+          </a:effectRef>
+          <a:fontRef idx="minor">
+            <a:schemeClr val="lt1"/>
+          </a:fontRef>
+        </p:style>
+        <p:txBody>
+          <a:bodyPr rtlCol="0" anchor="ctr"/>
+          <a:lstStyle/>
+          <a:p>
+            <a:pPr algn="ctr"/>
+          </a:p>
+        </p:txBody>
+      </p:sp>
+      <p:sp>
+        <p:nvSpPr>
+          <p:cNvPr id="3" name="Rectangle 2"/>
+          <p:cNvSpPr/>
+          <p:nvPr/>
+        </p:nvSpPr>
+        <p:spPr>
+          <a:xfrm>
+            <a:off x="0" y="0"/>
+            <a:ext cx="12191695" cy="868680"/>
+          </a:xfrm>
+          <a:prstGeom prst="rect">
+            <a:avLst/>
+          </a:prstGeom>
+          <a:solidFill>
+            <a:srgbClr val="1F4E5F"/>
+          </a:solidFill>
+          <a:ln>
+            <a:noFill/>
+          </a:ln>
+        </p:spPr>
+        <p:style>
+          <a:lnRef idx="1">
+            <a:schemeClr val="accent1"/>
+          </a:lnRef>
+          <a:fillRef idx="3">
+            <a:schemeClr val="accent1"/>
+          </a:fillRef>
+          <a:effectRef idx="2">
+            <a:schemeClr val="accent1"/>
+          </a:effectRef>
+          <a:fontRef idx="minor">
+            <a:schemeClr val="lt1"/>
+          </a:fontRef>
+        </p:style>
+        <p:txBody>
+          <a:bodyPr rtlCol="0" anchor="ctr"/>
+          <a:lstStyle/>
+          <a:p>
+            <a:pPr algn="ctr"/>
+          </a:p>
+        </p:txBody>
+      </p:sp>
+      <p:sp>
+        <p:nvSpPr>
+          <p:cNvPr id="4" name="TextBox 3"/>
+          <p:cNvSpPr txBox="1"/>
+          <p:nvPr/>
+        </p:nvSpPr>
+        <p:spPr>
+          <a:xfrm>
+            <a:off x="411480" y="164592"/>
+            <a:ext cx="11338560" cy="640080"/>
+          </a:xfrm>
+          <a:prstGeom prst="rect">
+            <a:avLst/>
+          </a:prstGeom>
+          <a:noFill/>
+        </p:spPr>
+        <p:txBody>
+          <a:bodyPr wrap="square"/>
+          <a:lstStyle/>
+          <a:p>
+            <a:pPr algn="l">
+              <a:spcBef>
+                <a:spcPts val="0"/>
+              </a:spcBef>
+              <a:spcAft>
+                <a:spcPts val="0"/>
+              </a:spcAft>
+            </a:pPr>
+            <a:r>
+              <a:rPr sz="2600" b="1">
+                <a:solidFill>
+                  <a:srgbClr val="FFFFFF"/>
+                </a:solidFill>
+                <a:latin typeface="Yu Gothic"/>
+                <a:ea typeface="Yu Gothic"/>
+                <a:cs typeface="Yu Gothic"/>
+              </a:rPr>
+              <a:t>MLflow：pick-and-carry の Runs（UI）</a:t>
+            </a:r>
+          </a:p>
+        </p:txBody>
+      </p:sp>
+      <p:sp>
+        <p:nvSpPr>
+          <p:cNvPr id="5" name="TextBox 4"/>
+          <p:cNvSpPr txBox="1"/>
+          <p:nvPr/>
+        </p:nvSpPr>
+        <p:spPr>
+          <a:xfrm>
+            <a:off x="411480" y="960120"/>
+            <a:ext cx="11338560" cy="365760"/>
+          </a:xfrm>
+          <a:prstGeom prst="rect">
+            <a:avLst/>
+          </a:prstGeom>
+          <a:noFill/>
+        </p:spPr>
+        <p:txBody>
+          <a:bodyPr wrap="square"/>
+          <a:lstStyle/>
+          <a:p>
+            <a:pPr algn="l">
+              <a:spcBef>
+                <a:spcPts val="0"/>
+              </a:spcBef>
+              <a:spcAft>
+                <a:spcPts val="0"/>
+              </a:spcAft>
+            </a:pPr>
+            <a:r>
+              <a:rPr sz="1300" b="0">
+                <a:solidFill>
+                  <a:srgbClr val="4A585C"/>
+                </a:solidFill>
+                <a:latin typeface="Yu Gothic"/>
+                <a:ea typeface="Yu Gothic"/>
+                <a:cs typeface="Yu Gothic"/>
+              </a:rPr>
+              <a:t>曲線・パラメータ比較はここ。大きい .pt の共有は DVC/MinIO 側</a:t>
+            </a:r>
+          </a:p>
+        </p:txBody>
+      </p:sp>
+      <p:sp>
+        <p:nvSpPr>
+          <p:cNvPr id="6" name="Rounded Rectangle 5"/>
+          <p:cNvSpPr/>
+          <p:nvPr/>
+        </p:nvSpPr>
+        <p:spPr>
+          <a:xfrm>
+            <a:off x="457200" y="1417320"/>
+            <a:ext cx="11247120" cy="5029200"/>
+          </a:xfrm>
+          <a:prstGeom prst="roundRect">
+            <a:avLst>
+              <a:gd name="adj" fmla="val 4000"/>
+            </a:avLst>
+          </a:prstGeom>
+          <a:solidFill>
+            <a:srgbClr val="FFFFFF"/>
+          </a:solidFill>
+          <a:ln>
+            <a:solidFill>
+              <a:srgbClr val="E8E4DC"/>
+            </a:solidFill>
+          </a:ln>
+        </p:spPr>
+        <p:style>
+          <a:lnRef idx="1">
+            <a:schemeClr val="accent1"/>
+          </a:lnRef>
+          <a:fillRef idx="3">
+            <a:schemeClr val="accent1"/>
+          </a:fillRef>
+          <a:effectRef idx="2">
+            <a:schemeClr val="accent1"/>
+          </a:effectRef>
+          <a:fontRef idx="minor">
+            <a:schemeClr val="lt1"/>
+          </a:fontRef>
+        </p:style>
+        <p:txBody>
+          <a:bodyPr rtlCol="0" anchor="ctr"/>
+          <a:lstStyle/>
+          <a:p>
+            <a:pPr algn="ctr"/>
+          </a:p>
+        </p:txBody>
+      </p:sp>
+      <p:pic>
+        <p:nvPicPr>
+          <p:cNvPr id="7" name="Picture 6" descr="mlflow_experiment.png"/>
+          <p:cNvPicPr>
+            <a:picLocks noChangeAspect="1"/>
+          </p:cNvPicPr>
+          <p:nvPr/>
+        </p:nvPicPr>
+        <p:blipFill>
+          <a:blip r:embed="rId2"/>
+          <a:stretch>
+            <a:fillRect/>
+          </a:stretch>
+        </p:blipFill>
+        <p:spPr>
+          <a:xfrm>
+            <a:off x="2203704" y="1508760"/>
+            <a:ext cx="7754112" cy="4846320"/>
+          </a:xfrm>
+          <a:prstGeom prst="rect">
+            <a:avLst/>
+          </a:prstGeom>
+        </p:spPr>
+      </p:pic>
+    </p:spTree>
+  </p:cSld>
+  <p:clrMapOvr>
+    <a:masterClrMapping/>
+  </p:clrMapOvr>
+</p:sld>
+</file>
+
+<file path=ppt/slides/slide13.xml><?xml version="1.0" encoding="utf-8"?>
+<p:sld xmlns:a="http://schemas.openxmlformats.org/drawingml/2006/main" xmlns:p="http://schemas.openxmlformats.org/presentationml/2006/main" xmlns:r="http://schemas.openxmlformats.org/officeDocument/2006/relationships">
+  <p:cSld>
+    <p:spTree>
+      <p:nvGrpSpPr>
+        <p:cNvPr id="1" name=""/>
+        <p:cNvGrpSpPr/>
+        <p:nvPr/>
+      </p:nvGrpSpPr>
+      <p:grpSpPr/>
+      <p:sp>
+        <p:nvSpPr>
+          <p:cNvPr id="2" name="Rectangle 1"/>
+          <p:cNvSpPr/>
+          <p:nvPr/>
+        </p:nvSpPr>
+        <p:spPr>
+          <a:xfrm>
+            <a:off x="0" y="0"/>
+            <a:ext cx="12191695" cy="6858000"/>
+          </a:xfrm>
+          <a:prstGeom prst="rect">
+            <a:avLst/>
+          </a:prstGeom>
+          <a:solidFill>
+            <a:srgbClr val="F6F3EC"/>
+          </a:solidFill>
+          <a:ln>
+            <a:noFill/>
+          </a:ln>
+        </p:spPr>
+        <p:style>
+          <a:lnRef idx="1">
+            <a:schemeClr val="accent1"/>
+          </a:lnRef>
+          <a:fillRef idx="3">
+            <a:schemeClr val="accent1"/>
+          </a:fillRef>
+          <a:effectRef idx="2">
+            <a:schemeClr val="accent1"/>
+          </a:effectRef>
+          <a:fontRef idx="minor">
+            <a:schemeClr val="lt1"/>
+          </a:fontRef>
+        </p:style>
+        <p:txBody>
+          <a:bodyPr rtlCol="0" anchor="ctr"/>
+          <a:lstStyle/>
+          <a:p>
+            <a:pPr algn="ctr"/>
+          </a:p>
+        </p:txBody>
+      </p:sp>
+      <p:sp>
+        <p:nvSpPr>
+          <p:cNvPr id="3" name="Rectangle 2"/>
+          <p:cNvSpPr/>
+          <p:nvPr/>
+        </p:nvSpPr>
+        <p:spPr>
+          <a:xfrm>
+            <a:off x="0" y="0"/>
+            <a:ext cx="12191695" cy="868680"/>
+          </a:xfrm>
+          <a:prstGeom prst="rect">
+            <a:avLst/>
+          </a:prstGeom>
+          <a:solidFill>
+            <a:srgbClr val="1F4E5F"/>
+          </a:solidFill>
+          <a:ln>
+            <a:noFill/>
+          </a:ln>
+        </p:spPr>
+        <p:style>
+          <a:lnRef idx="1">
+            <a:schemeClr val="accent1"/>
+          </a:lnRef>
+          <a:fillRef idx="3">
+            <a:schemeClr val="accent1"/>
+          </a:fillRef>
+          <a:effectRef idx="2">
+            <a:schemeClr val="accent1"/>
+          </a:effectRef>
+          <a:fontRef idx="minor">
+            <a:schemeClr val="lt1"/>
+          </a:fontRef>
+        </p:style>
+        <p:txBody>
+          <a:bodyPr rtlCol="0" anchor="ctr"/>
+          <a:lstStyle/>
+          <a:p>
+            <a:pPr algn="ctr"/>
+          </a:p>
+        </p:txBody>
+      </p:sp>
+      <p:sp>
+        <p:nvSpPr>
+          <p:cNvPr id="4" name="TextBox 3"/>
+          <p:cNvSpPr txBox="1"/>
+          <p:nvPr/>
+        </p:nvSpPr>
+        <p:spPr>
+          <a:xfrm>
+            <a:off x="411480" y="164592"/>
+            <a:ext cx="11338560" cy="640080"/>
+          </a:xfrm>
+          <a:prstGeom prst="rect">
+            <a:avLst/>
+          </a:prstGeom>
+          <a:noFill/>
+        </p:spPr>
+        <p:txBody>
+          <a:bodyPr wrap="square"/>
+          <a:lstStyle/>
+          <a:p>
+            <a:pPr algn="l">
+              <a:spcBef>
+                <a:spcPts val="0"/>
+              </a:spcBef>
+              <a:spcAft>
+                <a:spcPts val="0"/>
+              </a:spcAft>
+            </a:pPr>
+            <a:r>
+              <a:rPr sz="2600" b="1">
+                <a:solidFill>
+                  <a:srgbClr val="FFFFFF"/>
+                </a:solidFill>
+                <a:latin typeface="Yu Gothic"/>
+                <a:ea typeface="Yu Gothic"/>
+                <a:cs typeface="Yu Gothic"/>
+              </a:rPr>
+              <a:t>MLflow：学習済み Runs 一覧（UI スナップショット）</a:t>
+            </a:r>
+          </a:p>
+        </p:txBody>
+      </p:sp>
+      <p:sp>
+        <p:nvSpPr>
+          <p:cNvPr id="5" name="TextBox 4"/>
+          <p:cNvSpPr txBox="1"/>
+          <p:nvPr/>
+        </p:nvSpPr>
+        <p:spPr>
+          <a:xfrm>
+            <a:off x="411480" y="960120"/>
+            <a:ext cx="11338560" cy="365760"/>
+          </a:xfrm>
+          <a:prstGeom prst="rect">
+            <a:avLst/>
+          </a:prstGeom>
+          <a:noFill/>
+        </p:spPr>
+        <p:txBody>
+          <a:bodyPr wrap="square"/>
+          <a:lstStyle/>
+          <a:p>
+            <a:pPr algn="l">
+              <a:spcBef>
+                <a:spcPts val="0"/>
+              </a:spcBef>
+              <a:spcAft>
+                <a:spcPts val="0"/>
+              </a:spcAft>
+            </a:pPr>
+            <a:r>
+              <a:rPr sz="1300" b="0">
+                <a:solidFill>
+                  <a:srgbClr val="4A585C"/>
+                </a:solidFill>
+                <a:latin typeface="Yu Gothic"/>
+                <a:ea typeface="Yu Gothic"/>
+                <a:cs typeface="Yu Gothic"/>
+              </a:rPr>
+              <a:t>pick-and-carry 実験の walk / reach / carry / catch など実ラン</a:t>
+            </a:r>
+          </a:p>
+        </p:txBody>
+      </p:sp>
+      <p:sp>
+        <p:nvSpPr>
+          <p:cNvPr id="6" name="Rounded Rectangle 5"/>
+          <p:cNvSpPr/>
+          <p:nvPr/>
+        </p:nvSpPr>
+        <p:spPr>
+          <a:xfrm>
+            <a:off x="365760" y="1371600"/>
+            <a:ext cx="11430000" cy="5029200"/>
+          </a:xfrm>
+          <a:prstGeom prst="roundRect">
+            <a:avLst>
+              <a:gd name="adj" fmla="val 4000"/>
+            </a:avLst>
+          </a:prstGeom>
+          <a:solidFill>
+            <a:srgbClr val="FFFFFF"/>
+          </a:solidFill>
+          <a:ln>
+            <a:solidFill>
+              <a:srgbClr val="E8E4DC"/>
+            </a:solidFill>
+          </a:ln>
+        </p:spPr>
+        <p:style>
+          <a:lnRef idx="1">
+            <a:schemeClr val="accent1"/>
+          </a:lnRef>
+          <a:fillRef idx="3">
+            <a:schemeClr val="accent1"/>
+          </a:fillRef>
+          <a:effectRef idx="2">
+            <a:schemeClr val="accent1"/>
+          </a:effectRef>
+          <a:fontRef idx="minor">
+            <a:schemeClr val="lt1"/>
+          </a:fontRef>
+        </p:style>
+        <p:txBody>
+          <a:bodyPr rtlCol="0" anchor="ctr"/>
+          <a:lstStyle/>
+          <a:p>
+            <a:pPr algn="ctr"/>
+          </a:p>
+        </p:txBody>
+      </p:sp>
+      <p:pic>
+        <p:nvPicPr>
+          <p:cNvPr id="7" name="Picture 6" descr="mlflow_runs_table.png"/>
+          <p:cNvPicPr>
+            <a:picLocks noChangeAspect="1"/>
+          </p:cNvPicPr>
+          <p:nvPr/>
+        </p:nvPicPr>
+        <p:blipFill>
+          <a:blip r:embed="rId2"/>
+          <a:stretch>
+            <a:fillRect/>
+          </a:stretch>
+        </p:blipFill>
+        <p:spPr>
+          <a:xfrm>
+            <a:off x="2203704" y="1463040"/>
+            <a:ext cx="7754112" cy="4846320"/>
+          </a:xfrm>
+          <a:prstGeom prst="rect">
+            <a:avLst/>
+          </a:prstGeom>
+        </p:spPr>
+      </p:pic>
+    </p:spTree>
+  </p:cSld>
+  <p:clrMapOvr>
+    <a:masterClrMapping/>
+  </p:clrMapOvr>
+</p:sld>
+</file>
+
+<file path=ppt/slides/slide14.xml><?xml version="1.0" encoding="utf-8"?>
+<p:sld xmlns:a="http://schemas.openxmlformats.org/drawingml/2006/main" xmlns:p="http://schemas.openxmlformats.org/presentationml/2006/main" xmlns:r="http://schemas.openxmlformats.org/officeDocument/2006/relationships">
+  <p:cSld>
+    <p:spTree>
+      <p:nvGrpSpPr>
+        <p:cNvPr id="1" name=""/>
+        <p:cNvGrpSpPr/>
+        <p:nvPr/>
+      </p:nvGrpSpPr>
+      <p:grpSpPr/>
+      <p:sp>
+        <p:nvSpPr>
+          <p:cNvPr id="2" name="Rectangle 1"/>
+          <p:cNvSpPr/>
+          <p:nvPr/>
+        </p:nvSpPr>
+        <p:spPr>
+          <a:xfrm>
+            <a:off x="0" y="0"/>
+            <a:ext cx="12191695" cy="6858000"/>
+          </a:xfrm>
+          <a:prstGeom prst="rect">
+            <a:avLst/>
+          </a:prstGeom>
+          <a:solidFill>
+            <a:srgbClr val="F6F3EC"/>
+          </a:solidFill>
+          <a:ln>
+            <a:noFill/>
+          </a:ln>
+        </p:spPr>
+        <p:style>
+          <a:lnRef idx="1">
+            <a:schemeClr val="accent1"/>
+          </a:lnRef>
+          <a:fillRef idx="3">
+            <a:schemeClr val="accent1"/>
+          </a:fillRef>
+          <a:effectRef idx="2">
+            <a:schemeClr val="accent1"/>
+          </a:effectRef>
+          <a:fontRef idx="minor">
+            <a:schemeClr val="lt1"/>
+          </a:fontRef>
+        </p:style>
+        <p:txBody>
+          <a:bodyPr rtlCol="0" anchor="ctr"/>
+          <a:lstStyle/>
+          <a:p>
+            <a:pPr algn="ctr"/>
+          </a:p>
+        </p:txBody>
+      </p:sp>
+      <p:sp>
+        <p:nvSpPr>
+          <p:cNvPr id="3" name="Rectangle 2"/>
+          <p:cNvSpPr/>
+          <p:nvPr/>
+        </p:nvSpPr>
+        <p:spPr>
+          <a:xfrm>
+            <a:off x="0" y="0"/>
+            <a:ext cx="12191695" cy="868680"/>
+          </a:xfrm>
+          <a:prstGeom prst="rect">
+            <a:avLst/>
+          </a:prstGeom>
+          <a:solidFill>
+            <a:srgbClr val="1F4E5F"/>
+          </a:solidFill>
+          <a:ln>
+            <a:noFill/>
+          </a:ln>
+        </p:spPr>
+        <p:style>
+          <a:lnRef idx="1">
+            <a:schemeClr val="accent1"/>
+          </a:lnRef>
+          <a:fillRef idx="3">
+            <a:schemeClr val="accent1"/>
+          </a:fillRef>
+          <a:effectRef idx="2">
+            <a:schemeClr val="accent1"/>
+          </a:effectRef>
+          <a:fontRef idx="minor">
+            <a:schemeClr val="lt1"/>
+          </a:fontRef>
+        </p:style>
+        <p:txBody>
+          <a:bodyPr rtlCol="0" anchor="ctr"/>
+          <a:lstStyle/>
+          <a:p>
+            <a:pPr algn="ctr"/>
+          </a:p>
+        </p:txBody>
+      </p:sp>
+      <p:sp>
+        <p:nvSpPr>
+          <p:cNvPr id="4" name="TextBox 3"/>
+          <p:cNvSpPr txBox="1"/>
+          <p:nvPr/>
+        </p:nvSpPr>
+        <p:spPr>
+          <a:xfrm>
+            <a:off x="411480" y="164592"/>
+            <a:ext cx="11338560" cy="640080"/>
+          </a:xfrm>
+          <a:prstGeom prst="rect">
+            <a:avLst/>
+          </a:prstGeom>
+          <a:noFill/>
+        </p:spPr>
+        <p:txBody>
+          <a:bodyPr wrap="square"/>
+          <a:lstStyle/>
+          <a:p>
+            <a:pPr algn="l">
+              <a:spcBef>
+                <a:spcPts val="0"/>
+              </a:spcBef>
+              <a:spcAft>
+                <a:spcPts val="0"/>
+              </a:spcAft>
+            </a:pPr>
+            <a:r>
+              <a:rPr sz="2600" b="1">
+                <a:solidFill>
+                  <a:srgbClr val="FFFFFF"/>
+                </a:solidFill>
+                <a:latin typeface="Yu Gothic"/>
+                <a:ea typeface="Yu Gothic"/>
+                <a:cs typeface="Yu Gothic"/>
+              </a:rPr>
+              <a:t>MLflow：ラン詳細（UI スナップショット）</a:t>
+            </a:r>
+          </a:p>
+        </p:txBody>
+      </p:sp>
+      <p:sp>
+        <p:nvSpPr>
+          <p:cNvPr id="5" name="TextBox 4"/>
+          <p:cNvSpPr txBox="1"/>
+          <p:nvPr/>
+        </p:nvSpPr>
+        <p:spPr>
+          <a:xfrm>
+            <a:off x="411480" y="960120"/>
+            <a:ext cx="11338560" cy="365760"/>
+          </a:xfrm>
+          <a:prstGeom prst="rect">
+            <a:avLst/>
+          </a:prstGeom>
+          <a:noFill/>
+        </p:spPr>
+        <p:txBody>
+          <a:bodyPr wrap="square"/>
+          <a:lstStyle/>
+          <a:p>
+            <a:pPr algn="l">
+              <a:spcBef>
+                <a:spcPts val="0"/>
+              </a:spcBef>
+              <a:spcAft>
+                <a:spcPts val="0"/>
+              </a:spcAft>
+            </a:pPr>
+            <a:r>
+              <a:rPr sz="1300" b="0">
+                <a:solidFill>
+                  <a:srgbClr val="4A585C"/>
+                </a:solidFill>
+                <a:latin typeface="Yu Gothic"/>
+                <a:ea typeface="Yu Gothic"/>
+                <a:cs typeface="Yu Gothic"/>
+              </a:rPr>
+              <a:t>params / metrics。方策 .pt 本体の共有は DVC / MinIO</a:t>
+            </a:r>
+          </a:p>
+        </p:txBody>
+      </p:sp>
+      <p:sp>
+        <p:nvSpPr>
+          <p:cNvPr id="6" name="Rounded Rectangle 5"/>
+          <p:cNvSpPr/>
+          <p:nvPr/>
+        </p:nvSpPr>
+        <p:spPr>
+          <a:xfrm>
+            <a:off x="365760" y="1371600"/>
+            <a:ext cx="11430000" cy="5029200"/>
+          </a:xfrm>
+          <a:prstGeom prst="roundRect">
+            <a:avLst>
+              <a:gd name="adj" fmla="val 4000"/>
+            </a:avLst>
+          </a:prstGeom>
+          <a:solidFill>
+            <a:srgbClr val="FFFFFF"/>
+          </a:solidFill>
+          <a:ln>
+            <a:solidFill>
+              <a:srgbClr val="E8E4DC"/>
+            </a:solidFill>
+          </a:ln>
+        </p:spPr>
+        <p:style>
+          <a:lnRef idx="1">
+            <a:schemeClr val="accent1"/>
+          </a:lnRef>
+          <a:fillRef idx="3">
+            <a:schemeClr val="accent1"/>
+          </a:fillRef>
+          <a:effectRef idx="2">
+            <a:schemeClr val="accent1"/>
+          </a:effectRef>
+          <a:fontRef idx="minor">
+            <a:schemeClr val="lt1"/>
+          </a:fontRef>
+        </p:style>
+        <p:txBody>
+          <a:bodyPr rtlCol="0" anchor="ctr"/>
+          <a:lstStyle/>
+          <a:p>
+            <a:pPr algn="ctr"/>
+          </a:p>
+        </p:txBody>
+      </p:sp>
+      <p:pic>
+        <p:nvPicPr>
+          <p:cNvPr id="7" name="Picture 6" descr="mlflow_run_detail.png"/>
+          <p:cNvPicPr>
+            <a:picLocks noChangeAspect="1"/>
+          </p:cNvPicPr>
+          <p:nvPr/>
+        </p:nvPicPr>
+        <p:blipFill>
+          <a:blip r:embed="rId2"/>
+          <a:stretch>
+            <a:fillRect/>
+          </a:stretch>
+        </p:blipFill>
+        <p:spPr>
+          <a:xfrm>
+            <a:off x="2203704" y="1463040"/>
+            <a:ext cx="7754112" cy="4846320"/>
+          </a:xfrm>
+          <a:prstGeom prst="rect">
+            <a:avLst/>
+          </a:prstGeom>
+        </p:spPr>
+      </p:pic>
+    </p:spTree>
+  </p:cSld>
+  <p:clrMapOvr>
+    <a:masterClrMapping/>
+  </p:clrMapOvr>
+</p:sld>
+</file>
+
+<file path=ppt/slides/slide15.xml><?xml version="1.0" encoding="utf-8"?>
+<p:sld xmlns:a="http://schemas.openxmlformats.org/drawingml/2006/main" xmlns:p="http://schemas.openxmlformats.org/presentationml/2006/main" xmlns:r="http://schemas.openxmlformats.org/officeDocument/2006/relationships">
+  <p:cSld>
+    <p:spTree>
+      <p:nvGrpSpPr>
+        <p:cNvPr id="1" name=""/>
+        <p:cNvGrpSpPr/>
+        <p:nvPr/>
+      </p:nvGrpSpPr>
+      <p:grpSpPr/>
+      <p:sp>
+        <p:nvSpPr>
+          <p:cNvPr id="2" name="Rectangle 1"/>
+          <p:cNvSpPr/>
+          <p:nvPr/>
+        </p:nvSpPr>
+        <p:spPr>
+          <a:xfrm>
+            <a:off x="0" y="0"/>
+            <a:ext cx="12191695" cy="6858000"/>
+          </a:xfrm>
+          <a:prstGeom prst="rect">
+            <a:avLst/>
+          </a:prstGeom>
+          <a:solidFill>
+            <a:srgbClr val="F6F3EC"/>
+          </a:solidFill>
+          <a:ln>
+            <a:noFill/>
+          </a:ln>
+        </p:spPr>
+        <p:style>
+          <a:lnRef idx="1">
+            <a:schemeClr val="accent1"/>
+          </a:lnRef>
+          <a:fillRef idx="3">
+            <a:schemeClr val="accent1"/>
+          </a:fillRef>
+          <a:effectRef idx="2">
+            <a:schemeClr val="accent1"/>
+          </a:effectRef>
+          <a:fontRef idx="minor">
+            <a:schemeClr val="lt1"/>
+          </a:fontRef>
+        </p:style>
+        <p:txBody>
+          <a:bodyPr rtlCol="0" anchor="ctr"/>
+          <a:lstStyle/>
+          <a:p>
+            <a:pPr algn="ctr"/>
+          </a:p>
+        </p:txBody>
+      </p:sp>
+      <p:sp>
+        <p:nvSpPr>
+          <p:cNvPr id="3" name="Rectangle 2"/>
+          <p:cNvSpPr/>
+          <p:nvPr/>
+        </p:nvSpPr>
+        <p:spPr>
+          <a:xfrm>
+            <a:off x="0" y="0"/>
+            <a:ext cx="12191695" cy="868680"/>
+          </a:xfrm>
+          <a:prstGeom prst="rect">
+            <a:avLst/>
+          </a:prstGeom>
+          <a:solidFill>
+            <a:srgbClr val="1F4E5F"/>
+          </a:solidFill>
+          <a:ln>
+            <a:noFill/>
+          </a:ln>
+        </p:spPr>
+        <p:style>
+          <a:lnRef idx="1">
+            <a:schemeClr val="accent1"/>
+          </a:lnRef>
+          <a:fillRef idx="3">
+            <a:schemeClr val="accent1"/>
+          </a:fillRef>
+          <a:effectRef idx="2">
+            <a:schemeClr val="accent1"/>
+          </a:effectRef>
+          <a:fontRef idx="minor">
+            <a:schemeClr val="lt1"/>
+          </a:fontRef>
+        </p:style>
+        <p:txBody>
+          <a:bodyPr rtlCol="0" anchor="ctr"/>
+          <a:lstStyle/>
+          <a:p>
+            <a:pPr algn="ctr"/>
+          </a:p>
+        </p:txBody>
+      </p:sp>
+      <p:sp>
+        <p:nvSpPr>
+          <p:cNvPr id="4" name="TextBox 3"/>
+          <p:cNvSpPr txBox="1"/>
+          <p:nvPr/>
+        </p:nvSpPr>
+        <p:spPr>
+          <a:xfrm>
+            <a:off x="411480" y="164592"/>
+            <a:ext cx="11338560" cy="640080"/>
+          </a:xfrm>
+          <a:prstGeom prst="rect">
+            <a:avLst/>
+          </a:prstGeom>
+          <a:noFill/>
+        </p:spPr>
+        <p:txBody>
+          <a:bodyPr wrap="square"/>
+          <a:lstStyle/>
+          <a:p>
+            <a:pPr algn="l">
+              <a:spcBef>
+                <a:spcPts val="0"/>
+              </a:spcBef>
+              <a:spcAft>
+                <a:spcPts val="0"/>
+              </a:spcAft>
+            </a:pPr>
+            <a:r>
+              <a:rPr sz="2600" b="1">
+                <a:solidFill>
+                  <a:srgbClr val="FFFFFF"/>
+                </a:solidFill>
+                <a:latin typeface="Yu Gothic"/>
+                <a:ea typeface="Yu Gothic"/>
+                <a:cs typeface="Yu Gothic"/>
+              </a:rPr>
+              <a:t>MLflow：メトリクス表示（UI スナップショット）</a:t>
+            </a:r>
+          </a:p>
+        </p:txBody>
+      </p:sp>
+      <p:sp>
+        <p:nvSpPr>
+          <p:cNvPr id="5" name="TextBox 4"/>
+          <p:cNvSpPr txBox="1"/>
+          <p:nvPr/>
+        </p:nvSpPr>
+        <p:spPr>
+          <a:xfrm>
+            <a:off x="411480" y="960120"/>
+            <a:ext cx="11338560" cy="365760"/>
+          </a:xfrm>
+          <a:prstGeom prst="rect">
+            <a:avLst/>
+          </a:prstGeom>
+          <a:noFill/>
+        </p:spPr>
+        <p:txBody>
+          <a:bodyPr wrap="square"/>
+          <a:lstStyle/>
+          <a:p>
+            <a:pPr algn="l">
+              <a:spcBef>
+                <a:spcPts val="0"/>
+              </a:spcBef>
+              <a:spcAft>
+                <a:spcPts val="0"/>
+              </a:spcAft>
+            </a:pPr>
+            <a:r>
+              <a:rPr sz="1300" b="0">
+                <a:solidFill>
+                  <a:srgbClr val="4A585C"/>
+                </a:solidFill>
+                <a:latin typeface="Yu Gothic"/>
+                <a:ea typeface="Yu Gothic"/>
+                <a:cs typeface="Yu Gothic"/>
+              </a:rPr>
+              <a:t>ラン詳細画面のメトリクス／チャート領域</a:t>
+            </a:r>
+          </a:p>
+        </p:txBody>
+      </p:sp>
+      <p:sp>
+        <p:nvSpPr>
+          <p:cNvPr id="6" name="Rounded Rectangle 5"/>
+          <p:cNvSpPr/>
+          <p:nvPr/>
+        </p:nvSpPr>
+        <p:spPr>
+          <a:xfrm>
+            <a:off x="365760" y="1371600"/>
+            <a:ext cx="11430000" cy="5029200"/>
+          </a:xfrm>
+          <a:prstGeom prst="roundRect">
+            <a:avLst>
+              <a:gd name="adj" fmla="val 4000"/>
+            </a:avLst>
+          </a:prstGeom>
+          <a:solidFill>
+            <a:srgbClr val="FFFFFF"/>
+          </a:solidFill>
+          <a:ln>
+            <a:solidFill>
+              <a:srgbClr val="E8E4DC"/>
+            </a:solidFill>
+          </a:ln>
+        </p:spPr>
+        <p:style>
+          <a:lnRef idx="1">
+            <a:schemeClr val="accent1"/>
+          </a:lnRef>
+          <a:fillRef idx="3">
+            <a:schemeClr val="accent1"/>
+          </a:fillRef>
+          <a:effectRef idx="2">
+            <a:schemeClr val="accent1"/>
+          </a:effectRef>
+          <a:fontRef idx="minor">
+            <a:schemeClr val="lt1"/>
+          </a:fontRef>
+        </p:style>
+        <p:txBody>
+          <a:bodyPr rtlCol="0" anchor="ctr"/>
+          <a:lstStyle/>
+          <a:p>
+            <a:pPr algn="ctr"/>
+          </a:p>
+        </p:txBody>
+      </p:sp>
+      <p:pic>
+        <p:nvPicPr>
+          <p:cNvPr id="7" name="Picture 6" descr="mlflow_metric_curves.png"/>
+          <p:cNvPicPr>
+            <a:picLocks noChangeAspect="1"/>
+          </p:cNvPicPr>
+          <p:nvPr/>
+        </p:nvPicPr>
+        <p:blipFill>
+          <a:blip r:embed="rId2"/>
+          <a:stretch>
+            <a:fillRect/>
+          </a:stretch>
+        </p:blipFill>
+        <p:spPr>
+          <a:xfrm>
+            <a:off x="2203704" y="1463040"/>
+            <a:ext cx="7754112" cy="4846320"/>
+          </a:xfrm>
+          <a:prstGeom prst="rect">
+            <a:avLst/>
+          </a:prstGeom>
+        </p:spPr>
+      </p:pic>
+    </p:spTree>
+  </p:cSld>
+  <p:clrMapOvr>
+    <a:masterClrMapping/>
+  </p:clrMapOvr>
+</p:sld>
+</file>
+
+<file path=ppt/slides/slide16.xml><?xml version="1.0" encoding="utf-8"?>
+<p:sld xmlns:a="http://schemas.openxmlformats.org/drawingml/2006/main" xmlns:p="http://schemas.openxmlformats.org/presentationml/2006/main" xmlns:r="http://schemas.openxmlformats.org/officeDocument/2006/relationships">
+  <p:cSld>
+    <p:spTree>
+      <p:nvGrpSpPr>
+        <p:cNvPr id="1" name=""/>
+        <p:cNvGrpSpPr/>
+        <p:nvPr/>
+      </p:nvGrpSpPr>
+      <p:grpSpPr/>
+      <p:sp>
+        <p:nvSpPr>
+          <p:cNvPr id="2" name="Rectangle 1"/>
+          <p:cNvSpPr/>
+          <p:nvPr/>
+        </p:nvSpPr>
+        <p:spPr>
+          <a:xfrm>
+            <a:off x="0" y="0"/>
+            <a:ext cx="12191695" cy="6858000"/>
+          </a:xfrm>
+          <a:prstGeom prst="rect">
+            <a:avLst/>
+          </a:prstGeom>
+          <a:solidFill>
+            <a:srgbClr val="F6F3EC"/>
+          </a:solidFill>
+          <a:ln>
+            <a:noFill/>
+          </a:ln>
+        </p:spPr>
+        <p:style>
+          <a:lnRef idx="1">
+            <a:schemeClr val="accent1"/>
+          </a:lnRef>
+          <a:fillRef idx="3">
+            <a:schemeClr val="accent1"/>
+          </a:fillRef>
+          <a:effectRef idx="2">
+            <a:schemeClr val="accent1"/>
+          </a:effectRef>
+          <a:fontRef idx="minor">
+            <a:schemeClr val="lt1"/>
+          </a:fontRef>
+        </p:style>
+        <p:txBody>
+          <a:bodyPr rtlCol="0" anchor="ctr"/>
+          <a:lstStyle/>
+          <a:p>
+            <a:pPr algn="ctr"/>
+          </a:p>
+        </p:txBody>
+      </p:sp>
+      <p:sp>
+        <p:nvSpPr>
+          <p:cNvPr id="3" name="Rectangle 2"/>
+          <p:cNvSpPr/>
+          <p:nvPr/>
+        </p:nvSpPr>
+        <p:spPr>
+          <a:xfrm>
+            <a:off x="0" y="0"/>
+            <a:ext cx="12191695" cy="868680"/>
+          </a:xfrm>
+          <a:prstGeom prst="rect">
+            <a:avLst/>
+          </a:prstGeom>
+          <a:solidFill>
+            <a:srgbClr val="1F4E5F"/>
+          </a:solidFill>
+          <a:ln>
+            <a:noFill/>
+          </a:ln>
+        </p:spPr>
+        <p:style>
+          <a:lnRef idx="1">
+            <a:schemeClr val="accent1"/>
+          </a:lnRef>
+          <a:fillRef idx="3">
+            <a:schemeClr val="accent1"/>
+          </a:fillRef>
+          <a:effectRef idx="2">
+            <a:schemeClr val="accent1"/>
+          </a:effectRef>
+          <a:fontRef idx="minor">
+            <a:schemeClr val="lt1"/>
+          </a:fontRef>
+        </p:style>
+        <p:txBody>
+          <a:bodyPr rtlCol="0" anchor="ctr"/>
+          <a:lstStyle/>
+          <a:p>
+            <a:pPr algn="ctr"/>
+          </a:p>
+        </p:txBody>
+      </p:sp>
+      <p:sp>
+        <p:nvSpPr>
+          <p:cNvPr id="4" name="TextBox 3"/>
+          <p:cNvSpPr txBox="1"/>
+          <p:nvPr/>
+        </p:nvSpPr>
+        <p:spPr>
+          <a:xfrm>
+            <a:off x="411480" y="164592"/>
+            <a:ext cx="11338560" cy="640080"/>
+          </a:xfrm>
+          <a:prstGeom prst="rect">
+            <a:avLst/>
+          </a:prstGeom>
+          <a:noFill/>
+        </p:spPr>
+        <p:txBody>
+          <a:bodyPr wrap="square"/>
+          <a:lstStyle/>
+          <a:p>
+            <a:pPr algn="l">
+              <a:spcBef>
+                <a:spcPts val="0"/>
+              </a:spcBef>
+              <a:spcAft>
+                <a:spcPts val="0"/>
+              </a:spcAft>
+            </a:pPr>
+            <a:r>
+              <a:rPr sz="2600" b="1">
+                <a:solidFill>
+                  <a:srgbClr val="FFFFFF"/>
+                </a:solidFill>
+                <a:latin typeface="Yu Gothic"/>
+                <a:ea typeface="Yu Gothic"/>
+                <a:cs typeface="Yu Gothic"/>
+              </a:rPr>
               <a:t>最短チェックリスト</a:t>
             </a:r>
           </a:p>
@@ -4838,7 +6650,7 @@
                 <a:ea typeface="Yu Gothic"/>
                 <a:cs typeface="Yu Gothic"/>
               </a:rPr>
-              <a:t>いつ何を使うか</a:t>
+              <a:t>ユーザの使い方：全体フロー</a:t>
             </a:r>
           </a:p>
         </p:txBody>
@@ -4880,21 +6692,129 @@
                 <a:ea typeface="Yu Gothic"/>
                 <a:cs typeface="Yu Gothic"/>
               </a:rPr>
-              <a:t>ホットパスでは使わず、区切り・引っ越し・提出で使う</a:t>
-            </a:r>
-          </a:p>
-        </p:txBody>
-      </p:sp>
-      <p:sp>
-        <p:nvSpPr>
-          <p:cNvPr id="6" name="TextBox 5"/>
+              <a:t>起動スクリプト → 学習 → 区切りで共有 → 復元・推論 → 実機へ配信（すべてメニューから）</a:t>
+            </a:r>
+          </a:p>
+        </p:txBody>
+      </p:sp>
+      <p:sp>
+        <p:nvSpPr>
+          <p:cNvPr id="6" name="Rounded Rectangle 5"/>
+          <p:cNvSpPr/>
+          <p:nvPr/>
+        </p:nvSpPr>
+        <p:spPr>
+          <a:xfrm>
+            <a:off x="411480" y="1600200"/>
+            <a:ext cx="1965960" cy="3200400"/>
+          </a:xfrm>
+          <a:prstGeom prst="roundRect">
+            <a:avLst>
+              <a:gd name="adj" fmla="val 7000"/>
+            </a:avLst>
+          </a:prstGeom>
+          <a:solidFill>
+            <a:srgbClr val="FFFFFF"/>
+          </a:solidFill>
+          <a:ln w="15875">
+            <a:solidFill>
+              <a:srgbClr val="1F4E5F"/>
+            </a:solidFill>
+          </a:ln>
+        </p:spPr>
+        <p:style>
+          <a:lnRef idx="1">
+            <a:schemeClr val="accent1"/>
+          </a:lnRef>
+          <a:fillRef idx="3">
+            <a:schemeClr val="accent1"/>
+          </a:fillRef>
+          <a:effectRef idx="2">
+            <a:schemeClr val="accent1"/>
+          </a:effectRef>
+          <a:fontRef idx="minor">
+            <a:schemeClr val="lt1"/>
+          </a:fontRef>
+        </p:style>
+        <p:txBody>
+          <a:bodyPr rtlCol="0" anchor="ctr"/>
+          <a:lstStyle/>
+          <a:p>
+            <a:pPr algn="ctr"/>
+          </a:p>
+        </p:txBody>
+      </p:sp>
+      <p:sp>
+        <p:nvSpPr>
+          <p:cNvPr id="7" name="Rectangle 6"/>
+          <p:cNvSpPr/>
+          <p:nvPr/>
+        </p:nvSpPr>
+        <p:spPr>
+          <a:xfrm>
+            <a:off x="411480" y="1600200"/>
+            <a:ext cx="1965960" cy="420624"/>
+          </a:xfrm>
+          <a:prstGeom prst="rect">
+            <a:avLst/>
+          </a:prstGeom>
+          <a:solidFill>
+            <a:srgbClr val="1F4E5F"/>
+          </a:solidFill>
+          <a:ln>
+            <a:noFill/>
+          </a:ln>
+        </p:spPr>
+        <p:style>
+          <a:lnRef idx="1">
+            <a:schemeClr val="accent1"/>
+          </a:lnRef>
+          <a:fillRef idx="3">
+            <a:schemeClr val="accent1"/>
+          </a:fillRef>
+          <a:effectRef idx="2">
+            <a:schemeClr val="accent1"/>
+          </a:effectRef>
+          <a:fontRef idx="minor">
+            <a:schemeClr val="lt1"/>
+          </a:fontRef>
+        </p:style>
+        <p:txBody>
+          <a:bodyPr rtlCol="0" anchor="ctr" wrap="square" tIns="36576"/>
+          <a:lstStyle/>
+          <a:p>
+            <a:pPr algn="ctr">
+              <a:spcBef>
+                <a:spcPts val="0"/>
+              </a:spcBef>
+              <a:spcAft>
+                <a:spcPts val="0"/>
+              </a:spcAft>
+            </a:pPr>
+            <a:r>
+              <a:rPr sz="1500" b="1">
+                <a:solidFill>
+                  <a:srgbClr val="FFFFFF"/>
+                </a:solidFill>
+                <a:latin typeface="Yu Gothic"/>
+                <a:ea typeface="Yu Gothic"/>
+                <a:cs typeface="Yu Gothic"/>
+              </a:rPr>
+              <a:t>① 学習する</a:t>
+            </a:r>
+          </a:p>
+        </p:txBody>
+      </p:sp>
+      <p:sp>
+        <p:nvSpPr>
+          <p:cNvPr id="8" name="TextBox 7"/>
           <p:cNvSpPr txBox="1"/>
           <p:nvPr/>
         </p:nvSpPr>
         <p:spPr>
           <a:xfrm>
-            <a:off x="640080" y="1645920"/>
-            <a:ext cx="10972800" cy="4114800"/>
+            <a:off x="502920" y="2057400"/>
+            <a:ext cx="1783080" cy="2706624"/>
           </a:xfrm>
           <a:prstGeom prst="rect">
             <a:avLst/>
@@ -4910,11 +6830,11 @@
                 <a:spcPts val="0"/>
               </a:spcBef>
               <a:spcAft>
-                <a:spcPts val="1600"/>
-              </a:spcAft>
-            </a:pPr>
-            <a:r>
-              <a:rPr sz="2000" b="0">
+                <a:spcPts val="300"/>
+              </a:spcAft>
+            </a:pPr>
+            <a:r>
+              <a:rPr sz="1300" b="0">
                 <a:solidFill>
                   <a:srgbClr val="1C282C"/>
                 </a:solidFill>
@@ -4922,7 +6842,7 @@
                 <a:ea typeface="Yu Gothic"/>
                 <a:cs typeface="Yu Gothic"/>
               </a:rPr>
-              <a:t>1. 学習 → logs/&lt;stage&gt;/ppo_*.pt + metrics.jsonl + MLflow 記録</a:t>
+              <a:t>起動スクリプト</a:t>
             </a:r>
           </a:p>
           <a:p>
@@ -4931,11 +6851,11 @@
                 <a:spcPts val="0"/>
               </a:spcBef>
               <a:spcAft>
-                <a:spcPts val="1600"/>
-              </a:spcAft>
-            </a:pPr>
-            <a:r>
-              <a:rPr sz="2000" b="0">
+                <a:spcPts val="300"/>
+              </a:spcAft>
+            </a:pPr>
+            <a:r>
+              <a:rPr sz="1300" b="0">
                 <a:solidFill>
                   <a:srgbClr val="1C282C"/>
                 </a:solidFill>
@@ -4943,7 +6863,7 @@
                 <a:ea typeface="Yu Gothic"/>
                 <a:cs typeface="Yu Gothic"/>
               </a:rPr>
-              <a:t>2. 区切り → メニュー 9 → 3（最良）または 4（最新）で publish → push</a:t>
+              <a:t>PickAndCarry_run</a:t>
             </a:r>
           </a:p>
           <a:p>
@@ -4952,11 +6872,11 @@
                 <a:spcPts val="0"/>
               </a:spcBef>
               <a:spcAft>
-                <a:spcPts val="1600"/>
-              </a:spcAft>
-            </a:pPr>
-            <a:r>
-              <a:rPr sz="2000" b="0">
+                <a:spcPts val="300"/>
+              </a:spcAft>
+            </a:pPr>
+            <a:r>
+              <a:rPr sz="1300" b="0">
                 <a:solidFill>
                   <a:srgbClr val="1C282C"/>
                 </a:solidFill>
@@ -4964,7 +6884,7 @@
                 <a:ea typeface="Yu Gothic"/>
                 <a:cs typeface="Yu Gothic"/>
               </a:rPr>
-              <a:t>3. 確認 → MinIO Console の pai-dvc（実体） / Git の .dvc（ポインタ）</a:t>
+              <a:t>→ 学習メニュー</a:t>
             </a:r>
           </a:p>
           <a:p>
@@ -4973,11 +6893,11 @@
                 <a:spcPts val="0"/>
               </a:spcBef>
               <a:spcAft>
-                <a:spcPts val="1600"/>
-              </a:spcAft>
-            </a:pPr>
-            <a:r>
-              <a:rPr sz="2000" b="0">
+                <a:spcPts val="300"/>
+              </a:spcAft>
+            </a:pPr>
+            <a:r>
+              <a:rPr sz="1300" b="0">
                 <a:solidFill>
                   <a:srgbClr val="1C282C"/>
                 </a:solidFill>
@@ -4985,7 +6905,7 @@
                 <a:ea typeface="Yu Gothic"/>
                 <a:cs typeface="Yu Gothic"/>
               </a:rPr>
-              <a:t>4. 復元・推論 → pull → restore、または 9 → 6 で best.pt を play</a:t>
+              <a:t/>
             </a:r>
           </a:p>
           <a:p>
@@ -4994,11 +6914,11 @@
                 <a:spcPts val="0"/>
               </a:spcBef>
               <a:spcAft>
-                <a:spcPts val="1600"/>
-              </a:spcAft>
-            </a:pPr>
-            <a:r>
-              <a:rPr sz="2000" b="0">
+                <a:spcPts val="300"/>
+              </a:spcAft>
+            </a:pPr>
+            <a:r>
+              <a:rPr sz="1300" b="0">
                 <a:solidFill>
                   <a:srgbClr val="1C282C"/>
                 </a:solidFill>
@@ -5006,7 +6926,1346 @@
                 <a:ea typeface="Yu Gothic"/>
                 <a:cs typeface="Yu Gothic"/>
               </a:rPr>
-              <a:t>5. 曲線確認 → MLflow UI（実験ノート）。重み本体は DVC/MinIO</a:t>
+              <a:t>自動で記録:</a:t>
+            </a:r>
+          </a:p>
+          <a:p>
+            <a:pPr algn="l">
+              <a:spcBef>
+                <a:spcPts val="0"/>
+              </a:spcBef>
+              <a:spcAft>
+                <a:spcPts val="300"/>
+              </a:spcAft>
+            </a:pPr>
+            <a:r>
+              <a:rPr sz="1300" b="0">
+                <a:solidFill>
+                  <a:srgbClr val="1C282C"/>
+                </a:solidFill>
+                <a:latin typeface="Yu Gothic"/>
+                <a:ea typeface="Yu Gothic"/>
+                <a:cs typeface="Yu Gothic"/>
+              </a:rPr>
+              <a:t>logs/ に .pt</a:t>
+            </a:r>
+          </a:p>
+          <a:p>
+            <a:pPr algn="l">
+              <a:spcBef>
+                <a:spcPts val="0"/>
+              </a:spcBef>
+              <a:spcAft>
+                <a:spcPts val="300"/>
+              </a:spcAft>
+            </a:pPr>
+            <a:r>
+              <a:rPr sz="1300" b="0">
+                <a:solidFill>
+                  <a:srgbClr val="1C282C"/>
+                </a:solidFill>
+                <a:latin typeface="Yu Gothic"/>
+                <a:ea typeface="Yu Gothic"/>
+                <a:cs typeface="Yu Gothic"/>
+              </a:rPr>
+              <a:t>MLflow に曲線</a:t>
+            </a:r>
+          </a:p>
+        </p:txBody>
+      </p:sp>
+      <p:sp>
+        <p:nvSpPr>
+          <p:cNvPr id="9" name="Right Arrow 8"/>
+          <p:cNvSpPr/>
+          <p:nvPr/>
+        </p:nvSpPr>
+        <p:spPr>
+          <a:xfrm>
+            <a:off x="2395728" y="3017520"/>
+            <a:ext cx="347472" cy="365760"/>
+          </a:xfrm>
+          <a:prstGeom prst="rightArrow">
+            <a:avLst/>
+          </a:prstGeom>
+          <a:solidFill>
+            <a:srgbClr val="4A585C"/>
+          </a:solidFill>
+          <a:ln>
+            <a:noFill/>
+          </a:ln>
+        </p:spPr>
+        <p:style>
+          <a:lnRef idx="1">
+            <a:schemeClr val="accent1"/>
+          </a:lnRef>
+          <a:fillRef idx="3">
+            <a:schemeClr val="accent1"/>
+          </a:fillRef>
+          <a:effectRef idx="2">
+            <a:schemeClr val="accent1"/>
+          </a:effectRef>
+          <a:fontRef idx="minor">
+            <a:schemeClr val="lt1"/>
+          </a:fontRef>
+        </p:style>
+        <p:txBody>
+          <a:bodyPr rtlCol="0" anchor="ctr"/>
+          <a:lstStyle/>
+          <a:p>
+            <a:pPr algn="ctr"/>
+          </a:p>
+        </p:txBody>
+      </p:sp>
+      <p:sp>
+        <p:nvSpPr>
+          <p:cNvPr id="10" name="Rounded Rectangle 9"/>
+          <p:cNvSpPr/>
+          <p:nvPr/>
+        </p:nvSpPr>
+        <p:spPr>
+          <a:xfrm>
+            <a:off x="2761488" y="1600200"/>
+            <a:ext cx="1965960" cy="3200400"/>
+          </a:xfrm>
+          <a:prstGeom prst="roundRect">
+            <a:avLst>
+              <a:gd name="adj" fmla="val 7000"/>
+            </a:avLst>
+          </a:prstGeom>
+          <a:solidFill>
+            <a:srgbClr val="FFFFFF"/>
+          </a:solidFill>
+          <a:ln w="15875">
+            <a:solidFill>
+              <a:srgbClr val="8A452A"/>
+            </a:solidFill>
+          </a:ln>
+        </p:spPr>
+        <p:style>
+          <a:lnRef idx="1">
+            <a:schemeClr val="accent1"/>
+          </a:lnRef>
+          <a:fillRef idx="3">
+            <a:schemeClr val="accent1"/>
+          </a:fillRef>
+          <a:effectRef idx="2">
+            <a:schemeClr val="accent1"/>
+          </a:effectRef>
+          <a:fontRef idx="minor">
+            <a:schemeClr val="lt1"/>
+          </a:fontRef>
+        </p:style>
+        <p:txBody>
+          <a:bodyPr rtlCol="0" anchor="ctr"/>
+          <a:lstStyle/>
+          <a:p>
+            <a:pPr algn="ctr"/>
+          </a:p>
+        </p:txBody>
+      </p:sp>
+      <p:sp>
+        <p:nvSpPr>
+          <p:cNvPr id="11" name="Rectangle 10"/>
+          <p:cNvSpPr/>
+          <p:nvPr/>
+        </p:nvSpPr>
+        <p:spPr>
+          <a:xfrm>
+            <a:off x="2761488" y="1600200"/>
+            <a:ext cx="1965960" cy="420624"/>
+          </a:xfrm>
+          <a:prstGeom prst="rect">
+            <a:avLst/>
+          </a:prstGeom>
+          <a:solidFill>
+            <a:srgbClr val="8A452A"/>
+          </a:solidFill>
+          <a:ln>
+            <a:noFill/>
+          </a:ln>
+        </p:spPr>
+        <p:style>
+          <a:lnRef idx="1">
+            <a:schemeClr val="accent1"/>
+          </a:lnRef>
+          <a:fillRef idx="3">
+            <a:schemeClr val="accent1"/>
+          </a:fillRef>
+          <a:effectRef idx="2">
+            <a:schemeClr val="accent1"/>
+          </a:effectRef>
+          <a:fontRef idx="minor">
+            <a:schemeClr val="lt1"/>
+          </a:fontRef>
+        </p:style>
+        <p:txBody>
+          <a:bodyPr rtlCol="0" anchor="ctr" wrap="square" tIns="36576"/>
+          <a:lstStyle/>
+          <a:p>
+            <a:pPr algn="ctr">
+              <a:spcBef>
+                <a:spcPts val="0"/>
+              </a:spcBef>
+              <a:spcAft>
+                <a:spcPts val="0"/>
+              </a:spcAft>
+            </a:pPr>
+            <a:r>
+              <a:rPr sz="1500" b="1">
+                <a:solidFill>
+                  <a:srgbClr val="FFFFFF"/>
+                </a:solidFill>
+                <a:latin typeface="Yu Gothic"/>
+                <a:ea typeface="Yu Gothic"/>
+                <a:cs typeface="Yu Gothic"/>
+              </a:rPr>
+              <a:t>② 区切りで共有</a:t>
+            </a:r>
+          </a:p>
+        </p:txBody>
+      </p:sp>
+      <p:sp>
+        <p:nvSpPr>
+          <p:cNvPr id="12" name="TextBox 11"/>
+          <p:cNvSpPr txBox="1"/>
+          <p:nvPr/>
+        </p:nvSpPr>
+        <p:spPr>
+          <a:xfrm>
+            <a:off x="2852928" y="2057400"/>
+            <a:ext cx="1783080" cy="2706624"/>
+          </a:xfrm>
+          <a:prstGeom prst="rect">
+            <a:avLst/>
+          </a:prstGeom>
+          <a:noFill/>
+        </p:spPr>
+        <p:txBody>
+          <a:bodyPr wrap="square"/>
+          <a:lstStyle/>
+          <a:p>
+            <a:pPr algn="l">
+              <a:spcBef>
+                <a:spcPts val="0"/>
+              </a:spcBef>
+              <a:spcAft>
+                <a:spcPts val="300"/>
+              </a:spcAft>
+            </a:pPr>
+            <a:r>
+              <a:rPr sz="1300" b="0">
+                <a:solidFill>
+                  <a:srgbClr val="1C282C"/>
+                </a:solidFill>
+                <a:latin typeface="Yu Gothic"/>
+                <a:ea typeface="Yu Gothic"/>
+                <a:cs typeface="Yu Gothic"/>
+              </a:rPr>
+              <a:t>メニュー 9</a:t>
+            </a:r>
+          </a:p>
+          <a:p>
+            <a:pPr algn="l">
+              <a:spcBef>
+                <a:spcPts val="0"/>
+              </a:spcBef>
+              <a:spcAft>
+                <a:spcPts val="300"/>
+              </a:spcAft>
+            </a:pPr>
+            <a:r>
+              <a:rPr sz="1300" b="0">
+                <a:solidFill>
+                  <a:srgbClr val="1C282C"/>
+                </a:solidFill>
+                <a:latin typeface="Yu Gothic"/>
+                <a:ea typeface="Yu Gothic"/>
+                <a:cs typeface="Yu Gothic"/>
+              </a:rPr>
+              <a:t>1 MinIO 起動</a:t>
+            </a:r>
+          </a:p>
+          <a:p>
+            <a:pPr algn="l">
+              <a:spcBef>
+                <a:spcPts val="0"/>
+              </a:spcBef>
+              <a:spcAft>
+                <a:spcPts val="300"/>
+              </a:spcAft>
+            </a:pPr>
+            <a:r>
+              <a:rPr sz="1300" b="0">
+                <a:solidFill>
+                  <a:srgbClr val="1C282C"/>
+                </a:solidFill>
+                <a:latin typeface="Yu Gothic"/>
+                <a:ea typeface="Yu Gothic"/>
+                <a:cs typeface="Yu Gothic"/>
+              </a:rPr>
+              <a:t>3 最良を publish</a:t>
+            </a:r>
+          </a:p>
+          <a:p>
+            <a:pPr algn="l">
+              <a:spcBef>
+                <a:spcPts val="0"/>
+              </a:spcBef>
+              <a:spcAft>
+                <a:spcPts val="300"/>
+              </a:spcAft>
+            </a:pPr>
+            <a:r>
+              <a:rPr sz="1300" b="0">
+                <a:solidFill>
+                  <a:srgbClr val="1C282C"/>
+                </a:solidFill>
+                <a:latin typeface="Yu Gothic"/>
+                <a:ea typeface="Yu Gothic"/>
+                <a:cs typeface="Yu Gothic"/>
+              </a:rPr>
+              <a:t>  → push</a:t>
+            </a:r>
+          </a:p>
+          <a:p>
+            <a:pPr algn="l">
+              <a:spcBef>
+                <a:spcPts val="0"/>
+              </a:spcBef>
+              <a:spcAft>
+                <a:spcPts val="300"/>
+              </a:spcAft>
+            </a:pPr>
+            <a:r>
+              <a:rPr sz="1300" b="0">
+                <a:solidFill>
+                  <a:srgbClr val="1C282C"/>
+                </a:solidFill>
+                <a:latin typeface="Yu Gothic"/>
+                <a:ea typeface="Yu Gothic"/>
+                <a:cs typeface="Yu Gothic"/>
+              </a:rPr>
+              <a:t/>
+            </a:r>
+          </a:p>
+          <a:p>
+            <a:pPr algn="l">
+              <a:spcBef>
+                <a:spcPts val="0"/>
+              </a:spcBef>
+              <a:spcAft>
+                <a:spcPts val="300"/>
+              </a:spcAft>
+            </a:pPr>
+            <a:r>
+              <a:rPr sz="1300" b="0">
+                <a:solidFill>
+                  <a:srgbClr val="1C282C"/>
+                </a:solidFill>
+                <a:latin typeface="Yu Gothic"/>
+                <a:ea typeface="Yu Gothic"/>
+                <a:cs typeface="Yu Gothic"/>
+              </a:rPr>
+              <a:t>(4 は最新)</a:t>
+            </a:r>
+          </a:p>
+        </p:txBody>
+      </p:sp>
+      <p:sp>
+        <p:nvSpPr>
+          <p:cNvPr id="13" name="Right Arrow 12"/>
+          <p:cNvSpPr/>
+          <p:nvPr/>
+        </p:nvSpPr>
+        <p:spPr>
+          <a:xfrm>
+            <a:off x="4745736" y="3017520"/>
+            <a:ext cx="347472" cy="365760"/>
+          </a:xfrm>
+          <a:prstGeom prst="rightArrow">
+            <a:avLst/>
+          </a:prstGeom>
+          <a:solidFill>
+            <a:srgbClr val="4A585C"/>
+          </a:solidFill>
+          <a:ln>
+            <a:noFill/>
+          </a:ln>
+        </p:spPr>
+        <p:style>
+          <a:lnRef idx="1">
+            <a:schemeClr val="accent1"/>
+          </a:lnRef>
+          <a:fillRef idx="3">
+            <a:schemeClr val="accent1"/>
+          </a:fillRef>
+          <a:effectRef idx="2">
+            <a:schemeClr val="accent1"/>
+          </a:effectRef>
+          <a:fontRef idx="minor">
+            <a:schemeClr val="lt1"/>
+          </a:fontRef>
+        </p:style>
+        <p:txBody>
+          <a:bodyPr rtlCol="0" anchor="ctr"/>
+          <a:lstStyle/>
+          <a:p>
+            <a:pPr algn="ctr"/>
+          </a:p>
+        </p:txBody>
+      </p:sp>
+      <p:sp>
+        <p:nvSpPr>
+          <p:cNvPr id="14" name="Rounded Rectangle 13"/>
+          <p:cNvSpPr/>
+          <p:nvPr/>
+        </p:nvSpPr>
+        <p:spPr>
+          <a:xfrm>
+            <a:off x="5111496" y="1600200"/>
+            <a:ext cx="1965960" cy="3200400"/>
+          </a:xfrm>
+          <a:prstGeom prst="roundRect">
+            <a:avLst>
+              <a:gd name="adj" fmla="val 7000"/>
+            </a:avLst>
+          </a:prstGeom>
+          <a:solidFill>
+            <a:srgbClr val="FFFFFF"/>
+          </a:solidFill>
+          <a:ln w="15875">
+            <a:solidFill>
+              <a:srgbClr val="2C644A"/>
+            </a:solidFill>
+          </a:ln>
+        </p:spPr>
+        <p:style>
+          <a:lnRef idx="1">
+            <a:schemeClr val="accent1"/>
+          </a:lnRef>
+          <a:fillRef idx="3">
+            <a:schemeClr val="accent1"/>
+          </a:fillRef>
+          <a:effectRef idx="2">
+            <a:schemeClr val="accent1"/>
+          </a:effectRef>
+          <a:fontRef idx="minor">
+            <a:schemeClr val="lt1"/>
+          </a:fontRef>
+        </p:style>
+        <p:txBody>
+          <a:bodyPr rtlCol="0" anchor="ctr"/>
+          <a:lstStyle/>
+          <a:p>
+            <a:pPr algn="ctr"/>
+          </a:p>
+        </p:txBody>
+      </p:sp>
+      <p:sp>
+        <p:nvSpPr>
+          <p:cNvPr id="15" name="Rectangle 14"/>
+          <p:cNvSpPr/>
+          <p:nvPr/>
+        </p:nvSpPr>
+        <p:spPr>
+          <a:xfrm>
+            <a:off x="5111496" y="1600200"/>
+            <a:ext cx="1965960" cy="420624"/>
+          </a:xfrm>
+          <a:prstGeom prst="rect">
+            <a:avLst/>
+          </a:prstGeom>
+          <a:solidFill>
+            <a:srgbClr val="2C644A"/>
+          </a:solidFill>
+          <a:ln>
+            <a:noFill/>
+          </a:ln>
+        </p:spPr>
+        <p:style>
+          <a:lnRef idx="1">
+            <a:schemeClr val="accent1"/>
+          </a:lnRef>
+          <a:fillRef idx="3">
+            <a:schemeClr val="accent1"/>
+          </a:fillRef>
+          <a:effectRef idx="2">
+            <a:schemeClr val="accent1"/>
+          </a:effectRef>
+          <a:fontRef idx="minor">
+            <a:schemeClr val="lt1"/>
+          </a:fontRef>
+        </p:style>
+        <p:txBody>
+          <a:bodyPr rtlCol="0" anchor="ctr" wrap="square" tIns="36576"/>
+          <a:lstStyle/>
+          <a:p>
+            <a:pPr algn="ctr">
+              <a:spcBef>
+                <a:spcPts val="0"/>
+              </a:spcBef>
+              <a:spcAft>
+                <a:spcPts val="0"/>
+              </a:spcAft>
+            </a:pPr>
+            <a:r>
+              <a:rPr sz="1500" b="1">
+                <a:solidFill>
+                  <a:srgbClr val="FFFFFF"/>
+                </a:solidFill>
+                <a:latin typeface="Yu Gothic"/>
+                <a:ea typeface="Yu Gothic"/>
+                <a:cs typeface="Yu Gothic"/>
+              </a:rPr>
+              <a:t>③ 保管される</a:t>
+            </a:r>
+          </a:p>
+        </p:txBody>
+      </p:sp>
+      <p:sp>
+        <p:nvSpPr>
+          <p:cNvPr id="16" name="TextBox 15"/>
+          <p:cNvSpPr txBox="1"/>
+          <p:nvPr/>
+        </p:nvSpPr>
+        <p:spPr>
+          <a:xfrm>
+            <a:off x="5202936" y="2057400"/>
+            <a:ext cx="1783080" cy="2706624"/>
+          </a:xfrm>
+          <a:prstGeom prst="rect">
+            <a:avLst/>
+          </a:prstGeom>
+          <a:noFill/>
+        </p:spPr>
+        <p:txBody>
+          <a:bodyPr wrap="square"/>
+          <a:lstStyle/>
+          <a:p>
+            <a:pPr algn="l">
+              <a:spcBef>
+                <a:spcPts val="0"/>
+              </a:spcBef>
+              <a:spcAft>
+                <a:spcPts val="300"/>
+              </a:spcAft>
+            </a:pPr>
+            <a:r>
+              <a:rPr sz="1300" b="0">
+                <a:solidFill>
+                  <a:srgbClr val="1C282C"/>
+                </a:solidFill>
+                <a:latin typeface="Yu Gothic"/>
+                <a:ea typeface="Yu Gothic"/>
+                <a:cs typeface="Yu Gothic"/>
+              </a:rPr>
+              <a:t>Git: .dvc</a:t>
+            </a:r>
+          </a:p>
+          <a:p>
+            <a:pPr algn="l">
+              <a:spcBef>
+                <a:spcPts val="0"/>
+              </a:spcBef>
+              <a:spcAft>
+                <a:spcPts val="300"/>
+              </a:spcAft>
+            </a:pPr>
+            <a:r>
+              <a:rPr sz="1300" b="0">
+                <a:solidFill>
+                  <a:srgbClr val="1C282C"/>
+                </a:solidFill>
+                <a:latin typeface="Yu Gothic"/>
+                <a:ea typeface="Yu Gothic"/>
+                <a:cs typeface="Yu Gothic"/>
+              </a:rPr>
+              <a:t>（ポインタだけ）</a:t>
+            </a:r>
+          </a:p>
+          <a:p>
+            <a:pPr algn="l">
+              <a:spcBef>
+                <a:spcPts val="0"/>
+              </a:spcBef>
+              <a:spcAft>
+                <a:spcPts val="300"/>
+              </a:spcAft>
+            </a:pPr>
+            <a:r>
+              <a:rPr sz="1300" b="0">
+                <a:solidFill>
+                  <a:srgbClr val="1C282C"/>
+                </a:solidFill>
+                <a:latin typeface="Yu Gothic"/>
+                <a:ea typeface="Yu Gothic"/>
+                <a:cs typeface="Yu Gothic"/>
+              </a:rPr>
+              <a:t/>
+            </a:r>
+          </a:p>
+          <a:p>
+            <a:pPr algn="l">
+              <a:spcBef>
+                <a:spcPts val="0"/>
+              </a:spcBef>
+              <a:spcAft>
+                <a:spcPts val="300"/>
+              </a:spcAft>
+            </a:pPr>
+            <a:r>
+              <a:rPr sz="1300" b="0">
+                <a:solidFill>
+                  <a:srgbClr val="1C282C"/>
+                </a:solidFill>
+                <a:latin typeface="Yu Gothic"/>
+                <a:ea typeface="Yu Gothic"/>
+                <a:cs typeface="Yu Gothic"/>
+              </a:rPr>
+              <a:t>MinIO: pai-dvc</a:t>
+            </a:r>
+          </a:p>
+          <a:p>
+            <a:pPr algn="l">
+              <a:spcBef>
+                <a:spcPts val="0"/>
+              </a:spcBef>
+              <a:spcAft>
+                <a:spcPts val="300"/>
+              </a:spcAft>
+            </a:pPr>
+            <a:r>
+              <a:rPr sz="1300" b="0">
+                <a:solidFill>
+                  <a:srgbClr val="1C282C"/>
+                </a:solidFill>
+                <a:latin typeface="Yu Gothic"/>
+                <a:ea typeface="Yu Gothic"/>
+                <a:cs typeface="Yu Gothic"/>
+              </a:rPr>
+              <a:t>（重みの実体）</a:t>
+            </a:r>
+          </a:p>
+          <a:p>
+            <a:pPr algn="l">
+              <a:spcBef>
+                <a:spcPts val="0"/>
+              </a:spcBef>
+              <a:spcAft>
+                <a:spcPts val="300"/>
+              </a:spcAft>
+            </a:pPr>
+            <a:r>
+              <a:rPr sz="1300" b="0">
+                <a:solidFill>
+                  <a:srgbClr val="1C282C"/>
+                </a:solidFill>
+                <a:latin typeface="Yu Gothic"/>
+                <a:ea typeface="Yu Gothic"/>
+                <a:cs typeface="Yu Gothic"/>
+              </a:rPr>
+              <a:t/>
+            </a:r>
+          </a:p>
+          <a:p>
+            <a:pPr algn="l">
+              <a:spcBef>
+                <a:spcPts val="0"/>
+              </a:spcBef>
+              <a:spcAft>
+                <a:spcPts val="300"/>
+              </a:spcAft>
+            </a:pPr>
+            <a:r>
+              <a:rPr sz="1300" b="0">
+                <a:solidFill>
+                  <a:srgbClr val="1C282C"/>
+                </a:solidFill>
+                <a:latin typeface="Yu Gothic"/>
+                <a:ea typeface="Yu Gothic"/>
+                <a:cs typeface="Yu Gothic"/>
+              </a:rPr>
+              <a:t>Console で確認</a:t>
+            </a:r>
+          </a:p>
+        </p:txBody>
+      </p:sp>
+      <p:sp>
+        <p:nvSpPr>
+          <p:cNvPr id="17" name="Right Arrow 16"/>
+          <p:cNvSpPr/>
+          <p:nvPr/>
+        </p:nvSpPr>
+        <p:spPr>
+          <a:xfrm>
+            <a:off x="7095744" y="3017520"/>
+            <a:ext cx="347472" cy="365760"/>
+          </a:xfrm>
+          <a:prstGeom prst="rightArrow">
+            <a:avLst/>
+          </a:prstGeom>
+          <a:solidFill>
+            <a:srgbClr val="4A585C"/>
+          </a:solidFill>
+          <a:ln>
+            <a:noFill/>
+          </a:ln>
+        </p:spPr>
+        <p:style>
+          <a:lnRef idx="1">
+            <a:schemeClr val="accent1"/>
+          </a:lnRef>
+          <a:fillRef idx="3">
+            <a:schemeClr val="accent1"/>
+          </a:fillRef>
+          <a:effectRef idx="2">
+            <a:schemeClr val="accent1"/>
+          </a:effectRef>
+          <a:fontRef idx="minor">
+            <a:schemeClr val="lt1"/>
+          </a:fontRef>
+        </p:style>
+        <p:txBody>
+          <a:bodyPr rtlCol="0" anchor="ctr"/>
+          <a:lstStyle/>
+          <a:p>
+            <a:pPr algn="ctr"/>
+          </a:p>
+        </p:txBody>
+      </p:sp>
+      <p:sp>
+        <p:nvSpPr>
+          <p:cNvPr id="18" name="Rounded Rectangle 17"/>
+          <p:cNvSpPr/>
+          <p:nvPr/>
+        </p:nvSpPr>
+        <p:spPr>
+          <a:xfrm>
+            <a:off x="7461504" y="1600200"/>
+            <a:ext cx="1965960" cy="3200400"/>
+          </a:xfrm>
+          <a:prstGeom prst="roundRect">
+            <a:avLst>
+              <a:gd name="adj" fmla="val 7000"/>
+            </a:avLst>
+          </a:prstGeom>
+          <a:solidFill>
+            <a:srgbClr val="FFFFFF"/>
+          </a:solidFill>
+          <a:ln w="15875">
+            <a:solidFill>
+              <a:srgbClr val="1F4E5F"/>
+            </a:solidFill>
+          </a:ln>
+        </p:spPr>
+        <p:style>
+          <a:lnRef idx="1">
+            <a:schemeClr val="accent1"/>
+          </a:lnRef>
+          <a:fillRef idx="3">
+            <a:schemeClr val="accent1"/>
+          </a:fillRef>
+          <a:effectRef idx="2">
+            <a:schemeClr val="accent1"/>
+          </a:effectRef>
+          <a:fontRef idx="minor">
+            <a:schemeClr val="lt1"/>
+          </a:fontRef>
+        </p:style>
+        <p:txBody>
+          <a:bodyPr rtlCol="0" anchor="ctr"/>
+          <a:lstStyle/>
+          <a:p>
+            <a:pPr algn="ctr"/>
+          </a:p>
+        </p:txBody>
+      </p:sp>
+      <p:sp>
+        <p:nvSpPr>
+          <p:cNvPr id="19" name="Rectangle 18"/>
+          <p:cNvSpPr/>
+          <p:nvPr/>
+        </p:nvSpPr>
+        <p:spPr>
+          <a:xfrm>
+            <a:off x="7461504" y="1600200"/>
+            <a:ext cx="1965960" cy="420624"/>
+          </a:xfrm>
+          <a:prstGeom prst="rect">
+            <a:avLst/>
+          </a:prstGeom>
+          <a:solidFill>
+            <a:srgbClr val="1F4E5F"/>
+          </a:solidFill>
+          <a:ln>
+            <a:noFill/>
+          </a:ln>
+        </p:spPr>
+        <p:style>
+          <a:lnRef idx="1">
+            <a:schemeClr val="accent1"/>
+          </a:lnRef>
+          <a:fillRef idx="3">
+            <a:schemeClr val="accent1"/>
+          </a:fillRef>
+          <a:effectRef idx="2">
+            <a:schemeClr val="accent1"/>
+          </a:effectRef>
+          <a:fontRef idx="minor">
+            <a:schemeClr val="lt1"/>
+          </a:fontRef>
+        </p:style>
+        <p:txBody>
+          <a:bodyPr rtlCol="0" anchor="ctr" wrap="square" tIns="36576"/>
+          <a:lstStyle/>
+          <a:p>
+            <a:pPr algn="ctr">
+              <a:spcBef>
+                <a:spcPts val="0"/>
+              </a:spcBef>
+              <a:spcAft>
+                <a:spcPts val="0"/>
+              </a:spcAft>
+            </a:pPr>
+            <a:r>
+              <a:rPr sz="1500" b="1">
+                <a:solidFill>
+                  <a:srgbClr val="FFFFFF"/>
+                </a:solidFill>
+                <a:latin typeface="Yu Gothic"/>
+                <a:ea typeface="Yu Gothic"/>
+                <a:cs typeface="Yu Gothic"/>
+              </a:rPr>
+              <a:t>④ 復元・推論</a:t>
+            </a:r>
+          </a:p>
+        </p:txBody>
+      </p:sp>
+      <p:sp>
+        <p:nvSpPr>
+          <p:cNvPr id="20" name="TextBox 19"/>
+          <p:cNvSpPr txBox="1"/>
+          <p:nvPr/>
+        </p:nvSpPr>
+        <p:spPr>
+          <a:xfrm>
+            <a:off x="7552944" y="2057400"/>
+            <a:ext cx="1783080" cy="2706624"/>
+          </a:xfrm>
+          <a:prstGeom prst="rect">
+            <a:avLst/>
+          </a:prstGeom>
+          <a:noFill/>
+        </p:spPr>
+        <p:txBody>
+          <a:bodyPr wrap="square"/>
+          <a:lstStyle/>
+          <a:p>
+            <a:pPr algn="l">
+              <a:spcBef>
+                <a:spcPts val="0"/>
+              </a:spcBef>
+              <a:spcAft>
+                <a:spcPts val="300"/>
+              </a:spcAft>
+            </a:pPr>
+            <a:r>
+              <a:rPr sz="1300" b="0">
+                <a:solidFill>
+                  <a:srgbClr val="1C282C"/>
+                </a:solidFill>
+                <a:latin typeface="Yu Gothic"/>
+                <a:ea typeface="Yu Gothic"/>
+                <a:cs typeface="Yu Gothic"/>
+              </a:rPr>
+              <a:t>メニュー 9</a:t>
+            </a:r>
+          </a:p>
+          <a:p>
+            <a:pPr algn="l">
+              <a:spcBef>
+                <a:spcPts val="0"/>
+              </a:spcBef>
+              <a:spcAft>
+                <a:spcPts val="300"/>
+              </a:spcAft>
+            </a:pPr>
+            <a:r>
+              <a:rPr sz="1300" b="0">
+                <a:solidFill>
+                  <a:srgbClr val="1C282C"/>
+                </a:solidFill>
+                <a:latin typeface="Yu Gothic"/>
+                <a:ea typeface="Yu Gothic"/>
+                <a:cs typeface="Yu Gothic"/>
+              </a:rPr>
+              <a:t>5 pull → restore</a:t>
+            </a:r>
+          </a:p>
+          <a:p>
+            <a:pPr algn="l">
+              <a:spcBef>
+                <a:spcPts val="0"/>
+              </a:spcBef>
+              <a:spcAft>
+                <a:spcPts val="300"/>
+              </a:spcAft>
+            </a:pPr>
+            <a:r>
+              <a:rPr sz="1300" b="0">
+                <a:solidFill>
+                  <a:srgbClr val="1C282C"/>
+                </a:solidFill>
+                <a:latin typeface="Yu Gothic"/>
+                <a:ea typeface="Yu Gothic"/>
+                <a:cs typeface="Yu Gothic"/>
+              </a:rPr>
+              <a:t>6 最良で推論</a:t>
+            </a:r>
+          </a:p>
+          <a:p>
+            <a:pPr algn="l">
+              <a:spcBef>
+                <a:spcPts val="0"/>
+              </a:spcBef>
+              <a:spcAft>
+                <a:spcPts val="300"/>
+              </a:spcAft>
+            </a:pPr>
+            <a:r>
+              <a:rPr sz="1300" b="0">
+                <a:solidFill>
+                  <a:srgbClr val="1C282C"/>
+                </a:solidFill>
+                <a:latin typeface="Yu Gothic"/>
+                <a:ea typeface="Yu Gothic"/>
+                <a:cs typeface="Yu Gothic"/>
+              </a:rPr>
+              <a:t>  （best.pt を play）</a:t>
+            </a:r>
+          </a:p>
+          <a:p>
+            <a:pPr algn="l">
+              <a:spcBef>
+                <a:spcPts val="0"/>
+              </a:spcBef>
+              <a:spcAft>
+                <a:spcPts val="300"/>
+              </a:spcAft>
+            </a:pPr>
+            <a:r>
+              <a:rPr sz="1300" b="0">
+                <a:solidFill>
+                  <a:srgbClr val="1C282C"/>
+                </a:solidFill>
+                <a:latin typeface="Yu Gothic"/>
+                <a:ea typeface="Yu Gothic"/>
+                <a:cs typeface="Yu Gothic"/>
+              </a:rPr>
+              <a:t/>
+            </a:r>
+          </a:p>
+          <a:p>
+            <a:pPr algn="l">
+              <a:spcBef>
+                <a:spcPts val="0"/>
+              </a:spcBef>
+              <a:spcAft>
+                <a:spcPts val="300"/>
+              </a:spcAft>
+            </a:pPr>
+            <a:r>
+              <a:rPr sz="1300" b="0">
+                <a:solidFill>
+                  <a:srgbClr val="1C282C"/>
+                </a:solidFill>
+                <a:latin typeface="Yu Gothic"/>
+                <a:ea typeface="Yu Gothic"/>
+                <a:cs typeface="Yu Gothic"/>
+              </a:rPr>
+              <a:t>別 PC / 再開に</a:t>
+            </a:r>
+          </a:p>
+        </p:txBody>
+      </p:sp>
+      <p:sp>
+        <p:nvSpPr>
+          <p:cNvPr id="21" name="Right Arrow 20"/>
+          <p:cNvSpPr/>
+          <p:nvPr/>
+        </p:nvSpPr>
+        <p:spPr>
+          <a:xfrm>
+            <a:off x="9445752" y="3017520"/>
+            <a:ext cx="347472" cy="365760"/>
+          </a:xfrm>
+          <a:prstGeom prst="rightArrow">
+            <a:avLst/>
+          </a:prstGeom>
+          <a:solidFill>
+            <a:srgbClr val="4A585C"/>
+          </a:solidFill>
+          <a:ln>
+            <a:noFill/>
+          </a:ln>
+        </p:spPr>
+        <p:style>
+          <a:lnRef idx="1">
+            <a:schemeClr val="accent1"/>
+          </a:lnRef>
+          <a:fillRef idx="3">
+            <a:schemeClr val="accent1"/>
+          </a:fillRef>
+          <a:effectRef idx="2">
+            <a:schemeClr val="accent1"/>
+          </a:effectRef>
+          <a:fontRef idx="minor">
+            <a:schemeClr val="lt1"/>
+          </a:fontRef>
+        </p:style>
+        <p:txBody>
+          <a:bodyPr rtlCol="0" anchor="ctr"/>
+          <a:lstStyle/>
+          <a:p>
+            <a:pPr algn="ctr"/>
+          </a:p>
+        </p:txBody>
+      </p:sp>
+      <p:sp>
+        <p:nvSpPr>
+          <p:cNvPr id="22" name="Rounded Rectangle 21"/>
+          <p:cNvSpPr/>
+          <p:nvPr/>
+        </p:nvSpPr>
+        <p:spPr>
+          <a:xfrm>
+            <a:off x="9811512" y="1600200"/>
+            <a:ext cx="1965960" cy="3200400"/>
+          </a:xfrm>
+          <a:prstGeom prst="roundRect">
+            <a:avLst>
+              <a:gd name="adj" fmla="val 7000"/>
+            </a:avLst>
+          </a:prstGeom>
+          <a:solidFill>
+            <a:srgbClr val="FFFFFF"/>
+          </a:solidFill>
+          <a:ln w="15875">
+            <a:solidFill>
+              <a:srgbClr val="4A585C"/>
+            </a:solidFill>
+          </a:ln>
+        </p:spPr>
+        <p:style>
+          <a:lnRef idx="1">
+            <a:schemeClr val="accent1"/>
+          </a:lnRef>
+          <a:fillRef idx="3">
+            <a:schemeClr val="accent1"/>
+          </a:fillRef>
+          <a:effectRef idx="2">
+            <a:schemeClr val="accent1"/>
+          </a:effectRef>
+          <a:fontRef idx="minor">
+            <a:schemeClr val="lt1"/>
+          </a:fontRef>
+        </p:style>
+        <p:txBody>
+          <a:bodyPr rtlCol="0" anchor="ctr"/>
+          <a:lstStyle/>
+          <a:p>
+            <a:pPr algn="ctr"/>
+          </a:p>
+        </p:txBody>
+      </p:sp>
+      <p:sp>
+        <p:nvSpPr>
+          <p:cNvPr id="23" name="Rectangle 22"/>
+          <p:cNvSpPr/>
+          <p:nvPr/>
+        </p:nvSpPr>
+        <p:spPr>
+          <a:xfrm>
+            <a:off x="9811512" y="1600200"/>
+            <a:ext cx="1965960" cy="420624"/>
+          </a:xfrm>
+          <a:prstGeom prst="rect">
+            <a:avLst/>
+          </a:prstGeom>
+          <a:solidFill>
+            <a:srgbClr val="4A585C"/>
+          </a:solidFill>
+          <a:ln>
+            <a:noFill/>
+          </a:ln>
+        </p:spPr>
+        <p:style>
+          <a:lnRef idx="1">
+            <a:schemeClr val="accent1"/>
+          </a:lnRef>
+          <a:fillRef idx="3">
+            <a:schemeClr val="accent1"/>
+          </a:fillRef>
+          <a:effectRef idx="2">
+            <a:schemeClr val="accent1"/>
+          </a:effectRef>
+          <a:fontRef idx="minor">
+            <a:schemeClr val="lt1"/>
+          </a:fontRef>
+        </p:style>
+        <p:txBody>
+          <a:bodyPr rtlCol="0" anchor="ctr" wrap="square" tIns="36576"/>
+          <a:lstStyle/>
+          <a:p>
+            <a:pPr algn="ctr">
+              <a:spcBef>
+                <a:spcPts val="0"/>
+              </a:spcBef>
+              <a:spcAft>
+                <a:spcPts val="0"/>
+              </a:spcAft>
+            </a:pPr>
+            <a:r>
+              <a:rPr sz="1500" b="1">
+                <a:solidFill>
+                  <a:srgbClr val="FFFFFF"/>
+                </a:solidFill>
+                <a:latin typeface="Yu Gothic"/>
+                <a:ea typeface="Yu Gothic"/>
+                <a:cs typeface="Yu Gothic"/>
+              </a:rPr>
+              <a:t>⑤ 実機へ配信</a:t>
+            </a:r>
+          </a:p>
+        </p:txBody>
+      </p:sp>
+      <p:sp>
+        <p:nvSpPr>
+          <p:cNvPr id="24" name="TextBox 23"/>
+          <p:cNvSpPr txBox="1"/>
+          <p:nvPr/>
+        </p:nvSpPr>
+        <p:spPr>
+          <a:xfrm>
+            <a:off x="9902952" y="2057400"/>
+            <a:ext cx="1783080" cy="2706624"/>
+          </a:xfrm>
+          <a:prstGeom prst="rect">
+            <a:avLst/>
+          </a:prstGeom>
+          <a:noFill/>
+        </p:spPr>
+        <p:txBody>
+          <a:bodyPr wrap="square"/>
+          <a:lstStyle/>
+          <a:p>
+            <a:pPr algn="l">
+              <a:spcBef>
+                <a:spcPts val="0"/>
+              </a:spcBef>
+              <a:spcAft>
+                <a:spcPts val="300"/>
+              </a:spcAft>
+            </a:pPr>
+            <a:r>
+              <a:rPr sz="1300" b="0">
+                <a:solidFill>
+                  <a:srgbClr val="1C282C"/>
+                </a:solidFill>
+                <a:latin typeface="Yu Gothic"/>
+                <a:ea typeface="Yu Gothic"/>
+                <a:cs typeface="Yu Gothic"/>
+              </a:rPr>
+              <a:t>メニュー 9 → 9</a:t>
+            </a:r>
+          </a:p>
+          <a:p>
+            <a:pPr algn="l">
+              <a:spcBef>
+                <a:spcPts val="0"/>
+              </a:spcBef>
+              <a:spcAft>
+                <a:spcPts val="300"/>
+              </a:spcAft>
+            </a:pPr>
+            <a:r>
+              <a:rPr sz="1300" b="0">
+                <a:solidFill>
+                  <a:srgbClr val="1C282C"/>
+                </a:solidFill>
+                <a:latin typeface="Yu Gothic"/>
+                <a:ea typeface="Yu Gothic"/>
+                <a:cs typeface="Yu Gothic"/>
+              </a:rPr>
+              <a:t>Mender Artifact</a:t>
+            </a:r>
+          </a:p>
+          <a:p>
+            <a:pPr algn="l">
+              <a:spcBef>
+                <a:spcPts val="0"/>
+              </a:spcBef>
+              <a:spcAft>
+                <a:spcPts val="300"/>
+              </a:spcAft>
+            </a:pPr>
+            <a:r>
+              <a:rPr sz="1300" b="0">
+                <a:solidFill>
+                  <a:srgbClr val="1C282C"/>
+                </a:solidFill>
+                <a:latin typeface="Yu Gothic"/>
+                <a:ea typeface="Yu Gothic"/>
+                <a:cs typeface="Yu Gothic"/>
+              </a:rPr>
+              <a:t>（.mender）を作成</a:t>
+            </a:r>
+          </a:p>
+          <a:p>
+            <a:pPr algn="l">
+              <a:spcBef>
+                <a:spcPts val="0"/>
+              </a:spcBef>
+              <a:spcAft>
+                <a:spcPts val="300"/>
+              </a:spcAft>
+            </a:pPr>
+            <a:r>
+              <a:rPr sz="1300" b="0">
+                <a:solidFill>
+                  <a:srgbClr val="1C282C"/>
+                </a:solidFill>
+                <a:latin typeface="Yu Gothic"/>
+                <a:ea typeface="Yu Gothic"/>
+                <a:cs typeface="Yu Gothic"/>
+              </a:rPr>
+              <a:t/>
+            </a:r>
+          </a:p>
+          <a:p>
+            <a:pPr algn="l">
+              <a:spcBef>
+                <a:spcPts val="0"/>
+              </a:spcBef>
+              <a:spcAft>
+                <a:spcPts val="300"/>
+              </a:spcAft>
+            </a:pPr>
+            <a:r>
+              <a:rPr sz="1300" b="0">
+                <a:solidFill>
+                  <a:srgbClr val="1C282C"/>
+                </a:solidFill>
+                <a:latin typeface="Yu Gothic"/>
+                <a:ea typeface="Yu Gothic"/>
+                <a:cs typeface="Yu Gothic"/>
+              </a:rPr>
+              <a:t>Hosted Mender に</a:t>
+            </a:r>
+          </a:p>
+          <a:p>
+            <a:pPr algn="l">
+              <a:spcBef>
+                <a:spcPts val="0"/>
+              </a:spcBef>
+              <a:spcAft>
+                <a:spcPts val="300"/>
+              </a:spcAft>
+            </a:pPr>
+            <a:r>
+              <a:rPr sz="1300" b="0">
+                <a:solidFill>
+                  <a:srgbClr val="1C282C"/>
+                </a:solidFill>
+                <a:latin typeface="Yu Gothic"/>
+                <a:ea typeface="Yu Gothic"/>
+                <a:cs typeface="Yu Gothic"/>
+              </a:rPr>
+              <a:t>アップロード → Go2</a:t>
+            </a:r>
+          </a:p>
+        </p:txBody>
+      </p:sp>
+      <p:sp>
+        <p:nvSpPr>
+          <p:cNvPr id="25" name="Rounded Rectangle 24"/>
+          <p:cNvSpPr/>
+          <p:nvPr/>
+        </p:nvSpPr>
+        <p:spPr>
+          <a:xfrm>
+            <a:off x="411480" y="5029200"/>
+            <a:ext cx="11338560" cy="1325880"/>
+          </a:xfrm>
+          <a:prstGeom prst="roundRect">
+            <a:avLst>
+              <a:gd name="adj" fmla="val 10000"/>
+            </a:avLst>
+          </a:prstGeom>
+          <a:solidFill>
+            <a:srgbClr val="E8E4DC"/>
+          </a:solidFill>
+          <a:ln>
+            <a:noFill/>
+          </a:ln>
+        </p:spPr>
+        <p:style>
+          <a:lnRef idx="1">
+            <a:schemeClr val="accent1"/>
+          </a:lnRef>
+          <a:fillRef idx="3">
+            <a:schemeClr val="accent1"/>
+          </a:fillRef>
+          <a:effectRef idx="2">
+            <a:schemeClr val="accent1"/>
+          </a:effectRef>
+          <a:fontRef idx="minor">
+            <a:schemeClr val="lt1"/>
+          </a:fontRef>
+        </p:style>
+        <p:txBody>
+          <a:bodyPr rtlCol="0" anchor="ctr" wrap="square" lIns="228600" tIns="137160"/>
+          <a:lstStyle/>
+          <a:p>
+            <a:pPr algn="l">
+              <a:spcBef>
+                <a:spcPts val="0"/>
+              </a:spcBef>
+              <a:spcAft>
+                <a:spcPts val="600"/>
+              </a:spcAft>
+            </a:pPr>
+            <a:r>
+              <a:rPr sz="1400" b="0">
+                <a:solidFill>
+                  <a:srgbClr val="1C282C"/>
+                </a:solidFill>
+                <a:latin typeface="Yu Gothic"/>
+                <a:ea typeface="Yu Gothic"/>
+                <a:cs typeface="Yu Gothic"/>
+              </a:rPr>
+              <a:t>いつでも（学習中でも後からでも）: MLflow UI（http://127.0.0.1:5001）で曲線・パラメータを見て、どの ラン / 段階を最良として共有するか判断する。</a:t>
+            </a:r>
+          </a:p>
+          <a:p>
+            <a:pPr algn="l">
+              <a:spcBef>
+                <a:spcPts val="0"/>
+              </a:spcBef>
+              <a:spcAft>
+                <a:spcPts val="600"/>
+              </a:spcAft>
+            </a:pPr>
+            <a:r>
+              <a:rPr sz="1400" b="0">
+                <a:solidFill>
+                  <a:srgbClr val="1C282C"/>
+                </a:solidFill>
+                <a:latin typeface="Yu Gothic"/>
+                <a:ea typeface="Yu Gothic"/>
+                <a:cs typeface="Yu Gothic"/>
+              </a:rPr>
+              <a:t>① の学習は DVC / MinIO を使わない（速度に影響しない）。共有したいときだけ ② 以降を実行する。</a:t>
             </a:r>
           </a:p>
         </p:txBody>
@@ -5152,7 +8411,7 @@
                 <a:ea typeface="Yu Gothic"/>
                 <a:cs typeface="Yu Gothic"/>
               </a:rPr>
-              <a:t>MinIO Console：ログイン</a:t>
+              <a:t>処理フロー図：データはどこへ流れるか</a:t>
             </a:r>
           </a:p>
         </p:txBody>
@@ -5194,33 +8453,75 @@
                 <a:ea typeface="Yu Gothic"/>
                 <a:cs typeface="Yu Gothic"/>
               </a:rPr>
-              <a:t>http://127.0.0.1:9001   user / pass = minioadmin（.env と同じ）</a:t>
-            </a:r>
-          </a:p>
-        </p:txBody>
-      </p:sp>
-      <p:sp>
-        <p:nvSpPr>
-          <p:cNvPr id="6" name="Rounded Rectangle 5"/>
+              <a:t>3 本の流れ：実験の記録（MLflow）／重みの共有（DVC+MinIO）／実機への配信（Mender）</a:t>
+            </a:r>
+          </a:p>
+        </p:txBody>
+      </p:sp>
+      <p:sp>
+        <p:nvSpPr>
+          <p:cNvPr id="6" name="TextBox 5"/>
+          <p:cNvSpPr txBox="1"/>
+          <p:nvPr/>
+        </p:nvSpPr>
+        <p:spPr>
+          <a:xfrm>
+            <a:off x="640080" y="1399032"/>
+            <a:ext cx="7315200" cy="292608"/>
+          </a:xfrm>
+          <a:prstGeom prst="rect">
+            <a:avLst/>
+          </a:prstGeom>
+          <a:noFill/>
+        </p:spPr>
+        <p:txBody>
+          <a:bodyPr wrap="square"/>
+          <a:lstStyle/>
+          <a:p>
+            <a:pPr algn="l">
+              <a:spcBef>
+                <a:spcPts val="0"/>
+              </a:spcBef>
+              <a:spcAft>
+                <a:spcPts val="0"/>
+              </a:spcAft>
+            </a:pPr>
+            <a:r>
+              <a:rPr sz="1300" b="1">
+                <a:solidFill>
+                  <a:srgbClr val="1F4E5F"/>
+                </a:solidFill>
+                <a:latin typeface="Yu Gothic"/>
+                <a:ea typeface="Yu Gothic"/>
+                <a:cs typeface="Yu Gothic"/>
+              </a:rPr>
+              <a:t>A. 実験の記録（自動）</a:t>
+            </a:r>
+          </a:p>
+        </p:txBody>
+      </p:sp>
+      <p:sp>
+        <p:nvSpPr>
+          <p:cNvPr id="7" name="Rounded Rectangle 6"/>
           <p:cNvSpPr/>
           <p:nvPr/>
         </p:nvSpPr>
         <p:spPr>
           <a:xfrm>
-            <a:off x="1097280" y="1463040"/>
-            <a:ext cx="9875520" cy="4937760"/>
+            <a:off x="640080" y="1709928"/>
+            <a:ext cx="2377440" cy="1188720"/>
           </a:xfrm>
           <a:prstGeom prst="roundRect">
             <a:avLst>
-              <a:gd name="adj" fmla="val 4000"/>
+              <a:gd name="adj" fmla="val 7000"/>
             </a:avLst>
           </a:prstGeom>
           <a:solidFill>
             <a:srgbClr val="FFFFFF"/>
           </a:solidFill>
-          <a:ln>
+          <a:ln w="15875">
             <a:solidFill>
-              <a:srgbClr val="E8E4DC"/>
+              <a:srgbClr val="1F4E5F"/>
             </a:solidFill>
           </a:ln>
         </p:spPr>
@@ -5246,30 +8547,2587 @@
           </a:p>
         </p:txBody>
       </p:sp>
-      <p:pic>
-        <p:nvPicPr>
-          <p:cNvPr id="7" name="Picture 6" descr="minio_login.png"/>
-          <p:cNvPicPr>
-            <a:picLocks noChangeAspect="1"/>
-          </p:cNvPicPr>
-          <p:nvPr/>
-        </p:nvPicPr>
-        <p:blipFill>
-          <a:blip r:embed="rId2"/>
-          <a:stretch>
-            <a:fillRect/>
-          </a:stretch>
-        </p:blipFill>
-        <p:spPr>
-          <a:xfrm>
-            <a:off x="1809534" y="1554480"/>
-            <a:ext cx="8451011" cy="4754880"/>
+      <p:sp>
+        <p:nvSpPr>
+          <p:cNvPr id="8" name="Rectangle 7"/>
+          <p:cNvSpPr/>
+          <p:nvPr/>
+        </p:nvSpPr>
+        <p:spPr>
+          <a:xfrm>
+            <a:off x="640080" y="1709928"/>
+            <a:ext cx="2377440" cy="420624"/>
           </a:xfrm>
           <a:prstGeom prst="rect">
             <a:avLst/>
           </a:prstGeom>
-        </p:spPr>
-      </p:pic>
+          <a:solidFill>
+            <a:srgbClr val="1F4E5F"/>
+          </a:solidFill>
+          <a:ln>
+            <a:noFill/>
+          </a:ln>
+        </p:spPr>
+        <p:style>
+          <a:lnRef idx="1">
+            <a:schemeClr val="accent1"/>
+          </a:lnRef>
+          <a:fillRef idx="3">
+            <a:schemeClr val="accent1"/>
+          </a:fillRef>
+          <a:effectRef idx="2">
+            <a:schemeClr val="accent1"/>
+          </a:effectRef>
+          <a:fontRef idx="minor">
+            <a:schemeClr val="lt1"/>
+          </a:fontRef>
+        </p:style>
+        <p:txBody>
+          <a:bodyPr rtlCol="0" anchor="ctr" wrap="square" tIns="36576"/>
+          <a:lstStyle/>
+          <a:p>
+            <a:pPr algn="ctr">
+              <a:spcBef>
+                <a:spcPts val="0"/>
+              </a:spcBef>
+              <a:spcAft>
+                <a:spcPts val="0"/>
+              </a:spcAft>
+            </a:pPr>
+            <a:r>
+              <a:rPr sz="1400" b="1">
+                <a:solidFill>
+                  <a:srgbClr val="FFFFFF"/>
+                </a:solidFill>
+                <a:latin typeface="Yu Gothic"/>
+                <a:ea typeface="Yu Gothic"/>
+                <a:cs typeface="Yu Gothic"/>
+              </a:rPr>
+              <a:t>学習</a:t>
+            </a:r>
+          </a:p>
+        </p:txBody>
+      </p:sp>
+      <p:sp>
+        <p:nvSpPr>
+          <p:cNvPr id="9" name="TextBox 8"/>
+          <p:cNvSpPr txBox="1"/>
+          <p:nvPr/>
+        </p:nvSpPr>
+        <p:spPr>
+          <a:xfrm>
+            <a:off x="731520" y="2167128"/>
+            <a:ext cx="2194560" cy="694944"/>
+          </a:xfrm>
+          <a:prstGeom prst="rect">
+            <a:avLst/>
+          </a:prstGeom>
+          <a:noFill/>
+        </p:spPr>
+        <p:txBody>
+          <a:bodyPr wrap="square"/>
+          <a:lstStyle/>
+          <a:p>
+            <a:pPr algn="l">
+              <a:spcBef>
+                <a:spcPts val="0"/>
+              </a:spcBef>
+              <a:spcAft>
+                <a:spcPts val="300"/>
+              </a:spcAft>
+            </a:pPr>
+            <a:r>
+              <a:rPr sz="1200" b="0">
+                <a:solidFill>
+                  <a:srgbClr val="1C282C"/>
+                </a:solidFill>
+                <a:latin typeface="Yu Gothic"/>
+                <a:ea typeface="Yu Gothic"/>
+                <a:cs typeface="Yu Gothic"/>
+              </a:rPr>
+              <a:t>train_ppo</a:t>
+            </a:r>
+          </a:p>
+          <a:p>
+            <a:pPr algn="l">
+              <a:spcBef>
+                <a:spcPts val="0"/>
+              </a:spcBef>
+              <a:spcAft>
+                <a:spcPts val="300"/>
+              </a:spcAft>
+            </a:pPr>
+            <a:r>
+              <a:rPr sz="1200" b="0">
+                <a:solidFill>
+                  <a:srgbClr val="1C282C"/>
+                </a:solidFill>
+                <a:latin typeface="Yu Gothic"/>
+                <a:ea typeface="Yu Gothic"/>
+                <a:cs typeface="Yu Gothic"/>
+              </a:rPr>
+              <a:t>metrics.jsonl / ppo_*.pt</a:t>
+            </a:r>
+          </a:p>
+          <a:p>
+            <a:pPr algn="l">
+              <a:spcBef>
+                <a:spcPts val="0"/>
+              </a:spcBef>
+              <a:spcAft>
+                <a:spcPts val="300"/>
+              </a:spcAft>
+            </a:pPr>
+            <a:r>
+              <a:rPr sz="1200" b="0">
+                <a:solidFill>
+                  <a:srgbClr val="1C282C"/>
+                </a:solidFill>
+                <a:latin typeface="Yu Gothic"/>
+                <a:ea typeface="Yu Gothic"/>
+                <a:cs typeface="Yu Gothic"/>
+              </a:rPr>
+              <a:t>を logs/ に出力</a:t>
+            </a:r>
+          </a:p>
+        </p:txBody>
+      </p:sp>
+      <p:sp>
+        <p:nvSpPr>
+          <p:cNvPr id="10" name="Right Arrow 9"/>
+          <p:cNvSpPr/>
+          <p:nvPr/>
+        </p:nvSpPr>
+        <p:spPr>
+          <a:xfrm>
+            <a:off x="3063240" y="2139696"/>
+            <a:ext cx="365760" cy="329184"/>
+          </a:xfrm>
+          <a:prstGeom prst="rightArrow">
+            <a:avLst/>
+          </a:prstGeom>
+          <a:solidFill>
+            <a:srgbClr val="4A585C"/>
+          </a:solidFill>
+          <a:ln>
+            <a:noFill/>
+          </a:ln>
+        </p:spPr>
+        <p:style>
+          <a:lnRef idx="1">
+            <a:schemeClr val="accent1"/>
+          </a:lnRef>
+          <a:fillRef idx="3">
+            <a:schemeClr val="accent1"/>
+          </a:fillRef>
+          <a:effectRef idx="2">
+            <a:schemeClr val="accent1"/>
+          </a:effectRef>
+          <a:fontRef idx="minor">
+            <a:schemeClr val="lt1"/>
+          </a:fontRef>
+        </p:style>
+        <p:txBody>
+          <a:bodyPr rtlCol="0" anchor="ctr"/>
+          <a:lstStyle/>
+          <a:p>
+            <a:pPr algn="ctr"/>
+          </a:p>
+        </p:txBody>
+      </p:sp>
+      <p:sp>
+        <p:nvSpPr>
+          <p:cNvPr id="11" name="Rounded Rectangle 10"/>
+          <p:cNvSpPr/>
+          <p:nvPr/>
+        </p:nvSpPr>
+        <p:spPr>
+          <a:xfrm>
+            <a:off x="3474720" y="1709928"/>
+            <a:ext cx="2377440" cy="1188720"/>
+          </a:xfrm>
+          <a:prstGeom prst="roundRect">
+            <a:avLst>
+              <a:gd name="adj" fmla="val 7000"/>
+            </a:avLst>
+          </a:prstGeom>
+          <a:solidFill>
+            <a:srgbClr val="FFFFFF"/>
+          </a:solidFill>
+          <a:ln w="15875">
+            <a:solidFill>
+              <a:srgbClr val="1F4E5F"/>
+            </a:solidFill>
+          </a:ln>
+        </p:spPr>
+        <p:style>
+          <a:lnRef idx="1">
+            <a:schemeClr val="accent1"/>
+          </a:lnRef>
+          <a:fillRef idx="3">
+            <a:schemeClr val="accent1"/>
+          </a:fillRef>
+          <a:effectRef idx="2">
+            <a:schemeClr val="accent1"/>
+          </a:effectRef>
+          <a:fontRef idx="minor">
+            <a:schemeClr val="lt1"/>
+          </a:fontRef>
+        </p:style>
+        <p:txBody>
+          <a:bodyPr rtlCol="0" anchor="ctr"/>
+          <a:lstStyle/>
+          <a:p>
+            <a:pPr algn="ctr"/>
+          </a:p>
+        </p:txBody>
+      </p:sp>
+      <p:sp>
+        <p:nvSpPr>
+          <p:cNvPr id="12" name="Rectangle 11"/>
+          <p:cNvSpPr/>
+          <p:nvPr/>
+        </p:nvSpPr>
+        <p:spPr>
+          <a:xfrm>
+            <a:off x="3474720" y="1709928"/>
+            <a:ext cx="2377440" cy="420624"/>
+          </a:xfrm>
+          <a:prstGeom prst="rect">
+            <a:avLst/>
+          </a:prstGeom>
+          <a:solidFill>
+            <a:srgbClr val="1F4E5F"/>
+          </a:solidFill>
+          <a:ln>
+            <a:noFill/>
+          </a:ln>
+        </p:spPr>
+        <p:style>
+          <a:lnRef idx="1">
+            <a:schemeClr val="accent1"/>
+          </a:lnRef>
+          <a:fillRef idx="3">
+            <a:schemeClr val="accent1"/>
+          </a:fillRef>
+          <a:effectRef idx="2">
+            <a:schemeClr val="accent1"/>
+          </a:effectRef>
+          <a:fontRef idx="minor">
+            <a:schemeClr val="lt1"/>
+          </a:fontRef>
+        </p:style>
+        <p:txBody>
+          <a:bodyPr rtlCol="0" anchor="ctr" wrap="square" tIns="36576"/>
+          <a:lstStyle/>
+          <a:p>
+            <a:pPr algn="ctr">
+              <a:spcBef>
+                <a:spcPts val="0"/>
+              </a:spcBef>
+              <a:spcAft>
+                <a:spcPts val="0"/>
+              </a:spcAft>
+            </a:pPr>
+            <a:r>
+              <a:rPr sz="1400" b="1">
+                <a:solidFill>
+                  <a:srgbClr val="FFFFFF"/>
+                </a:solidFill>
+                <a:latin typeface="Yu Gothic"/>
+                <a:ea typeface="Yu Gothic"/>
+                <a:cs typeface="Yu Gothic"/>
+              </a:rPr>
+              <a:t>MLflow に記録</a:t>
+            </a:r>
+          </a:p>
+        </p:txBody>
+      </p:sp>
+      <p:sp>
+        <p:nvSpPr>
+          <p:cNvPr id="13" name="TextBox 12"/>
+          <p:cNvSpPr txBox="1"/>
+          <p:nvPr/>
+        </p:nvSpPr>
+        <p:spPr>
+          <a:xfrm>
+            <a:off x="3566160" y="2167128"/>
+            <a:ext cx="2194560" cy="694944"/>
+          </a:xfrm>
+          <a:prstGeom prst="rect">
+            <a:avLst/>
+          </a:prstGeom>
+          <a:noFill/>
+        </p:spPr>
+        <p:txBody>
+          <a:bodyPr wrap="square"/>
+          <a:lstStyle/>
+          <a:p>
+            <a:pPr algn="l">
+              <a:spcBef>
+                <a:spcPts val="0"/>
+              </a:spcBef>
+              <a:spcAft>
+                <a:spcPts val="300"/>
+              </a:spcAft>
+            </a:pPr>
+            <a:r>
+              <a:rPr sz="1200" b="0">
+                <a:solidFill>
+                  <a:srgbClr val="1C282C"/>
+                </a:solidFill>
+                <a:latin typeface="Yu Gothic"/>
+                <a:ea typeface="Yu Gothic"/>
+                <a:cs typeface="Yu Gothic"/>
+              </a:rPr>
+              <a:t>params / metrics を</a:t>
+            </a:r>
+          </a:p>
+          <a:p>
+            <a:pPr algn="l">
+              <a:spcBef>
+                <a:spcPts val="0"/>
+              </a:spcBef>
+              <a:spcAft>
+                <a:spcPts val="300"/>
+              </a:spcAft>
+            </a:pPr>
+            <a:r>
+              <a:rPr sz="1200" b="0">
+                <a:solidFill>
+                  <a:srgbClr val="1C282C"/>
+                </a:solidFill>
+                <a:latin typeface="Yu Gothic"/>
+                <a:ea typeface="Yu Gothic"/>
+                <a:cs typeface="Yu Gothic"/>
+              </a:rPr>
+              <a:t>logs/mlflow/mlflow.db</a:t>
+            </a:r>
+          </a:p>
+          <a:p>
+            <a:pPr algn="l">
+              <a:spcBef>
+                <a:spcPts val="0"/>
+              </a:spcBef>
+              <a:spcAft>
+                <a:spcPts val="300"/>
+              </a:spcAft>
+            </a:pPr>
+            <a:r>
+              <a:rPr sz="1200" b="0">
+                <a:solidFill>
+                  <a:srgbClr val="1C282C"/>
+                </a:solidFill>
+                <a:latin typeface="Yu Gothic"/>
+                <a:ea typeface="Yu Gothic"/>
+                <a:cs typeface="Yu Gothic"/>
+              </a:rPr>
+              <a:t>(sqlite) へ</a:t>
+            </a:r>
+          </a:p>
+        </p:txBody>
+      </p:sp>
+      <p:sp>
+        <p:nvSpPr>
+          <p:cNvPr id="14" name="Right Arrow 13"/>
+          <p:cNvSpPr/>
+          <p:nvPr/>
+        </p:nvSpPr>
+        <p:spPr>
+          <a:xfrm>
+            <a:off x="5897880" y="2139696"/>
+            <a:ext cx="365760" cy="329184"/>
+          </a:xfrm>
+          <a:prstGeom prst="rightArrow">
+            <a:avLst/>
+          </a:prstGeom>
+          <a:solidFill>
+            <a:srgbClr val="4A585C"/>
+          </a:solidFill>
+          <a:ln>
+            <a:noFill/>
+          </a:ln>
+        </p:spPr>
+        <p:style>
+          <a:lnRef idx="1">
+            <a:schemeClr val="accent1"/>
+          </a:lnRef>
+          <a:fillRef idx="3">
+            <a:schemeClr val="accent1"/>
+          </a:fillRef>
+          <a:effectRef idx="2">
+            <a:schemeClr val="accent1"/>
+          </a:effectRef>
+          <a:fontRef idx="minor">
+            <a:schemeClr val="lt1"/>
+          </a:fontRef>
+        </p:style>
+        <p:txBody>
+          <a:bodyPr rtlCol="0" anchor="ctr"/>
+          <a:lstStyle/>
+          <a:p>
+            <a:pPr algn="ctr"/>
+          </a:p>
+        </p:txBody>
+      </p:sp>
+      <p:sp>
+        <p:nvSpPr>
+          <p:cNvPr id="15" name="Rounded Rectangle 14"/>
+          <p:cNvSpPr/>
+          <p:nvPr/>
+        </p:nvSpPr>
+        <p:spPr>
+          <a:xfrm>
+            <a:off x="6309360" y="1709928"/>
+            <a:ext cx="2377440" cy="1188720"/>
+          </a:xfrm>
+          <a:prstGeom prst="roundRect">
+            <a:avLst>
+              <a:gd name="adj" fmla="val 7000"/>
+            </a:avLst>
+          </a:prstGeom>
+          <a:solidFill>
+            <a:srgbClr val="FFFFFF"/>
+          </a:solidFill>
+          <a:ln w="15875">
+            <a:solidFill>
+              <a:srgbClr val="1F4E5F"/>
+            </a:solidFill>
+          </a:ln>
+        </p:spPr>
+        <p:style>
+          <a:lnRef idx="1">
+            <a:schemeClr val="accent1"/>
+          </a:lnRef>
+          <a:fillRef idx="3">
+            <a:schemeClr val="accent1"/>
+          </a:fillRef>
+          <a:effectRef idx="2">
+            <a:schemeClr val="accent1"/>
+          </a:effectRef>
+          <a:fontRef idx="minor">
+            <a:schemeClr val="lt1"/>
+          </a:fontRef>
+        </p:style>
+        <p:txBody>
+          <a:bodyPr rtlCol="0" anchor="ctr"/>
+          <a:lstStyle/>
+          <a:p>
+            <a:pPr algn="ctr"/>
+          </a:p>
+        </p:txBody>
+      </p:sp>
+      <p:sp>
+        <p:nvSpPr>
+          <p:cNvPr id="16" name="Rectangle 15"/>
+          <p:cNvSpPr/>
+          <p:nvPr/>
+        </p:nvSpPr>
+        <p:spPr>
+          <a:xfrm>
+            <a:off x="6309360" y="1709928"/>
+            <a:ext cx="2377440" cy="420624"/>
+          </a:xfrm>
+          <a:prstGeom prst="rect">
+            <a:avLst/>
+          </a:prstGeom>
+          <a:solidFill>
+            <a:srgbClr val="1F4E5F"/>
+          </a:solidFill>
+          <a:ln>
+            <a:noFill/>
+          </a:ln>
+        </p:spPr>
+        <p:style>
+          <a:lnRef idx="1">
+            <a:schemeClr val="accent1"/>
+          </a:lnRef>
+          <a:fillRef idx="3">
+            <a:schemeClr val="accent1"/>
+          </a:fillRef>
+          <a:effectRef idx="2">
+            <a:schemeClr val="accent1"/>
+          </a:effectRef>
+          <a:fontRef idx="minor">
+            <a:schemeClr val="lt1"/>
+          </a:fontRef>
+        </p:style>
+        <p:txBody>
+          <a:bodyPr rtlCol="0" anchor="ctr" wrap="square" tIns="36576"/>
+          <a:lstStyle/>
+          <a:p>
+            <a:pPr algn="ctr">
+              <a:spcBef>
+                <a:spcPts val="0"/>
+              </a:spcBef>
+              <a:spcAft>
+                <a:spcPts val="0"/>
+              </a:spcAft>
+            </a:pPr>
+            <a:r>
+              <a:rPr sz="1400" b="1">
+                <a:solidFill>
+                  <a:srgbClr val="FFFFFF"/>
+                </a:solidFill>
+                <a:latin typeface="Yu Gothic"/>
+                <a:ea typeface="Yu Gothic"/>
+                <a:cs typeface="Yu Gothic"/>
+              </a:rPr>
+              <a:t>MLflow UI</a:t>
+            </a:r>
+          </a:p>
+        </p:txBody>
+      </p:sp>
+      <p:sp>
+        <p:nvSpPr>
+          <p:cNvPr id="17" name="TextBox 16"/>
+          <p:cNvSpPr txBox="1"/>
+          <p:nvPr/>
+        </p:nvSpPr>
+        <p:spPr>
+          <a:xfrm>
+            <a:off x="6400800" y="2167128"/>
+            <a:ext cx="2194560" cy="694944"/>
+          </a:xfrm>
+          <a:prstGeom prst="rect">
+            <a:avLst/>
+          </a:prstGeom>
+          <a:noFill/>
+        </p:spPr>
+        <p:txBody>
+          <a:bodyPr wrap="square"/>
+          <a:lstStyle/>
+          <a:p>
+            <a:pPr algn="l">
+              <a:spcBef>
+                <a:spcPts val="0"/>
+              </a:spcBef>
+              <a:spcAft>
+                <a:spcPts val="300"/>
+              </a:spcAft>
+            </a:pPr>
+            <a:r>
+              <a:rPr sz="1200" b="0">
+                <a:solidFill>
+                  <a:srgbClr val="1C282C"/>
+                </a:solidFill>
+                <a:latin typeface="Yu Gothic"/>
+                <a:ea typeface="Yu Gothic"/>
+                <a:cs typeface="Yu Gothic"/>
+              </a:rPr>
+              <a:t>http://127.0.0.1:5001</a:t>
+            </a:r>
+          </a:p>
+          <a:p>
+            <a:pPr algn="l">
+              <a:spcBef>
+                <a:spcPts val="0"/>
+              </a:spcBef>
+              <a:spcAft>
+                <a:spcPts val="300"/>
+              </a:spcAft>
+            </a:pPr>
+            <a:r>
+              <a:rPr sz="1200" b="0">
+                <a:solidFill>
+                  <a:srgbClr val="1C282C"/>
+                </a:solidFill>
+                <a:latin typeface="Yu Gothic"/>
+                <a:ea typeface="Yu Gothic"/>
+                <a:cs typeface="Yu Gothic"/>
+              </a:rPr>
+              <a:t>曲線・Runs 比較</a:t>
+            </a:r>
+          </a:p>
+        </p:txBody>
+      </p:sp>
+      <p:sp>
+        <p:nvSpPr>
+          <p:cNvPr id="18" name="Right Arrow 17"/>
+          <p:cNvSpPr/>
+          <p:nvPr/>
+        </p:nvSpPr>
+        <p:spPr>
+          <a:xfrm>
+            <a:off x="8732520" y="2139696"/>
+            <a:ext cx="365760" cy="329184"/>
+          </a:xfrm>
+          <a:prstGeom prst="rightArrow">
+            <a:avLst/>
+          </a:prstGeom>
+          <a:solidFill>
+            <a:srgbClr val="4A585C"/>
+          </a:solidFill>
+          <a:ln>
+            <a:noFill/>
+          </a:ln>
+        </p:spPr>
+        <p:style>
+          <a:lnRef idx="1">
+            <a:schemeClr val="accent1"/>
+          </a:lnRef>
+          <a:fillRef idx="3">
+            <a:schemeClr val="accent1"/>
+          </a:fillRef>
+          <a:effectRef idx="2">
+            <a:schemeClr val="accent1"/>
+          </a:effectRef>
+          <a:fontRef idx="minor">
+            <a:schemeClr val="lt1"/>
+          </a:fontRef>
+        </p:style>
+        <p:txBody>
+          <a:bodyPr rtlCol="0" anchor="ctr"/>
+          <a:lstStyle/>
+          <a:p>
+            <a:pPr algn="ctr"/>
+          </a:p>
+        </p:txBody>
+      </p:sp>
+      <p:sp>
+        <p:nvSpPr>
+          <p:cNvPr id="19" name="Rounded Rectangle 18"/>
+          <p:cNvSpPr/>
+          <p:nvPr/>
+        </p:nvSpPr>
+        <p:spPr>
+          <a:xfrm>
+            <a:off x="9144000" y="1709928"/>
+            <a:ext cx="2377440" cy="1188720"/>
+          </a:xfrm>
+          <a:prstGeom prst="roundRect">
+            <a:avLst>
+              <a:gd name="adj" fmla="val 7000"/>
+            </a:avLst>
+          </a:prstGeom>
+          <a:solidFill>
+            <a:srgbClr val="FFFFFF"/>
+          </a:solidFill>
+          <a:ln w="15875">
+            <a:solidFill>
+              <a:srgbClr val="1F4E5F"/>
+            </a:solidFill>
+          </a:ln>
+        </p:spPr>
+        <p:style>
+          <a:lnRef idx="1">
+            <a:schemeClr val="accent1"/>
+          </a:lnRef>
+          <a:fillRef idx="3">
+            <a:schemeClr val="accent1"/>
+          </a:fillRef>
+          <a:effectRef idx="2">
+            <a:schemeClr val="accent1"/>
+          </a:effectRef>
+          <a:fontRef idx="minor">
+            <a:schemeClr val="lt1"/>
+          </a:fontRef>
+        </p:style>
+        <p:txBody>
+          <a:bodyPr rtlCol="0" anchor="ctr"/>
+          <a:lstStyle/>
+          <a:p>
+            <a:pPr algn="ctr"/>
+          </a:p>
+        </p:txBody>
+      </p:sp>
+      <p:sp>
+        <p:nvSpPr>
+          <p:cNvPr id="20" name="Rectangle 19"/>
+          <p:cNvSpPr/>
+          <p:nvPr/>
+        </p:nvSpPr>
+        <p:spPr>
+          <a:xfrm>
+            <a:off x="9144000" y="1709928"/>
+            <a:ext cx="2377440" cy="420624"/>
+          </a:xfrm>
+          <a:prstGeom prst="rect">
+            <a:avLst/>
+          </a:prstGeom>
+          <a:solidFill>
+            <a:srgbClr val="1F4E5F"/>
+          </a:solidFill>
+          <a:ln>
+            <a:noFill/>
+          </a:ln>
+        </p:spPr>
+        <p:style>
+          <a:lnRef idx="1">
+            <a:schemeClr val="accent1"/>
+          </a:lnRef>
+          <a:fillRef idx="3">
+            <a:schemeClr val="accent1"/>
+          </a:fillRef>
+          <a:effectRef idx="2">
+            <a:schemeClr val="accent1"/>
+          </a:effectRef>
+          <a:fontRef idx="minor">
+            <a:schemeClr val="lt1"/>
+          </a:fontRef>
+        </p:style>
+        <p:txBody>
+          <a:bodyPr rtlCol="0" anchor="ctr" wrap="square" tIns="36576"/>
+          <a:lstStyle/>
+          <a:p>
+            <a:pPr algn="ctr">
+              <a:spcBef>
+                <a:spcPts val="0"/>
+              </a:spcBef>
+              <a:spcAft>
+                <a:spcPts val="0"/>
+              </a:spcAft>
+            </a:pPr>
+            <a:r>
+              <a:rPr sz="1400" b="1">
+                <a:solidFill>
+                  <a:srgbClr val="FFFFFF"/>
+                </a:solidFill>
+                <a:latin typeface="Yu Gothic"/>
+                <a:ea typeface="Yu Gothic"/>
+                <a:cs typeface="Yu Gothic"/>
+              </a:rPr>
+              <a:t>人が判断</a:t>
+            </a:r>
+          </a:p>
+        </p:txBody>
+      </p:sp>
+      <p:sp>
+        <p:nvSpPr>
+          <p:cNvPr id="21" name="TextBox 20"/>
+          <p:cNvSpPr txBox="1"/>
+          <p:nvPr/>
+        </p:nvSpPr>
+        <p:spPr>
+          <a:xfrm>
+            <a:off x="9235440" y="2167128"/>
+            <a:ext cx="2194560" cy="694944"/>
+          </a:xfrm>
+          <a:prstGeom prst="rect">
+            <a:avLst/>
+          </a:prstGeom>
+          <a:noFill/>
+        </p:spPr>
+        <p:txBody>
+          <a:bodyPr wrap="square"/>
+          <a:lstStyle/>
+          <a:p>
+            <a:pPr algn="l">
+              <a:spcBef>
+                <a:spcPts val="0"/>
+              </a:spcBef>
+              <a:spcAft>
+                <a:spcPts val="300"/>
+              </a:spcAft>
+            </a:pPr>
+            <a:r>
+              <a:rPr sz="1200" b="0">
+                <a:solidFill>
+                  <a:srgbClr val="1C282C"/>
+                </a:solidFill>
+                <a:latin typeface="Yu Gothic"/>
+                <a:ea typeface="Yu Gothic"/>
+                <a:cs typeface="Yu Gothic"/>
+              </a:rPr>
+              <a:t>どの段階が良いか</a:t>
+            </a:r>
+          </a:p>
+          <a:p>
+            <a:pPr algn="l">
+              <a:spcBef>
+                <a:spcPts val="0"/>
+              </a:spcBef>
+              <a:spcAft>
+                <a:spcPts val="300"/>
+              </a:spcAft>
+            </a:pPr>
+            <a:r>
+              <a:rPr sz="1200" b="0">
+                <a:solidFill>
+                  <a:srgbClr val="1C282C"/>
+                </a:solidFill>
+                <a:latin typeface="Yu Gothic"/>
+                <a:ea typeface="Yu Gothic"/>
+                <a:cs typeface="Yu Gothic"/>
+              </a:rPr>
+              <a:t>→ 次の B で共有</a:t>
+            </a:r>
+          </a:p>
+        </p:txBody>
+      </p:sp>
+      <p:sp>
+        <p:nvSpPr>
+          <p:cNvPr id="22" name="TextBox 21"/>
+          <p:cNvSpPr txBox="1"/>
+          <p:nvPr/>
+        </p:nvSpPr>
+        <p:spPr>
+          <a:xfrm>
+            <a:off x="640080" y="3044952"/>
+            <a:ext cx="7315200" cy="292608"/>
+          </a:xfrm>
+          <a:prstGeom prst="rect">
+            <a:avLst/>
+          </a:prstGeom>
+          <a:noFill/>
+        </p:spPr>
+        <p:txBody>
+          <a:bodyPr wrap="square"/>
+          <a:lstStyle/>
+          <a:p>
+            <a:pPr algn="l">
+              <a:spcBef>
+                <a:spcPts val="0"/>
+              </a:spcBef>
+              <a:spcAft>
+                <a:spcPts val="0"/>
+              </a:spcAft>
+            </a:pPr>
+            <a:r>
+              <a:rPr sz="1300" b="1">
+                <a:solidFill>
+                  <a:srgbClr val="8A452A"/>
+                </a:solidFill>
+                <a:latin typeface="Yu Gothic"/>
+                <a:ea typeface="Yu Gothic"/>
+                <a:cs typeface="Yu Gothic"/>
+              </a:rPr>
+              <a:t>B. 重みの共有（区切りで手動）</a:t>
+            </a:r>
+          </a:p>
+        </p:txBody>
+      </p:sp>
+      <p:sp>
+        <p:nvSpPr>
+          <p:cNvPr id="23" name="Rounded Rectangle 22"/>
+          <p:cNvSpPr/>
+          <p:nvPr/>
+        </p:nvSpPr>
+        <p:spPr>
+          <a:xfrm>
+            <a:off x="640080" y="3355848"/>
+            <a:ext cx="2377440" cy="1188720"/>
+          </a:xfrm>
+          <a:prstGeom prst="roundRect">
+            <a:avLst>
+              <a:gd name="adj" fmla="val 7000"/>
+            </a:avLst>
+          </a:prstGeom>
+          <a:solidFill>
+            <a:srgbClr val="FFFFFF"/>
+          </a:solidFill>
+          <a:ln w="15875">
+            <a:solidFill>
+              <a:srgbClr val="8A452A"/>
+            </a:solidFill>
+          </a:ln>
+        </p:spPr>
+        <p:style>
+          <a:lnRef idx="1">
+            <a:schemeClr val="accent1"/>
+          </a:lnRef>
+          <a:fillRef idx="3">
+            <a:schemeClr val="accent1"/>
+          </a:fillRef>
+          <a:effectRef idx="2">
+            <a:schemeClr val="accent1"/>
+          </a:effectRef>
+          <a:fontRef idx="minor">
+            <a:schemeClr val="lt1"/>
+          </a:fontRef>
+        </p:style>
+        <p:txBody>
+          <a:bodyPr rtlCol="0" anchor="ctr"/>
+          <a:lstStyle/>
+          <a:p>
+            <a:pPr algn="ctr"/>
+          </a:p>
+        </p:txBody>
+      </p:sp>
+      <p:sp>
+        <p:nvSpPr>
+          <p:cNvPr id="24" name="Rectangle 23"/>
+          <p:cNvSpPr/>
+          <p:nvPr/>
+        </p:nvSpPr>
+        <p:spPr>
+          <a:xfrm>
+            <a:off x="640080" y="3355848"/>
+            <a:ext cx="2377440" cy="420624"/>
+          </a:xfrm>
+          <a:prstGeom prst="rect">
+            <a:avLst/>
+          </a:prstGeom>
+          <a:solidFill>
+            <a:srgbClr val="8A452A"/>
+          </a:solidFill>
+          <a:ln>
+            <a:noFill/>
+          </a:ln>
+        </p:spPr>
+        <p:style>
+          <a:lnRef idx="1">
+            <a:schemeClr val="accent1"/>
+          </a:lnRef>
+          <a:fillRef idx="3">
+            <a:schemeClr val="accent1"/>
+          </a:fillRef>
+          <a:effectRef idx="2">
+            <a:schemeClr val="accent1"/>
+          </a:effectRef>
+          <a:fontRef idx="minor">
+            <a:schemeClr val="lt1"/>
+          </a:fontRef>
+        </p:style>
+        <p:txBody>
+          <a:bodyPr rtlCol="0" anchor="ctr" wrap="square" tIns="36576"/>
+          <a:lstStyle/>
+          <a:p>
+            <a:pPr algn="ctr">
+              <a:spcBef>
+                <a:spcPts val="0"/>
+              </a:spcBef>
+              <a:spcAft>
+                <a:spcPts val="0"/>
+              </a:spcAft>
+            </a:pPr>
+            <a:r>
+              <a:rPr sz="1400" b="1">
+                <a:solidFill>
+                  <a:srgbClr val="FFFFFF"/>
+                </a:solidFill>
+                <a:latin typeface="Yu Gothic"/>
+                <a:ea typeface="Yu Gothic"/>
+                <a:cs typeface="Yu Gothic"/>
+              </a:rPr>
+              <a:t>logs/ の重み</a:t>
+            </a:r>
+          </a:p>
+        </p:txBody>
+      </p:sp>
+      <p:sp>
+        <p:nvSpPr>
+          <p:cNvPr id="25" name="TextBox 24"/>
+          <p:cNvSpPr txBox="1"/>
+          <p:nvPr/>
+        </p:nvSpPr>
+        <p:spPr>
+          <a:xfrm>
+            <a:off x="731520" y="3813048"/>
+            <a:ext cx="2194560" cy="694944"/>
+          </a:xfrm>
+          <a:prstGeom prst="rect">
+            <a:avLst/>
+          </a:prstGeom>
+          <a:noFill/>
+        </p:spPr>
+        <p:txBody>
+          <a:bodyPr wrap="square"/>
+          <a:lstStyle/>
+          <a:p>
+            <a:pPr algn="l">
+              <a:spcBef>
+                <a:spcPts val="0"/>
+              </a:spcBef>
+              <a:spcAft>
+                <a:spcPts val="300"/>
+              </a:spcAft>
+            </a:pPr>
+            <a:r>
+              <a:rPr sz="1200" b="0">
+                <a:solidFill>
+                  <a:srgbClr val="1C282C"/>
+                </a:solidFill>
+                <a:latin typeface="Yu Gothic"/>
+                <a:ea typeface="Yu Gothic"/>
+                <a:cs typeface="Yu Gothic"/>
+              </a:rPr>
+              <a:t>ppo_*.pt</a:t>
+            </a:r>
+          </a:p>
+          <a:p>
+            <a:pPr algn="l">
+              <a:spcBef>
+                <a:spcPts val="0"/>
+              </a:spcBef>
+              <a:spcAft>
+                <a:spcPts val="300"/>
+              </a:spcAft>
+            </a:pPr>
+            <a:r>
+              <a:rPr sz="1200" b="0">
+                <a:solidFill>
+                  <a:srgbClr val="1C282C"/>
+                </a:solidFill>
+                <a:latin typeface="Yu Gothic"/>
+                <a:ea typeface="Yu Gothic"/>
+                <a:cs typeface="Yu Gothic"/>
+              </a:rPr>
+              <a:t>metrics で最良を選定</a:t>
+            </a:r>
+          </a:p>
+        </p:txBody>
+      </p:sp>
+      <p:sp>
+        <p:nvSpPr>
+          <p:cNvPr id="26" name="Right Arrow 25"/>
+          <p:cNvSpPr/>
+          <p:nvPr/>
+        </p:nvSpPr>
+        <p:spPr>
+          <a:xfrm>
+            <a:off x="3063240" y="3785616"/>
+            <a:ext cx="365760" cy="329184"/>
+          </a:xfrm>
+          <a:prstGeom prst="rightArrow">
+            <a:avLst/>
+          </a:prstGeom>
+          <a:solidFill>
+            <a:srgbClr val="4A585C"/>
+          </a:solidFill>
+          <a:ln>
+            <a:noFill/>
+          </a:ln>
+        </p:spPr>
+        <p:style>
+          <a:lnRef idx="1">
+            <a:schemeClr val="accent1"/>
+          </a:lnRef>
+          <a:fillRef idx="3">
+            <a:schemeClr val="accent1"/>
+          </a:fillRef>
+          <a:effectRef idx="2">
+            <a:schemeClr val="accent1"/>
+          </a:effectRef>
+          <a:fontRef idx="minor">
+            <a:schemeClr val="lt1"/>
+          </a:fontRef>
+        </p:style>
+        <p:txBody>
+          <a:bodyPr rtlCol="0" anchor="ctr"/>
+          <a:lstStyle/>
+          <a:p>
+            <a:pPr algn="ctr"/>
+          </a:p>
+        </p:txBody>
+      </p:sp>
+      <p:sp>
+        <p:nvSpPr>
+          <p:cNvPr id="27" name="Rounded Rectangle 26"/>
+          <p:cNvSpPr/>
+          <p:nvPr/>
+        </p:nvSpPr>
+        <p:spPr>
+          <a:xfrm>
+            <a:off x="3474720" y="3355848"/>
+            <a:ext cx="2377440" cy="1188720"/>
+          </a:xfrm>
+          <a:prstGeom prst="roundRect">
+            <a:avLst>
+              <a:gd name="adj" fmla="val 7000"/>
+            </a:avLst>
+          </a:prstGeom>
+          <a:solidFill>
+            <a:srgbClr val="FFFFFF"/>
+          </a:solidFill>
+          <a:ln w="15875">
+            <a:solidFill>
+              <a:srgbClr val="8A452A"/>
+            </a:solidFill>
+          </a:ln>
+        </p:spPr>
+        <p:style>
+          <a:lnRef idx="1">
+            <a:schemeClr val="accent1"/>
+          </a:lnRef>
+          <a:fillRef idx="3">
+            <a:schemeClr val="accent1"/>
+          </a:fillRef>
+          <a:effectRef idx="2">
+            <a:schemeClr val="accent1"/>
+          </a:effectRef>
+          <a:fontRef idx="minor">
+            <a:schemeClr val="lt1"/>
+          </a:fontRef>
+        </p:style>
+        <p:txBody>
+          <a:bodyPr rtlCol="0" anchor="ctr"/>
+          <a:lstStyle/>
+          <a:p>
+            <a:pPr algn="ctr"/>
+          </a:p>
+        </p:txBody>
+      </p:sp>
+      <p:sp>
+        <p:nvSpPr>
+          <p:cNvPr id="28" name="Rectangle 27"/>
+          <p:cNvSpPr/>
+          <p:nvPr/>
+        </p:nvSpPr>
+        <p:spPr>
+          <a:xfrm>
+            <a:off x="3474720" y="3355848"/>
+            <a:ext cx="2377440" cy="420624"/>
+          </a:xfrm>
+          <a:prstGeom prst="rect">
+            <a:avLst/>
+          </a:prstGeom>
+          <a:solidFill>
+            <a:srgbClr val="8A452A"/>
+          </a:solidFill>
+          <a:ln>
+            <a:noFill/>
+          </a:ln>
+        </p:spPr>
+        <p:style>
+          <a:lnRef idx="1">
+            <a:schemeClr val="accent1"/>
+          </a:lnRef>
+          <a:fillRef idx="3">
+            <a:schemeClr val="accent1"/>
+          </a:fillRef>
+          <a:effectRef idx="2">
+            <a:schemeClr val="accent1"/>
+          </a:effectRef>
+          <a:fontRef idx="minor">
+            <a:schemeClr val="lt1"/>
+          </a:fontRef>
+        </p:style>
+        <p:txBody>
+          <a:bodyPr rtlCol="0" anchor="ctr" wrap="square" tIns="36576"/>
+          <a:lstStyle/>
+          <a:p>
+            <a:pPr algn="ctr">
+              <a:spcBef>
+                <a:spcPts val="0"/>
+              </a:spcBef>
+              <a:spcAft>
+                <a:spcPts val="0"/>
+              </a:spcAft>
+            </a:pPr>
+            <a:r>
+              <a:rPr sz="1400" b="1">
+                <a:solidFill>
+                  <a:srgbClr val="FFFFFF"/>
+                </a:solidFill>
+                <a:latin typeface="Yu Gothic"/>
+                <a:ea typeface="Yu Gothic"/>
+                <a:cs typeface="Yu Gothic"/>
+              </a:rPr>
+              <a:t>dvc_sync publish</a:t>
+            </a:r>
+          </a:p>
+        </p:txBody>
+      </p:sp>
+      <p:sp>
+        <p:nvSpPr>
+          <p:cNvPr id="29" name="TextBox 28"/>
+          <p:cNvSpPr txBox="1"/>
+          <p:nvPr/>
+        </p:nvSpPr>
+        <p:spPr>
+          <a:xfrm>
+            <a:off x="3566160" y="3813048"/>
+            <a:ext cx="2194560" cy="694944"/>
+          </a:xfrm>
+          <a:prstGeom prst="rect">
+            <a:avLst/>
+          </a:prstGeom>
+          <a:noFill/>
+        </p:spPr>
+        <p:txBody>
+          <a:bodyPr wrap="square"/>
+          <a:lstStyle/>
+          <a:p>
+            <a:pPr algn="l">
+              <a:spcBef>
+                <a:spcPts val="0"/>
+              </a:spcBef>
+              <a:spcAft>
+                <a:spcPts val="300"/>
+              </a:spcAft>
+            </a:pPr>
+            <a:r>
+              <a:rPr sz="1200" b="0">
+                <a:solidFill>
+                  <a:srgbClr val="1C282C"/>
+                </a:solidFill>
+                <a:latin typeface="Yu Gothic"/>
+                <a:ea typeface="Yu Gothic"/>
+                <a:cs typeface="Yu Gothic"/>
+              </a:rPr>
+              <a:t>メニュー 9 → 3 / 4</a:t>
+            </a:r>
+          </a:p>
+          <a:p>
+            <a:pPr algn="l">
+              <a:spcBef>
+                <a:spcPts val="0"/>
+              </a:spcBef>
+              <a:spcAft>
+                <a:spcPts val="300"/>
+              </a:spcAft>
+            </a:pPr>
+            <a:r>
+              <a:rPr sz="1200" b="0">
+                <a:solidFill>
+                  <a:srgbClr val="1C282C"/>
+                </a:solidFill>
+                <a:latin typeface="Yu Gothic"/>
+                <a:ea typeface="Yu Gothic"/>
+                <a:cs typeface="Yu Gothic"/>
+              </a:rPr>
+              <a:t>best.pt を DVC 管理に</a:t>
+            </a:r>
+          </a:p>
+        </p:txBody>
+      </p:sp>
+      <p:sp>
+        <p:nvSpPr>
+          <p:cNvPr id="30" name="Right Arrow 29"/>
+          <p:cNvSpPr/>
+          <p:nvPr/>
+        </p:nvSpPr>
+        <p:spPr>
+          <a:xfrm>
+            <a:off x="5897880" y="3785616"/>
+            <a:ext cx="365760" cy="329184"/>
+          </a:xfrm>
+          <a:prstGeom prst="rightArrow">
+            <a:avLst/>
+          </a:prstGeom>
+          <a:solidFill>
+            <a:srgbClr val="4A585C"/>
+          </a:solidFill>
+          <a:ln>
+            <a:noFill/>
+          </a:ln>
+        </p:spPr>
+        <p:style>
+          <a:lnRef idx="1">
+            <a:schemeClr val="accent1"/>
+          </a:lnRef>
+          <a:fillRef idx="3">
+            <a:schemeClr val="accent1"/>
+          </a:fillRef>
+          <a:effectRef idx="2">
+            <a:schemeClr val="accent1"/>
+          </a:effectRef>
+          <a:fontRef idx="minor">
+            <a:schemeClr val="lt1"/>
+          </a:fontRef>
+        </p:style>
+        <p:txBody>
+          <a:bodyPr rtlCol="0" anchor="ctr"/>
+          <a:lstStyle/>
+          <a:p>
+            <a:pPr algn="ctr"/>
+          </a:p>
+        </p:txBody>
+      </p:sp>
+      <p:sp>
+        <p:nvSpPr>
+          <p:cNvPr id="31" name="Rounded Rectangle 30"/>
+          <p:cNvSpPr/>
+          <p:nvPr/>
+        </p:nvSpPr>
+        <p:spPr>
+          <a:xfrm>
+            <a:off x="6309360" y="3355848"/>
+            <a:ext cx="2377440" cy="1188720"/>
+          </a:xfrm>
+          <a:prstGeom prst="roundRect">
+            <a:avLst>
+              <a:gd name="adj" fmla="val 7000"/>
+            </a:avLst>
+          </a:prstGeom>
+          <a:solidFill>
+            <a:srgbClr val="FFFFFF"/>
+          </a:solidFill>
+          <a:ln w="15875">
+            <a:solidFill>
+              <a:srgbClr val="8A452A"/>
+            </a:solidFill>
+          </a:ln>
+        </p:spPr>
+        <p:style>
+          <a:lnRef idx="1">
+            <a:schemeClr val="accent1"/>
+          </a:lnRef>
+          <a:fillRef idx="3">
+            <a:schemeClr val="accent1"/>
+          </a:fillRef>
+          <a:effectRef idx="2">
+            <a:schemeClr val="accent1"/>
+          </a:effectRef>
+          <a:fontRef idx="minor">
+            <a:schemeClr val="lt1"/>
+          </a:fontRef>
+        </p:style>
+        <p:txBody>
+          <a:bodyPr rtlCol="0" anchor="ctr"/>
+          <a:lstStyle/>
+          <a:p>
+            <a:pPr algn="ctr"/>
+          </a:p>
+        </p:txBody>
+      </p:sp>
+      <p:sp>
+        <p:nvSpPr>
+          <p:cNvPr id="32" name="Rectangle 31"/>
+          <p:cNvSpPr/>
+          <p:nvPr/>
+        </p:nvSpPr>
+        <p:spPr>
+          <a:xfrm>
+            <a:off x="6309360" y="3355848"/>
+            <a:ext cx="2377440" cy="420624"/>
+          </a:xfrm>
+          <a:prstGeom prst="rect">
+            <a:avLst/>
+          </a:prstGeom>
+          <a:solidFill>
+            <a:srgbClr val="8A452A"/>
+          </a:solidFill>
+          <a:ln>
+            <a:noFill/>
+          </a:ln>
+        </p:spPr>
+        <p:style>
+          <a:lnRef idx="1">
+            <a:schemeClr val="accent1"/>
+          </a:lnRef>
+          <a:fillRef idx="3">
+            <a:schemeClr val="accent1"/>
+          </a:fillRef>
+          <a:effectRef idx="2">
+            <a:schemeClr val="accent1"/>
+          </a:effectRef>
+          <a:fontRef idx="minor">
+            <a:schemeClr val="lt1"/>
+          </a:fontRef>
+        </p:style>
+        <p:txBody>
+          <a:bodyPr rtlCol="0" anchor="ctr" wrap="square" tIns="36576"/>
+          <a:lstStyle/>
+          <a:p>
+            <a:pPr algn="ctr">
+              <a:spcBef>
+                <a:spcPts val="0"/>
+              </a:spcBef>
+              <a:spcAft>
+                <a:spcPts val="0"/>
+              </a:spcAft>
+            </a:pPr>
+            <a:r>
+              <a:rPr sz="1400" b="1">
+                <a:solidFill>
+                  <a:srgbClr val="FFFFFF"/>
+                </a:solidFill>
+                <a:latin typeface="Yu Gothic"/>
+                <a:ea typeface="Yu Gothic"/>
+                <a:cs typeface="Yu Gothic"/>
+              </a:rPr>
+              <a:t>保管</a:t>
+            </a:r>
+          </a:p>
+        </p:txBody>
+      </p:sp>
+      <p:sp>
+        <p:nvSpPr>
+          <p:cNvPr id="33" name="TextBox 32"/>
+          <p:cNvSpPr txBox="1"/>
+          <p:nvPr/>
+        </p:nvSpPr>
+        <p:spPr>
+          <a:xfrm>
+            <a:off x="6400800" y="3813048"/>
+            <a:ext cx="2194560" cy="694944"/>
+          </a:xfrm>
+          <a:prstGeom prst="rect">
+            <a:avLst/>
+          </a:prstGeom>
+          <a:noFill/>
+        </p:spPr>
+        <p:txBody>
+          <a:bodyPr wrap="square"/>
+          <a:lstStyle/>
+          <a:p>
+            <a:pPr algn="l">
+              <a:spcBef>
+                <a:spcPts val="0"/>
+              </a:spcBef>
+              <a:spcAft>
+                <a:spcPts val="300"/>
+              </a:spcAft>
+            </a:pPr>
+            <a:r>
+              <a:rPr sz="1200" b="0">
+                <a:solidFill>
+                  <a:srgbClr val="1C282C"/>
+                </a:solidFill>
+                <a:latin typeface="Yu Gothic"/>
+                <a:ea typeface="Yu Gothic"/>
+                <a:cs typeface="Yu Gothic"/>
+              </a:rPr>
+              <a:t>MinIO pai-dvc: 実体</a:t>
+            </a:r>
+          </a:p>
+          <a:p>
+            <a:pPr algn="l">
+              <a:spcBef>
+                <a:spcPts val="0"/>
+              </a:spcBef>
+              <a:spcAft>
+                <a:spcPts val="300"/>
+              </a:spcAft>
+            </a:pPr>
+            <a:r>
+              <a:rPr sz="1200" b="0">
+                <a:solidFill>
+                  <a:srgbClr val="1C282C"/>
+                </a:solidFill>
+                <a:latin typeface="Yu Gothic"/>
+                <a:ea typeface="Yu Gothic"/>
+                <a:cs typeface="Yu Gothic"/>
+              </a:rPr>
+              <a:t>Git: .dvc ポインタ</a:t>
+            </a:r>
+          </a:p>
+        </p:txBody>
+      </p:sp>
+      <p:sp>
+        <p:nvSpPr>
+          <p:cNvPr id="34" name="Right Arrow 33"/>
+          <p:cNvSpPr/>
+          <p:nvPr/>
+        </p:nvSpPr>
+        <p:spPr>
+          <a:xfrm>
+            <a:off x="8732520" y="3785616"/>
+            <a:ext cx="365760" cy="329184"/>
+          </a:xfrm>
+          <a:prstGeom prst="rightArrow">
+            <a:avLst/>
+          </a:prstGeom>
+          <a:solidFill>
+            <a:srgbClr val="4A585C"/>
+          </a:solidFill>
+          <a:ln>
+            <a:noFill/>
+          </a:ln>
+        </p:spPr>
+        <p:style>
+          <a:lnRef idx="1">
+            <a:schemeClr val="accent1"/>
+          </a:lnRef>
+          <a:fillRef idx="3">
+            <a:schemeClr val="accent1"/>
+          </a:fillRef>
+          <a:effectRef idx="2">
+            <a:schemeClr val="accent1"/>
+          </a:effectRef>
+          <a:fontRef idx="minor">
+            <a:schemeClr val="lt1"/>
+          </a:fontRef>
+        </p:style>
+        <p:txBody>
+          <a:bodyPr rtlCol="0" anchor="ctr"/>
+          <a:lstStyle/>
+          <a:p>
+            <a:pPr algn="ctr"/>
+          </a:p>
+        </p:txBody>
+      </p:sp>
+      <p:sp>
+        <p:nvSpPr>
+          <p:cNvPr id="35" name="Rounded Rectangle 34"/>
+          <p:cNvSpPr/>
+          <p:nvPr/>
+        </p:nvSpPr>
+        <p:spPr>
+          <a:xfrm>
+            <a:off x="9144000" y="3355848"/>
+            <a:ext cx="2377440" cy="1188720"/>
+          </a:xfrm>
+          <a:prstGeom prst="roundRect">
+            <a:avLst>
+              <a:gd name="adj" fmla="val 7000"/>
+            </a:avLst>
+          </a:prstGeom>
+          <a:solidFill>
+            <a:srgbClr val="FFFFFF"/>
+          </a:solidFill>
+          <a:ln w="15875">
+            <a:solidFill>
+              <a:srgbClr val="8A452A"/>
+            </a:solidFill>
+          </a:ln>
+        </p:spPr>
+        <p:style>
+          <a:lnRef idx="1">
+            <a:schemeClr val="accent1"/>
+          </a:lnRef>
+          <a:fillRef idx="3">
+            <a:schemeClr val="accent1"/>
+          </a:fillRef>
+          <a:effectRef idx="2">
+            <a:schemeClr val="accent1"/>
+          </a:effectRef>
+          <a:fontRef idx="minor">
+            <a:schemeClr val="lt1"/>
+          </a:fontRef>
+        </p:style>
+        <p:txBody>
+          <a:bodyPr rtlCol="0" anchor="ctr"/>
+          <a:lstStyle/>
+          <a:p>
+            <a:pPr algn="ctr"/>
+          </a:p>
+        </p:txBody>
+      </p:sp>
+      <p:sp>
+        <p:nvSpPr>
+          <p:cNvPr id="36" name="Rectangle 35"/>
+          <p:cNvSpPr/>
+          <p:nvPr/>
+        </p:nvSpPr>
+        <p:spPr>
+          <a:xfrm>
+            <a:off x="9144000" y="3355848"/>
+            <a:ext cx="2377440" cy="420624"/>
+          </a:xfrm>
+          <a:prstGeom prst="rect">
+            <a:avLst/>
+          </a:prstGeom>
+          <a:solidFill>
+            <a:srgbClr val="8A452A"/>
+          </a:solidFill>
+          <a:ln>
+            <a:noFill/>
+          </a:ln>
+        </p:spPr>
+        <p:style>
+          <a:lnRef idx="1">
+            <a:schemeClr val="accent1"/>
+          </a:lnRef>
+          <a:fillRef idx="3">
+            <a:schemeClr val="accent1"/>
+          </a:fillRef>
+          <a:effectRef idx="2">
+            <a:schemeClr val="accent1"/>
+          </a:effectRef>
+          <a:fontRef idx="minor">
+            <a:schemeClr val="lt1"/>
+          </a:fontRef>
+        </p:style>
+        <p:txBody>
+          <a:bodyPr rtlCol="0" anchor="ctr" wrap="square" tIns="36576"/>
+          <a:lstStyle/>
+          <a:p>
+            <a:pPr algn="ctr">
+              <a:spcBef>
+                <a:spcPts val="0"/>
+              </a:spcBef>
+              <a:spcAft>
+                <a:spcPts val="0"/>
+              </a:spcAft>
+            </a:pPr>
+            <a:r>
+              <a:rPr sz="1400" b="1">
+                <a:solidFill>
+                  <a:srgbClr val="FFFFFF"/>
+                </a:solidFill>
+                <a:latin typeface="Yu Gothic"/>
+                <a:ea typeface="Yu Gothic"/>
+                <a:cs typeface="Yu Gothic"/>
+              </a:rPr>
+              <a:t>取り出し</a:t>
+            </a:r>
+          </a:p>
+        </p:txBody>
+      </p:sp>
+      <p:sp>
+        <p:nvSpPr>
+          <p:cNvPr id="37" name="TextBox 36"/>
+          <p:cNvSpPr txBox="1"/>
+          <p:nvPr/>
+        </p:nvSpPr>
+        <p:spPr>
+          <a:xfrm>
+            <a:off x="9235440" y="3813048"/>
+            <a:ext cx="2194560" cy="694944"/>
+          </a:xfrm>
+          <a:prstGeom prst="rect">
+            <a:avLst/>
+          </a:prstGeom>
+          <a:noFill/>
+        </p:spPr>
+        <p:txBody>
+          <a:bodyPr wrap="square"/>
+          <a:lstStyle/>
+          <a:p>
+            <a:pPr algn="l">
+              <a:spcBef>
+                <a:spcPts val="0"/>
+              </a:spcBef>
+              <a:spcAft>
+                <a:spcPts val="300"/>
+              </a:spcAft>
+            </a:pPr>
+            <a:r>
+              <a:rPr sz="1200" b="0">
+                <a:solidFill>
+                  <a:srgbClr val="1C282C"/>
+                </a:solidFill>
+                <a:latin typeface="Yu Gothic"/>
+                <a:ea typeface="Yu Gothic"/>
+                <a:cs typeface="Yu Gothic"/>
+              </a:rPr>
+              <a:t>9 → 5 pull → restore</a:t>
+            </a:r>
+          </a:p>
+          <a:p>
+            <a:pPr algn="l">
+              <a:spcBef>
+                <a:spcPts val="0"/>
+              </a:spcBef>
+              <a:spcAft>
+                <a:spcPts val="300"/>
+              </a:spcAft>
+            </a:pPr>
+            <a:r>
+              <a:rPr sz="1200" b="0">
+                <a:solidFill>
+                  <a:srgbClr val="1C282C"/>
+                </a:solidFill>
+                <a:latin typeface="Yu Gothic"/>
+                <a:ea typeface="Yu Gothic"/>
+                <a:cs typeface="Yu Gothic"/>
+              </a:rPr>
+              <a:t>9 → 6 best.pt で推論</a:t>
+            </a:r>
+          </a:p>
+        </p:txBody>
+      </p:sp>
+      <p:sp>
+        <p:nvSpPr>
+          <p:cNvPr id="38" name="TextBox 37"/>
+          <p:cNvSpPr txBox="1"/>
+          <p:nvPr/>
+        </p:nvSpPr>
+        <p:spPr>
+          <a:xfrm>
+            <a:off x="640080" y="4690872"/>
+            <a:ext cx="7315200" cy="292608"/>
+          </a:xfrm>
+          <a:prstGeom prst="rect">
+            <a:avLst/>
+          </a:prstGeom>
+          <a:noFill/>
+        </p:spPr>
+        <p:txBody>
+          <a:bodyPr wrap="square"/>
+          <a:lstStyle/>
+          <a:p>
+            <a:pPr algn="l">
+              <a:spcBef>
+                <a:spcPts val="0"/>
+              </a:spcBef>
+              <a:spcAft>
+                <a:spcPts val="0"/>
+              </a:spcAft>
+            </a:pPr>
+            <a:r>
+              <a:rPr sz="1300" b="1">
+                <a:solidFill>
+                  <a:srgbClr val="4A585C"/>
+                </a:solidFill>
+                <a:latin typeface="Yu Gothic"/>
+                <a:ea typeface="Yu Gothic"/>
+                <a:cs typeface="Yu Gothic"/>
+              </a:rPr>
+              <a:t>C. 実機への配信（必要なとき）</a:t>
+            </a:r>
+          </a:p>
+        </p:txBody>
+      </p:sp>
+      <p:sp>
+        <p:nvSpPr>
+          <p:cNvPr id="39" name="Rounded Rectangle 38"/>
+          <p:cNvSpPr/>
+          <p:nvPr/>
+        </p:nvSpPr>
+        <p:spPr>
+          <a:xfrm>
+            <a:off x="640080" y="5001768"/>
+            <a:ext cx="2377440" cy="1188720"/>
+          </a:xfrm>
+          <a:prstGeom prst="roundRect">
+            <a:avLst>
+              <a:gd name="adj" fmla="val 7000"/>
+            </a:avLst>
+          </a:prstGeom>
+          <a:solidFill>
+            <a:srgbClr val="FFFFFF"/>
+          </a:solidFill>
+          <a:ln w="15875">
+            <a:solidFill>
+              <a:srgbClr val="4A585C"/>
+            </a:solidFill>
+          </a:ln>
+        </p:spPr>
+        <p:style>
+          <a:lnRef idx="1">
+            <a:schemeClr val="accent1"/>
+          </a:lnRef>
+          <a:fillRef idx="3">
+            <a:schemeClr val="accent1"/>
+          </a:fillRef>
+          <a:effectRef idx="2">
+            <a:schemeClr val="accent1"/>
+          </a:effectRef>
+          <a:fontRef idx="minor">
+            <a:schemeClr val="lt1"/>
+          </a:fontRef>
+        </p:style>
+        <p:txBody>
+          <a:bodyPr rtlCol="0" anchor="ctr"/>
+          <a:lstStyle/>
+          <a:p>
+            <a:pPr algn="ctr"/>
+          </a:p>
+        </p:txBody>
+      </p:sp>
+      <p:sp>
+        <p:nvSpPr>
+          <p:cNvPr id="40" name="Rectangle 39"/>
+          <p:cNvSpPr/>
+          <p:nvPr/>
+        </p:nvSpPr>
+        <p:spPr>
+          <a:xfrm>
+            <a:off x="640080" y="5001768"/>
+            <a:ext cx="2377440" cy="420624"/>
+          </a:xfrm>
+          <a:prstGeom prst="rect">
+            <a:avLst/>
+          </a:prstGeom>
+          <a:solidFill>
+            <a:srgbClr val="4A585C"/>
+          </a:solidFill>
+          <a:ln>
+            <a:noFill/>
+          </a:ln>
+        </p:spPr>
+        <p:style>
+          <a:lnRef idx="1">
+            <a:schemeClr val="accent1"/>
+          </a:lnRef>
+          <a:fillRef idx="3">
+            <a:schemeClr val="accent1"/>
+          </a:fillRef>
+          <a:effectRef idx="2">
+            <a:schemeClr val="accent1"/>
+          </a:effectRef>
+          <a:fontRef idx="minor">
+            <a:schemeClr val="lt1"/>
+          </a:fontRef>
+        </p:style>
+        <p:txBody>
+          <a:bodyPr rtlCol="0" anchor="ctr" wrap="square" tIns="36576"/>
+          <a:lstStyle/>
+          <a:p>
+            <a:pPr algn="ctr">
+              <a:spcBef>
+                <a:spcPts val="0"/>
+              </a:spcBef>
+              <a:spcAft>
+                <a:spcPts val="0"/>
+              </a:spcAft>
+            </a:pPr>
+            <a:r>
+              <a:rPr sz="1400" b="1">
+                <a:solidFill>
+                  <a:srgbClr val="FFFFFF"/>
+                </a:solidFill>
+                <a:latin typeface="Yu Gothic"/>
+                <a:ea typeface="Yu Gothic"/>
+                <a:cs typeface="Yu Gothic"/>
+              </a:rPr>
+              <a:t>best.pt</a:t>
+            </a:r>
+          </a:p>
+        </p:txBody>
+      </p:sp>
+      <p:sp>
+        <p:nvSpPr>
+          <p:cNvPr id="41" name="TextBox 40"/>
+          <p:cNvSpPr txBox="1"/>
+          <p:nvPr/>
+        </p:nvSpPr>
+        <p:spPr>
+          <a:xfrm>
+            <a:off x="731520" y="5458968"/>
+            <a:ext cx="2194560" cy="694944"/>
+          </a:xfrm>
+          <a:prstGeom prst="rect">
+            <a:avLst/>
+          </a:prstGeom>
+          <a:noFill/>
+        </p:spPr>
+        <p:txBody>
+          <a:bodyPr wrap="square"/>
+          <a:lstStyle/>
+          <a:p>
+            <a:pPr algn="l">
+              <a:spcBef>
+                <a:spcPts val="0"/>
+              </a:spcBef>
+              <a:spcAft>
+                <a:spcPts val="300"/>
+              </a:spcAft>
+            </a:pPr>
+            <a:r>
+              <a:rPr sz="1200" b="0">
+                <a:solidFill>
+                  <a:srgbClr val="1C282C"/>
+                </a:solidFill>
+                <a:latin typeface="Yu Gothic"/>
+                <a:ea typeface="Yu Gothic"/>
+                <a:cs typeface="Yu Gothic"/>
+              </a:rPr>
+              <a:t>DVC から resolve</a:t>
+            </a:r>
+          </a:p>
+          <a:p>
+            <a:pPr algn="l">
+              <a:spcBef>
+                <a:spcPts val="0"/>
+              </a:spcBef>
+              <a:spcAft>
+                <a:spcPts val="300"/>
+              </a:spcAft>
+            </a:pPr>
+            <a:r>
+              <a:rPr sz="1200" b="0">
+                <a:solidFill>
+                  <a:srgbClr val="1C282C"/>
+                </a:solidFill>
+                <a:latin typeface="Yu Gothic"/>
+                <a:ea typeface="Yu Gothic"/>
+                <a:cs typeface="Yu Gothic"/>
+              </a:rPr>
+              <a:t>（B の成果物）</a:t>
+            </a:r>
+          </a:p>
+        </p:txBody>
+      </p:sp>
+      <p:sp>
+        <p:nvSpPr>
+          <p:cNvPr id="42" name="Right Arrow 41"/>
+          <p:cNvSpPr/>
+          <p:nvPr/>
+        </p:nvSpPr>
+        <p:spPr>
+          <a:xfrm>
+            <a:off x="3063240" y="5431536"/>
+            <a:ext cx="365760" cy="329184"/>
+          </a:xfrm>
+          <a:prstGeom prst="rightArrow">
+            <a:avLst/>
+          </a:prstGeom>
+          <a:solidFill>
+            <a:srgbClr val="4A585C"/>
+          </a:solidFill>
+          <a:ln>
+            <a:noFill/>
+          </a:ln>
+        </p:spPr>
+        <p:style>
+          <a:lnRef idx="1">
+            <a:schemeClr val="accent1"/>
+          </a:lnRef>
+          <a:fillRef idx="3">
+            <a:schemeClr val="accent1"/>
+          </a:fillRef>
+          <a:effectRef idx="2">
+            <a:schemeClr val="accent1"/>
+          </a:effectRef>
+          <a:fontRef idx="minor">
+            <a:schemeClr val="lt1"/>
+          </a:fontRef>
+        </p:style>
+        <p:txBody>
+          <a:bodyPr rtlCol="0" anchor="ctr"/>
+          <a:lstStyle/>
+          <a:p>
+            <a:pPr algn="ctr"/>
+          </a:p>
+        </p:txBody>
+      </p:sp>
+      <p:sp>
+        <p:nvSpPr>
+          <p:cNvPr id="43" name="Rounded Rectangle 42"/>
+          <p:cNvSpPr/>
+          <p:nvPr/>
+        </p:nvSpPr>
+        <p:spPr>
+          <a:xfrm>
+            <a:off x="3474720" y="5001768"/>
+            <a:ext cx="2377440" cy="1188720"/>
+          </a:xfrm>
+          <a:prstGeom prst="roundRect">
+            <a:avLst>
+              <a:gd name="adj" fmla="val 7000"/>
+            </a:avLst>
+          </a:prstGeom>
+          <a:solidFill>
+            <a:srgbClr val="FFFFFF"/>
+          </a:solidFill>
+          <a:ln w="15875">
+            <a:solidFill>
+              <a:srgbClr val="4A585C"/>
+            </a:solidFill>
+          </a:ln>
+        </p:spPr>
+        <p:style>
+          <a:lnRef idx="1">
+            <a:schemeClr val="accent1"/>
+          </a:lnRef>
+          <a:fillRef idx="3">
+            <a:schemeClr val="accent1"/>
+          </a:fillRef>
+          <a:effectRef idx="2">
+            <a:schemeClr val="accent1"/>
+          </a:effectRef>
+          <a:fontRef idx="minor">
+            <a:schemeClr val="lt1"/>
+          </a:fontRef>
+        </p:style>
+        <p:txBody>
+          <a:bodyPr rtlCol="0" anchor="ctr"/>
+          <a:lstStyle/>
+          <a:p>
+            <a:pPr algn="ctr"/>
+          </a:p>
+        </p:txBody>
+      </p:sp>
+      <p:sp>
+        <p:nvSpPr>
+          <p:cNvPr id="44" name="Rectangle 43"/>
+          <p:cNvSpPr/>
+          <p:nvPr/>
+        </p:nvSpPr>
+        <p:spPr>
+          <a:xfrm>
+            <a:off x="3474720" y="5001768"/>
+            <a:ext cx="2377440" cy="420624"/>
+          </a:xfrm>
+          <a:prstGeom prst="rect">
+            <a:avLst/>
+          </a:prstGeom>
+          <a:solidFill>
+            <a:srgbClr val="4A585C"/>
+          </a:solidFill>
+          <a:ln>
+            <a:noFill/>
+          </a:ln>
+        </p:spPr>
+        <p:style>
+          <a:lnRef idx="1">
+            <a:schemeClr val="accent1"/>
+          </a:lnRef>
+          <a:fillRef idx="3">
+            <a:schemeClr val="accent1"/>
+          </a:fillRef>
+          <a:effectRef idx="2">
+            <a:schemeClr val="accent1"/>
+          </a:effectRef>
+          <a:fontRef idx="minor">
+            <a:schemeClr val="lt1"/>
+          </a:fontRef>
+        </p:style>
+        <p:txBody>
+          <a:bodyPr rtlCol="0" anchor="ctr" wrap="square" tIns="36576"/>
+          <a:lstStyle/>
+          <a:p>
+            <a:pPr algn="ctr">
+              <a:spcBef>
+                <a:spcPts val="0"/>
+              </a:spcBef>
+              <a:spcAft>
+                <a:spcPts val="0"/>
+              </a:spcAft>
+            </a:pPr>
+            <a:r>
+              <a:rPr sz="1400" b="1">
+                <a:solidFill>
+                  <a:srgbClr val="FFFFFF"/>
+                </a:solidFill>
+                <a:latin typeface="Yu Gothic"/>
+                <a:ea typeface="Yu Gothic"/>
+                <a:cs typeface="Yu Gothic"/>
+              </a:rPr>
+              <a:t>Artifact 作成</a:t>
+            </a:r>
+          </a:p>
+        </p:txBody>
+      </p:sp>
+      <p:sp>
+        <p:nvSpPr>
+          <p:cNvPr id="45" name="TextBox 44"/>
+          <p:cNvSpPr txBox="1"/>
+          <p:nvPr/>
+        </p:nvSpPr>
+        <p:spPr>
+          <a:xfrm>
+            <a:off x="3566160" y="5458968"/>
+            <a:ext cx="2194560" cy="694944"/>
+          </a:xfrm>
+          <a:prstGeom prst="rect">
+            <a:avLst/>
+          </a:prstGeom>
+          <a:noFill/>
+        </p:spPr>
+        <p:txBody>
+          <a:bodyPr wrap="square"/>
+          <a:lstStyle/>
+          <a:p>
+            <a:pPr algn="l">
+              <a:spcBef>
+                <a:spcPts val="0"/>
+              </a:spcBef>
+              <a:spcAft>
+                <a:spcPts val="300"/>
+              </a:spcAft>
+            </a:pPr>
+            <a:r>
+              <a:rPr sz="1200" b="0">
+                <a:solidFill>
+                  <a:srgbClr val="1C282C"/>
+                </a:solidFill>
+                <a:latin typeface="Yu Gothic"/>
+                <a:ea typeface="Yu Gothic"/>
+                <a:cs typeface="Yu Gothic"/>
+              </a:rPr>
+              <a:t>メニュー 9 → 9</a:t>
+            </a:r>
+          </a:p>
+          <a:p>
+            <a:pPr algn="l">
+              <a:spcBef>
+                <a:spcPts val="0"/>
+              </a:spcBef>
+              <a:spcAft>
+                <a:spcPts val="300"/>
+              </a:spcAft>
+            </a:pPr>
+            <a:r>
+              <a:rPr sz="1200" b="0">
+                <a:solidFill>
+                  <a:srgbClr val="1C282C"/>
+                </a:solidFill>
+                <a:latin typeface="Yu Gothic"/>
+                <a:ea typeface="Yu Gothic"/>
+                <a:cs typeface="Yu Gothic"/>
+              </a:rPr>
+              <a:t>mender_pack_model.py</a:t>
+            </a:r>
+          </a:p>
+          <a:p>
+            <a:pPr algn="l">
+              <a:spcBef>
+                <a:spcPts val="0"/>
+              </a:spcBef>
+              <a:spcAft>
+                <a:spcPts val="300"/>
+              </a:spcAft>
+            </a:pPr>
+            <a:r>
+              <a:rPr sz="1200" b="0">
+                <a:solidFill>
+                  <a:srgbClr val="1C282C"/>
+                </a:solidFill>
+                <a:latin typeface="Yu Gothic"/>
+                <a:ea typeface="Yu Gothic"/>
+                <a:cs typeface="Yu Gothic"/>
+              </a:rPr>
+              <a:t>→ .mender</a:t>
+            </a:r>
+          </a:p>
+        </p:txBody>
+      </p:sp>
+      <p:sp>
+        <p:nvSpPr>
+          <p:cNvPr id="46" name="Right Arrow 45"/>
+          <p:cNvSpPr/>
+          <p:nvPr/>
+        </p:nvSpPr>
+        <p:spPr>
+          <a:xfrm>
+            <a:off x="5897880" y="5431536"/>
+            <a:ext cx="365760" cy="329184"/>
+          </a:xfrm>
+          <a:prstGeom prst="rightArrow">
+            <a:avLst/>
+          </a:prstGeom>
+          <a:solidFill>
+            <a:srgbClr val="4A585C"/>
+          </a:solidFill>
+          <a:ln>
+            <a:noFill/>
+          </a:ln>
+        </p:spPr>
+        <p:style>
+          <a:lnRef idx="1">
+            <a:schemeClr val="accent1"/>
+          </a:lnRef>
+          <a:fillRef idx="3">
+            <a:schemeClr val="accent1"/>
+          </a:fillRef>
+          <a:effectRef idx="2">
+            <a:schemeClr val="accent1"/>
+          </a:effectRef>
+          <a:fontRef idx="minor">
+            <a:schemeClr val="lt1"/>
+          </a:fontRef>
+        </p:style>
+        <p:txBody>
+          <a:bodyPr rtlCol="0" anchor="ctr"/>
+          <a:lstStyle/>
+          <a:p>
+            <a:pPr algn="ctr"/>
+          </a:p>
+        </p:txBody>
+      </p:sp>
+      <p:sp>
+        <p:nvSpPr>
+          <p:cNvPr id="47" name="Rounded Rectangle 46"/>
+          <p:cNvSpPr/>
+          <p:nvPr/>
+        </p:nvSpPr>
+        <p:spPr>
+          <a:xfrm>
+            <a:off x="6309360" y="5001768"/>
+            <a:ext cx="2377440" cy="1188720"/>
+          </a:xfrm>
+          <a:prstGeom prst="roundRect">
+            <a:avLst>
+              <a:gd name="adj" fmla="val 7000"/>
+            </a:avLst>
+          </a:prstGeom>
+          <a:solidFill>
+            <a:srgbClr val="FFFFFF"/>
+          </a:solidFill>
+          <a:ln w="15875">
+            <a:solidFill>
+              <a:srgbClr val="4A585C"/>
+            </a:solidFill>
+          </a:ln>
+        </p:spPr>
+        <p:style>
+          <a:lnRef idx="1">
+            <a:schemeClr val="accent1"/>
+          </a:lnRef>
+          <a:fillRef idx="3">
+            <a:schemeClr val="accent1"/>
+          </a:fillRef>
+          <a:effectRef idx="2">
+            <a:schemeClr val="accent1"/>
+          </a:effectRef>
+          <a:fontRef idx="minor">
+            <a:schemeClr val="lt1"/>
+          </a:fontRef>
+        </p:style>
+        <p:txBody>
+          <a:bodyPr rtlCol="0" anchor="ctr"/>
+          <a:lstStyle/>
+          <a:p>
+            <a:pPr algn="ctr"/>
+          </a:p>
+        </p:txBody>
+      </p:sp>
+      <p:sp>
+        <p:nvSpPr>
+          <p:cNvPr id="48" name="Rectangle 47"/>
+          <p:cNvSpPr/>
+          <p:nvPr/>
+        </p:nvSpPr>
+        <p:spPr>
+          <a:xfrm>
+            <a:off x="6309360" y="5001768"/>
+            <a:ext cx="2377440" cy="420624"/>
+          </a:xfrm>
+          <a:prstGeom prst="rect">
+            <a:avLst/>
+          </a:prstGeom>
+          <a:solidFill>
+            <a:srgbClr val="4A585C"/>
+          </a:solidFill>
+          <a:ln>
+            <a:noFill/>
+          </a:ln>
+        </p:spPr>
+        <p:style>
+          <a:lnRef idx="1">
+            <a:schemeClr val="accent1"/>
+          </a:lnRef>
+          <a:fillRef idx="3">
+            <a:schemeClr val="accent1"/>
+          </a:fillRef>
+          <a:effectRef idx="2">
+            <a:schemeClr val="accent1"/>
+          </a:effectRef>
+          <a:fontRef idx="minor">
+            <a:schemeClr val="lt1"/>
+          </a:fontRef>
+        </p:style>
+        <p:txBody>
+          <a:bodyPr rtlCol="0" anchor="ctr" wrap="square" tIns="36576"/>
+          <a:lstStyle/>
+          <a:p>
+            <a:pPr algn="ctr">
+              <a:spcBef>
+                <a:spcPts val="0"/>
+              </a:spcBef>
+              <a:spcAft>
+                <a:spcPts val="0"/>
+              </a:spcAft>
+            </a:pPr>
+            <a:r>
+              <a:rPr sz="1400" b="1">
+                <a:solidFill>
+                  <a:srgbClr val="FFFFFF"/>
+                </a:solidFill>
+                <a:latin typeface="Yu Gothic"/>
+                <a:ea typeface="Yu Gothic"/>
+                <a:cs typeface="Yu Gothic"/>
+              </a:rPr>
+              <a:t>Hosted Mender</a:t>
+            </a:r>
+          </a:p>
+        </p:txBody>
+      </p:sp>
+      <p:sp>
+        <p:nvSpPr>
+          <p:cNvPr id="49" name="TextBox 48"/>
+          <p:cNvSpPr txBox="1"/>
+          <p:nvPr/>
+        </p:nvSpPr>
+        <p:spPr>
+          <a:xfrm>
+            <a:off x="6400800" y="5458968"/>
+            <a:ext cx="2194560" cy="694944"/>
+          </a:xfrm>
+          <a:prstGeom prst="rect">
+            <a:avLst/>
+          </a:prstGeom>
+          <a:noFill/>
+        </p:spPr>
+        <p:txBody>
+          <a:bodyPr wrap="square"/>
+          <a:lstStyle/>
+          <a:p>
+            <a:pPr algn="l">
+              <a:spcBef>
+                <a:spcPts val="0"/>
+              </a:spcBef>
+              <a:spcAft>
+                <a:spcPts val="300"/>
+              </a:spcAft>
+            </a:pPr>
+            <a:r>
+              <a:rPr sz="1200" b="0">
+                <a:solidFill>
+                  <a:srgbClr val="1C282C"/>
+                </a:solidFill>
+                <a:latin typeface="Yu Gothic"/>
+                <a:ea typeface="Yu Gothic"/>
+                <a:cs typeface="Yu Gothic"/>
+              </a:rPr>
+              <a:t>Artifact を</a:t>
+            </a:r>
+          </a:p>
+          <a:p>
+            <a:pPr algn="l">
+              <a:spcBef>
+                <a:spcPts val="0"/>
+              </a:spcBef>
+              <a:spcAft>
+                <a:spcPts val="300"/>
+              </a:spcAft>
+            </a:pPr>
+            <a:r>
+              <a:rPr sz="1200" b="0">
+                <a:solidFill>
+                  <a:srgbClr val="1C282C"/>
+                </a:solidFill>
+                <a:latin typeface="Yu Gothic"/>
+                <a:ea typeface="Yu Gothic"/>
+                <a:cs typeface="Yu Gothic"/>
+              </a:rPr>
+              <a:t>アップロード → Deploy</a:t>
+            </a:r>
+          </a:p>
+        </p:txBody>
+      </p:sp>
+      <p:sp>
+        <p:nvSpPr>
+          <p:cNvPr id="50" name="Right Arrow 49"/>
+          <p:cNvSpPr/>
+          <p:nvPr/>
+        </p:nvSpPr>
+        <p:spPr>
+          <a:xfrm>
+            <a:off x="8732520" y="5431536"/>
+            <a:ext cx="365760" cy="329184"/>
+          </a:xfrm>
+          <a:prstGeom prst="rightArrow">
+            <a:avLst/>
+          </a:prstGeom>
+          <a:solidFill>
+            <a:srgbClr val="4A585C"/>
+          </a:solidFill>
+          <a:ln>
+            <a:noFill/>
+          </a:ln>
+        </p:spPr>
+        <p:style>
+          <a:lnRef idx="1">
+            <a:schemeClr val="accent1"/>
+          </a:lnRef>
+          <a:fillRef idx="3">
+            <a:schemeClr val="accent1"/>
+          </a:fillRef>
+          <a:effectRef idx="2">
+            <a:schemeClr val="accent1"/>
+          </a:effectRef>
+          <a:fontRef idx="minor">
+            <a:schemeClr val="lt1"/>
+          </a:fontRef>
+        </p:style>
+        <p:txBody>
+          <a:bodyPr rtlCol="0" anchor="ctr"/>
+          <a:lstStyle/>
+          <a:p>
+            <a:pPr algn="ctr"/>
+          </a:p>
+        </p:txBody>
+      </p:sp>
+      <p:sp>
+        <p:nvSpPr>
+          <p:cNvPr id="51" name="Rounded Rectangle 50"/>
+          <p:cNvSpPr/>
+          <p:nvPr/>
+        </p:nvSpPr>
+        <p:spPr>
+          <a:xfrm>
+            <a:off x="9144000" y="5001768"/>
+            <a:ext cx="2377440" cy="1188720"/>
+          </a:xfrm>
+          <a:prstGeom prst="roundRect">
+            <a:avLst>
+              <a:gd name="adj" fmla="val 7000"/>
+            </a:avLst>
+          </a:prstGeom>
+          <a:solidFill>
+            <a:srgbClr val="FFFFFF"/>
+          </a:solidFill>
+          <a:ln w="15875">
+            <a:solidFill>
+              <a:srgbClr val="4A585C"/>
+            </a:solidFill>
+          </a:ln>
+        </p:spPr>
+        <p:style>
+          <a:lnRef idx="1">
+            <a:schemeClr val="accent1"/>
+          </a:lnRef>
+          <a:fillRef idx="3">
+            <a:schemeClr val="accent1"/>
+          </a:fillRef>
+          <a:effectRef idx="2">
+            <a:schemeClr val="accent1"/>
+          </a:effectRef>
+          <a:fontRef idx="minor">
+            <a:schemeClr val="lt1"/>
+          </a:fontRef>
+        </p:style>
+        <p:txBody>
+          <a:bodyPr rtlCol="0" anchor="ctr"/>
+          <a:lstStyle/>
+          <a:p>
+            <a:pPr algn="ctr"/>
+          </a:p>
+        </p:txBody>
+      </p:sp>
+      <p:sp>
+        <p:nvSpPr>
+          <p:cNvPr id="52" name="Rectangle 51"/>
+          <p:cNvSpPr/>
+          <p:nvPr/>
+        </p:nvSpPr>
+        <p:spPr>
+          <a:xfrm>
+            <a:off x="9144000" y="5001768"/>
+            <a:ext cx="2377440" cy="420624"/>
+          </a:xfrm>
+          <a:prstGeom prst="rect">
+            <a:avLst/>
+          </a:prstGeom>
+          <a:solidFill>
+            <a:srgbClr val="4A585C"/>
+          </a:solidFill>
+          <a:ln>
+            <a:noFill/>
+          </a:ln>
+        </p:spPr>
+        <p:style>
+          <a:lnRef idx="1">
+            <a:schemeClr val="accent1"/>
+          </a:lnRef>
+          <a:fillRef idx="3">
+            <a:schemeClr val="accent1"/>
+          </a:fillRef>
+          <a:effectRef idx="2">
+            <a:schemeClr val="accent1"/>
+          </a:effectRef>
+          <a:fontRef idx="minor">
+            <a:schemeClr val="lt1"/>
+          </a:fontRef>
+        </p:style>
+        <p:txBody>
+          <a:bodyPr rtlCol="0" anchor="ctr" wrap="square" tIns="36576"/>
+          <a:lstStyle/>
+          <a:p>
+            <a:pPr algn="ctr">
+              <a:spcBef>
+                <a:spcPts val="0"/>
+              </a:spcBef>
+              <a:spcAft>
+                <a:spcPts val="0"/>
+              </a:spcAft>
+            </a:pPr>
+            <a:r>
+              <a:rPr sz="1400" b="1">
+                <a:solidFill>
+                  <a:srgbClr val="FFFFFF"/>
+                </a:solidFill>
+                <a:latin typeface="Yu Gothic"/>
+                <a:ea typeface="Yu Gothic"/>
+                <a:cs typeface="Yu Gothic"/>
+              </a:rPr>
+              <a:t>Go2 実機</a:t>
+            </a:r>
+          </a:p>
+        </p:txBody>
+      </p:sp>
+      <p:sp>
+        <p:nvSpPr>
+          <p:cNvPr id="53" name="TextBox 52"/>
+          <p:cNvSpPr txBox="1"/>
+          <p:nvPr/>
+        </p:nvSpPr>
+        <p:spPr>
+          <a:xfrm>
+            <a:off x="9235440" y="5458968"/>
+            <a:ext cx="2194560" cy="694944"/>
+          </a:xfrm>
+          <a:prstGeom prst="rect">
+            <a:avLst/>
+          </a:prstGeom>
+          <a:noFill/>
+        </p:spPr>
+        <p:txBody>
+          <a:bodyPr wrap="square"/>
+          <a:lstStyle/>
+          <a:p>
+            <a:pPr algn="l">
+              <a:spcBef>
+                <a:spcPts val="0"/>
+              </a:spcBef>
+              <a:spcAft>
+                <a:spcPts val="300"/>
+              </a:spcAft>
+            </a:pPr>
+            <a:r>
+              <a:rPr sz="1200" b="0">
+                <a:solidFill>
+                  <a:srgbClr val="1C282C"/>
+                </a:solidFill>
+                <a:latin typeface="Yu Gothic"/>
+                <a:ea typeface="Yu Gothic"/>
+                <a:cs typeface="Yu Gothic"/>
+              </a:rPr>
+              <a:t>/data/pai/models/</a:t>
+            </a:r>
+          </a:p>
+          <a:p>
+            <a:pPr algn="l">
+              <a:spcBef>
+                <a:spcPts val="0"/>
+              </a:spcBef>
+              <a:spcAft>
+                <a:spcPts val="300"/>
+              </a:spcAft>
+            </a:pPr>
+            <a:r>
+              <a:rPr sz="1200" b="0">
+                <a:solidFill>
+                  <a:srgbClr val="1C282C"/>
+                </a:solidFill>
+                <a:latin typeface="Yu Gothic"/>
+                <a:ea typeface="Yu Gothic"/>
+                <a:cs typeface="Yu Gothic"/>
+              </a:rPr>
+              <a:t>active/best.pt に配置</a:t>
+            </a:r>
+          </a:p>
+        </p:txBody>
+      </p:sp>
+      <p:sp>
+        <p:nvSpPr>
+          <p:cNvPr id="54" name="TextBox 53"/>
+          <p:cNvSpPr txBox="1"/>
+          <p:nvPr/>
+        </p:nvSpPr>
+        <p:spPr>
+          <a:xfrm>
+            <a:off x="640080" y="6355080"/>
+            <a:ext cx="10972800" cy="365760"/>
+          </a:xfrm>
+          <a:prstGeom prst="rect">
+            <a:avLst/>
+          </a:prstGeom>
+          <a:noFill/>
+        </p:spPr>
+        <p:txBody>
+          <a:bodyPr wrap="square"/>
+          <a:lstStyle/>
+          <a:p>
+            <a:pPr algn="l">
+              <a:spcBef>
+                <a:spcPts val="0"/>
+              </a:spcBef>
+              <a:spcAft>
+                <a:spcPts val="0"/>
+              </a:spcAft>
+            </a:pPr>
+            <a:r>
+              <a:rPr sz="1200" b="0">
+                <a:solidFill>
+                  <a:srgbClr val="4A585C"/>
+                </a:solidFill>
+                <a:latin typeface="Yu Gothic"/>
+                <a:ea typeface="Yu Gothic"/>
+                <a:cs typeface="Yu Gothic"/>
+              </a:rPr>
+              <a:t>A の記録は自動。B・C は「共有したい」「実機に載せたい」ときだけ、起動スクリプトのメニュー 9 から実行。</a:t>
+            </a:r>
+          </a:p>
+        </p:txBody>
+      </p:sp>
     </p:spTree>
   </p:cSld>
   <p:clrMapOvr>
@@ -5411,7 +11269,7 @@
                 <a:ea typeface="Yu Gothic"/>
                 <a:cs typeface="Yu Gothic"/>
               </a:rPr>
-              <a:t>MinIO：バケット一覧（実画面）</a:t>
+              <a:t>やりたいこと → どこを触る？</a:t>
             </a:r>
           </a:p>
         </p:txBody>
@@ -5453,7 +11311,7 @@
                 <a:ea typeface="Yu Gothic"/>
                 <a:cs typeface="Yu Gothic"/>
               </a:rPr>
-              <a:t>pai-dvc = DVC の重み倉庫　／　pai-mlflow = MLflow artifact 用</a:t>
+              <a:t>迷ったらこの表。操作はすべて 起動スクリプト → メニュー 9 か MLflow UI</a:t>
             </a:r>
           </a:p>
         </p:txBody>
@@ -5466,12 +11324,12 @@
         </p:nvSpPr>
         <p:spPr>
           <a:xfrm>
-            <a:off x="457200" y="1417320"/>
-            <a:ext cx="11247120" cy="5029200"/>
+            <a:off x="548640" y="1508760"/>
+            <a:ext cx="4572000" cy="621792"/>
           </a:xfrm>
           <a:prstGeom prst="roundRect">
             <a:avLst>
-              <a:gd name="adj" fmla="val 4000"/>
+              <a:gd name="adj" fmla="val 20000"/>
             </a:avLst>
           </a:prstGeom>
           <a:solidFill>
@@ -5479,7 +11337,7 @@
           </a:solidFill>
           <a:ln>
             <a:solidFill>
-              <a:srgbClr val="E8E4DC"/>
+              <a:srgbClr val="1F4E5F"/>
             </a:solidFill>
           </a:ln>
         </p:spPr>
@@ -5498,6 +11356,67 @@
           </a:fontRef>
         </p:style>
         <p:txBody>
+          <a:bodyPr rtlCol="0" anchor="ctr" wrap="square" tIns="91440"/>
+          <a:lstStyle/>
+          <a:p>
+            <a:pPr algn="ctr">
+              <a:spcBef>
+                <a:spcPts val="0"/>
+              </a:spcBef>
+              <a:spcAft>
+                <a:spcPts val="0"/>
+              </a:spcAft>
+            </a:pPr>
+            <a:r>
+              <a:rPr sz="1600" b="1">
+                <a:solidFill>
+                  <a:srgbClr val="1C282C"/>
+                </a:solidFill>
+                <a:latin typeface="Yu Gothic"/>
+                <a:ea typeface="Yu Gothic"/>
+                <a:cs typeface="Yu Gothic"/>
+              </a:rPr>
+              <a:t>学習の曲線を比較したい</a:t>
+            </a:r>
+          </a:p>
+        </p:txBody>
+      </p:sp>
+      <p:sp>
+        <p:nvSpPr>
+          <p:cNvPr id="7" name="Right Arrow 6"/>
+          <p:cNvSpPr/>
+          <p:nvPr/>
+        </p:nvSpPr>
+        <p:spPr>
+          <a:xfrm>
+            <a:off x="5212080" y="1636776"/>
+            <a:ext cx="502920" cy="365760"/>
+          </a:xfrm>
+          <a:prstGeom prst="rightArrow">
+            <a:avLst/>
+          </a:prstGeom>
+          <a:solidFill>
+            <a:srgbClr val="1F4E5F"/>
+          </a:solidFill>
+          <a:ln>
+            <a:noFill/>
+          </a:ln>
+        </p:spPr>
+        <p:style>
+          <a:lnRef idx="1">
+            <a:schemeClr val="accent1"/>
+          </a:lnRef>
+          <a:fillRef idx="3">
+            <a:schemeClr val="accent1"/>
+          </a:fillRef>
+          <a:effectRef idx="2">
+            <a:schemeClr val="accent1"/>
+          </a:effectRef>
+          <a:fontRef idx="minor">
+            <a:schemeClr val="lt1"/>
+          </a:fontRef>
+        </p:style>
+        <p:txBody>
           <a:bodyPr rtlCol="0" anchor="ctr"/>
           <a:lstStyle/>
           <a:p>
@@ -5505,30 +11424,924 @@
           </a:p>
         </p:txBody>
       </p:sp>
-      <p:pic>
-        <p:nvPicPr>
-          <p:cNvPr id="7" name="Picture 6" descr="minio_pai_dvc.png"/>
-          <p:cNvPicPr>
-            <a:picLocks noChangeAspect="1"/>
-          </p:cNvPicPr>
-          <p:nvPr/>
-        </p:nvPicPr>
-        <p:blipFill>
-          <a:blip r:embed="rId2"/>
-          <a:stretch>
-            <a:fillRect/>
-          </a:stretch>
-        </p:blipFill>
-        <p:spPr>
-          <a:xfrm>
-            <a:off x="1773994" y="1508760"/>
-            <a:ext cx="8613531" cy="4846320"/>
-          </a:xfrm>
-          <a:prstGeom prst="rect">
-            <a:avLst/>
-          </a:prstGeom>
-        </p:spPr>
-      </p:pic>
+      <p:sp>
+        <p:nvSpPr>
+          <p:cNvPr id="8" name="Rounded Rectangle 7"/>
+          <p:cNvSpPr/>
+          <p:nvPr/>
+        </p:nvSpPr>
+        <p:spPr>
+          <a:xfrm>
+            <a:off x="5852160" y="1508760"/>
+            <a:ext cx="5760720" cy="621792"/>
+          </a:xfrm>
+          <a:prstGeom prst="roundRect">
+            <a:avLst>
+              <a:gd name="adj" fmla="val 20000"/>
+            </a:avLst>
+          </a:prstGeom>
+          <a:solidFill>
+            <a:srgbClr val="1F4E5F"/>
+          </a:solidFill>
+          <a:ln>
+            <a:noFill/>
+          </a:ln>
+        </p:spPr>
+        <p:style>
+          <a:lnRef idx="1">
+            <a:schemeClr val="accent1"/>
+          </a:lnRef>
+          <a:fillRef idx="3">
+            <a:schemeClr val="accent1"/>
+          </a:fillRef>
+          <a:effectRef idx="2">
+            <a:schemeClr val="accent1"/>
+          </a:effectRef>
+          <a:fontRef idx="minor">
+            <a:schemeClr val="lt1"/>
+          </a:fontRef>
+        </p:style>
+        <p:txBody>
+          <a:bodyPr rtlCol="0" anchor="ctr" wrap="square" tIns="91440"/>
+          <a:lstStyle/>
+          <a:p>
+            <a:pPr algn="ctr">
+              <a:spcBef>
+                <a:spcPts val="0"/>
+              </a:spcBef>
+              <a:spcAft>
+                <a:spcPts val="0"/>
+              </a:spcAft>
+            </a:pPr>
+            <a:r>
+              <a:rPr sz="1500" b="1">
+                <a:solidFill>
+                  <a:srgbClr val="FFFFFF"/>
+                </a:solidFill>
+                <a:latin typeface="Yu Gothic"/>
+                <a:ea typeface="Yu Gothic"/>
+                <a:cs typeface="Yu Gothic"/>
+              </a:rPr>
+              <a:t>MLflow UI（:5001）</a:t>
+            </a:r>
+          </a:p>
+        </p:txBody>
+      </p:sp>
+      <p:sp>
+        <p:nvSpPr>
+          <p:cNvPr id="9" name="Rounded Rectangle 8"/>
+          <p:cNvSpPr/>
+          <p:nvPr/>
+        </p:nvSpPr>
+        <p:spPr>
+          <a:xfrm>
+            <a:off x="548640" y="2295144"/>
+            <a:ext cx="4572000" cy="621792"/>
+          </a:xfrm>
+          <a:prstGeom prst="roundRect">
+            <a:avLst>
+              <a:gd name="adj" fmla="val 20000"/>
+            </a:avLst>
+          </a:prstGeom>
+          <a:solidFill>
+            <a:srgbClr val="FFFFFF"/>
+          </a:solidFill>
+          <a:ln>
+            <a:solidFill>
+              <a:srgbClr val="8A452A"/>
+            </a:solidFill>
+          </a:ln>
+        </p:spPr>
+        <p:style>
+          <a:lnRef idx="1">
+            <a:schemeClr val="accent1"/>
+          </a:lnRef>
+          <a:fillRef idx="3">
+            <a:schemeClr val="accent1"/>
+          </a:fillRef>
+          <a:effectRef idx="2">
+            <a:schemeClr val="accent1"/>
+          </a:effectRef>
+          <a:fontRef idx="minor">
+            <a:schemeClr val="lt1"/>
+          </a:fontRef>
+        </p:style>
+        <p:txBody>
+          <a:bodyPr rtlCol="0" anchor="ctr" wrap="square" tIns="91440"/>
+          <a:lstStyle/>
+          <a:p>
+            <a:pPr algn="ctr">
+              <a:spcBef>
+                <a:spcPts val="0"/>
+              </a:spcBef>
+              <a:spcAft>
+                <a:spcPts val="0"/>
+              </a:spcAft>
+            </a:pPr>
+            <a:r>
+              <a:rPr sz="1600" b="1">
+                <a:solidFill>
+                  <a:srgbClr val="1C282C"/>
+                </a:solidFill>
+                <a:latin typeface="Yu Gothic"/>
+                <a:ea typeface="Yu Gothic"/>
+                <a:cs typeface="Yu Gothic"/>
+              </a:rPr>
+              <a:t>最良の重みを仲間と共有したい</a:t>
+            </a:r>
+          </a:p>
+        </p:txBody>
+      </p:sp>
+      <p:sp>
+        <p:nvSpPr>
+          <p:cNvPr id="10" name="Right Arrow 9"/>
+          <p:cNvSpPr/>
+          <p:nvPr/>
+        </p:nvSpPr>
+        <p:spPr>
+          <a:xfrm>
+            <a:off x="5212080" y="2423160"/>
+            <a:ext cx="502920" cy="365760"/>
+          </a:xfrm>
+          <a:prstGeom prst="rightArrow">
+            <a:avLst/>
+          </a:prstGeom>
+          <a:solidFill>
+            <a:srgbClr val="8A452A"/>
+          </a:solidFill>
+          <a:ln>
+            <a:noFill/>
+          </a:ln>
+        </p:spPr>
+        <p:style>
+          <a:lnRef idx="1">
+            <a:schemeClr val="accent1"/>
+          </a:lnRef>
+          <a:fillRef idx="3">
+            <a:schemeClr val="accent1"/>
+          </a:fillRef>
+          <a:effectRef idx="2">
+            <a:schemeClr val="accent1"/>
+          </a:effectRef>
+          <a:fontRef idx="minor">
+            <a:schemeClr val="lt1"/>
+          </a:fontRef>
+        </p:style>
+        <p:txBody>
+          <a:bodyPr rtlCol="0" anchor="ctr"/>
+          <a:lstStyle/>
+          <a:p>
+            <a:pPr algn="ctr"/>
+          </a:p>
+        </p:txBody>
+      </p:sp>
+      <p:sp>
+        <p:nvSpPr>
+          <p:cNvPr id="11" name="Rounded Rectangle 10"/>
+          <p:cNvSpPr/>
+          <p:nvPr/>
+        </p:nvSpPr>
+        <p:spPr>
+          <a:xfrm>
+            <a:off x="5852160" y="2295144"/>
+            <a:ext cx="5760720" cy="621792"/>
+          </a:xfrm>
+          <a:prstGeom prst="roundRect">
+            <a:avLst>
+              <a:gd name="adj" fmla="val 20000"/>
+            </a:avLst>
+          </a:prstGeom>
+          <a:solidFill>
+            <a:srgbClr val="8A452A"/>
+          </a:solidFill>
+          <a:ln>
+            <a:noFill/>
+          </a:ln>
+        </p:spPr>
+        <p:style>
+          <a:lnRef idx="1">
+            <a:schemeClr val="accent1"/>
+          </a:lnRef>
+          <a:fillRef idx="3">
+            <a:schemeClr val="accent1"/>
+          </a:fillRef>
+          <a:effectRef idx="2">
+            <a:schemeClr val="accent1"/>
+          </a:effectRef>
+          <a:fontRef idx="minor">
+            <a:schemeClr val="lt1"/>
+          </a:fontRef>
+        </p:style>
+        <p:txBody>
+          <a:bodyPr rtlCol="0" anchor="ctr" wrap="square" tIns="91440"/>
+          <a:lstStyle/>
+          <a:p>
+            <a:pPr algn="ctr">
+              <a:spcBef>
+                <a:spcPts val="0"/>
+              </a:spcBef>
+              <a:spcAft>
+                <a:spcPts val="0"/>
+              </a:spcAft>
+            </a:pPr>
+            <a:r>
+              <a:rPr sz="1500" b="1">
+                <a:solidFill>
+                  <a:srgbClr val="FFFFFF"/>
+                </a:solidFill>
+                <a:latin typeface="Yu Gothic"/>
+                <a:ea typeface="Yu Gothic"/>
+                <a:cs typeface="Yu Gothic"/>
+              </a:rPr>
+              <a:t>9 → 1（MinIO 起動）→ 9 → 3（publish → push）</a:t>
+            </a:r>
+          </a:p>
+        </p:txBody>
+      </p:sp>
+      <p:sp>
+        <p:nvSpPr>
+          <p:cNvPr id="12" name="Rounded Rectangle 11"/>
+          <p:cNvSpPr/>
+          <p:nvPr/>
+        </p:nvSpPr>
+        <p:spPr>
+          <a:xfrm>
+            <a:off x="548640" y="3081528"/>
+            <a:ext cx="4572000" cy="621792"/>
+          </a:xfrm>
+          <a:prstGeom prst="roundRect">
+            <a:avLst>
+              <a:gd name="adj" fmla="val 20000"/>
+            </a:avLst>
+          </a:prstGeom>
+          <a:solidFill>
+            <a:srgbClr val="FFFFFF"/>
+          </a:solidFill>
+          <a:ln>
+            <a:solidFill>
+              <a:srgbClr val="2C644A"/>
+            </a:solidFill>
+          </a:ln>
+        </p:spPr>
+        <p:style>
+          <a:lnRef idx="1">
+            <a:schemeClr val="accent1"/>
+          </a:lnRef>
+          <a:fillRef idx="3">
+            <a:schemeClr val="accent1"/>
+          </a:fillRef>
+          <a:effectRef idx="2">
+            <a:schemeClr val="accent1"/>
+          </a:effectRef>
+          <a:fontRef idx="minor">
+            <a:schemeClr val="lt1"/>
+          </a:fontRef>
+        </p:style>
+        <p:txBody>
+          <a:bodyPr rtlCol="0" anchor="ctr" wrap="square" tIns="91440"/>
+          <a:lstStyle/>
+          <a:p>
+            <a:pPr algn="ctr">
+              <a:spcBef>
+                <a:spcPts val="0"/>
+              </a:spcBef>
+              <a:spcAft>
+                <a:spcPts val="0"/>
+              </a:spcAft>
+            </a:pPr>
+            <a:r>
+              <a:rPr sz="1600" b="1">
+                <a:solidFill>
+                  <a:srgbClr val="1C282C"/>
+                </a:solidFill>
+                <a:latin typeface="Yu Gothic"/>
+                <a:ea typeface="Yu Gothic"/>
+                <a:cs typeface="Yu Gothic"/>
+              </a:rPr>
+              <a:t>共有された重みで動かしたい</a:t>
+            </a:r>
+          </a:p>
+        </p:txBody>
+      </p:sp>
+      <p:sp>
+        <p:nvSpPr>
+          <p:cNvPr id="13" name="Right Arrow 12"/>
+          <p:cNvSpPr/>
+          <p:nvPr/>
+        </p:nvSpPr>
+        <p:spPr>
+          <a:xfrm>
+            <a:off x="5212080" y="3209544"/>
+            <a:ext cx="502920" cy="365760"/>
+          </a:xfrm>
+          <a:prstGeom prst="rightArrow">
+            <a:avLst/>
+          </a:prstGeom>
+          <a:solidFill>
+            <a:srgbClr val="2C644A"/>
+          </a:solidFill>
+          <a:ln>
+            <a:noFill/>
+          </a:ln>
+        </p:spPr>
+        <p:style>
+          <a:lnRef idx="1">
+            <a:schemeClr val="accent1"/>
+          </a:lnRef>
+          <a:fillRef idx="3">
+            <a:schemeClr val="accent1"/>
+          </a:fillRef>
+          <a:effectRef idx="2">
+            <a:schemeClr val="accent1"/>
+          </a:effectRef>
+          <a:fontRef idx="minor">
+            <a:schemeClr val="lt1"/>
+          </a:fontRef>
+        </p:style>
+        <p:txBody>
+          <a:bodyPr rtlCol="0" anchor="ctr"/>
+          <a:lstStyle/>
+          <a:p>
+            <a:pPr algn="ctr"/>
+          </a:p>
+        </p:txBody>
+      </p:sp>
+      <p:sp>
+        <p:nvSpPr>
+          <p:cNvPr id="14" name="Rounded Rectangle 13"/>
+          <p:cNvSpPr/>
+          <p:nvPr/>
+        </p:nvSpPr>
+        <p:spPr>
+          <a:xfrm>
+            <a:off x="5852160" y="3081528"/>
+            <a:ext cx="5760720" cy="621792"/>
+          </a:xfrm>
+          <a:prstGeom prst="roundRect">
+            <a:avLst>
+              <a:gd name="adj" fmla="val 20000"/>
+            </a:avLst>
+          </a:prstGeom>
+          <a:solidFill>
+            <a:srgbClr val="2C644A"/>
+          </a:solidFill>
+          <a:ln>
+            <a:noFill/>
+          </a:ln>
+        </p:spPr>
+        <p:style>
+          <a:lnRef idx="1">
+            <a:schemeClr val="accent1"/>
+          </a:lnRef>
+          <a:fillRef idx="3">
+            <a:schemeClr val="accent1"/>
+          </a:fillRef>
+          <a:effectRef idx="2">
+            <a:schemeClr val="accent1"/>
+          </a:effectRef>
+          <a:fontRef idx="minor">
+            <a:schemeClr val="lt1"/>
+          </a:fontRef>
+        </p:style>
+        <p:txBody>
+          <a:bodyPr rtlCol="0" anchor="ctr" wrap="square" tIns="91440"/>
+          <a:lstStyle/>
+          <a:p>
+            <a:pPr algn="ctr">
+              <a:spcBef>
+                <a:spcPts val="0"/>
+              </a:spcBef>
+              <a:spcAft>
+                <a:spcPts val="0"/>
+              </a:spcAft>
+            </a:pPr>
+            <a:r>
+              <a:rPr sz="1500" b="1">
+                <a:solidFill>
+                  <a:srgbClr val="FFFFFF"/>
+                </a:solidFill>
+                <a:latin typeface="Yu Gothic"/>
+                <a:ea typeface="Yu Gothic"/>
+                <a:cs typeface="Yu Gothic"/>
+              </a:rPr>
+              <a:t>9 → 6（pull → resolve → play）</a:t>
+            </a:r>
+          </a:p>
+        </p:txBody>
+      </p:sp>
+      <p:sp>
+        <p:nvSpPr>
+          <p:cNvPr id="15" name="Rounded Rectangle 14"/>
+          <p:cNvSpPr/>
+          <p:nvPr/>
+        </p:nvSpPr>
+        <p:spPr>
+          <a:xfrm>
+            <a:off x="548640" y="3867912"/>
+            <a:ext cx="4572000" cy="621792"/>
+          </a:xfrm>
+          <a:prstGeom prst="roundRect">
+            <a:avLst>
+              <a:gd name="adj" fmla="val 20000"/>
+            </a:avLst>
+          </a:prstGeom>
+          <a:solidFill>
+            <a:srgbClr val="FFFFFF"/>
+          </a:solidFill>
+          <a:ln>
+            <a:solidFill>
+              <a:srgbClr val="2C644A"/>
+            </a:solidFill>
+          </a:ln>
+        </p:spPr>
+        <p:style>
+          <a:lnRef idx="1">
+            <a:schemeClr val="accent1"/>
+          </a:lnRef>
+          <a:fillRef idx="3">
+            <a:schemeClr val="accent1"/>
+          </a:fillRef>
+          <a:effectRef idx="2">
+            <a:schemeClr val="accent1"/>
+          </a:effectRef>
+          <a:fontRef idx="minor">
+            <a:schemeClr val="lt1"/>
+          </a:fontRef>
+        </p:style>
+        <p:txBody>
+          <a:bodyPr rtlCol="0" anchor="ctr" wrap="square" tIns="91440"/>
+          <a:lstStyle/>
+          <a:p>
+            <a:pPr algn="ctr">
+              <a:spcBef>
+                <a:spcPts val="0"/>
+              </a:spcBef>
+              <a:spcAft>
+                <a:spcPts val="0"/>
+              </a:spcAft>
+            </a:pPr>
+            <a:r>
+              <a:rPr sz="1600" b="1">
+                <a:solidFill>
+                  <a:srgbClr val="1C282C"/>
+                </a:solidFill>
+                <a:latin typeface="Yu Gothic"/>
+                <a:ea typeface="Yu Gothic"/>
+                <a:cs typeface="Yu Gothic"/>
+              </a:rPr>
+              <a:t>別 PC で学習を再開したい</a:t>
+            </a:r>
+          </a:p>
+        </p:txBody>
+      </p:sp>
+      <p:sp>
+        <p:nvSpPr>
+          <p:cNvPr id="16" name="Right Arrow 15"/>
+          <p:cNvSpPr/>
+          <p:nvPr/>
+        </p:nvSpPr>
+        <p:spPr>
+          <a:xfrm>
+            <a:off x="5212080" y="3995928"/>
+            <a:ext cx="502920" cy="365760"/>
+          </a:xfrm>
+          <a:prstGeom prst="rightArrow">
+            <a:avLst/>
+          </a:prstGeom>
+          <a:solidFill>
+            <a:srgbClr val="2C644A"/>
+          </a:solidFill>
+          <a:ln>
+            <a:noFill/>
+          </a:ln>
+        </p:spPr>
+        <p:style>
+          <a:lnRef idx="1">
+            <a:schemeClr val="accent1"/>
+          </a:lnRef>
+          <a:fillRef idx="3">
+            <a:schemeClr val="accent1"/>
+          </a:fillRef>
+          <a:effectRef idx="2">
+            <a:schemeClr val="accent1"/>
+          </a:effectRef>
+          <a:fontRef idx="minor">
+            <a:schemeClr val="lt1"/>
+          </a:fontRef>
+        </p:style>
+        <p:txBody>
+          <a:bodyPr rtlCol="0" anchor="ctr"/>
+          <a:lstStyle/>
+          <a:p>
+            <a:pPr algn="ctr"/>
+          </a:p>
+        </p:txBody>
+      </p:sp>
+      <p:sp>
+        <p:nvSpPr>
+          <p:cNvPr id="17" name="Rounded Rectangle 16"/>
+          <p:cNvSpPr/>
+          <p:nvPr/>
+        </p:nvSpPr>
+        <p:spPr>
+          <a:xfrm>
+            <a:off x="5852160" y="3867912"/>
+            <a:ext cx="5760720" cy="621792"/>
+          </a:xfrm>
+          <a:prstGeom prst="roundRect">
+            <a:avLst>
+              <a:gd name="adj" fmla="val 20000"/>
+            </a:avLst>
+          </a:prstGeom>
+          <a:solidFill>
+            <a:srgbClr val="2C644A"/>
+          </a:solidFill>
+          <a:ln>
+            <a:noFill/>
+          </a:ln>
+        </p:spPr>
+        <p:style>
+          <a:lnRef idx="1">
+            <a:schemeClr val="accent1"/>
+          </a:lnRef>
+          <a:fillRef idx="3">
+            <a:schemeClr val="accent1"/>
+          </a:fillRef>
+          <a:effectRef idx="2">
+            <a:schemeClr val="accent1"/>
+          </a:effectRef>
+          <a:fontRef idx="minor">
+            <a:schemeClr val="lt1"/>
+          </a:fontRef>
+        </p:style>
+        <p:txBody>
+          <a:bodyPr rtlCol="0" anchor="ctr" wrap="square" tIns="91440"/>
+          <a:lstStyle/>
+          <a:p>
+            <a:pPr algn="ctr">
+              <a:spcBef>
+                <a:spcPts val="0"/>
+              </a:spcBef>
+              <a:spcAft>
+                <a:spcPts val="0"/>
+              </a:spcAft>
+            </a:pPr>
+            <a:r>
+              <a:rPr sz="1500" b="1">
+                <a:solidFill>
+                  <a:srgbClr val="FFFFFF"/>
+                </a:solidFill>
+                <a:latin typeface="Yu Gothic"/>
+                <a:ea typeface="Yu Gothic"/>
+                <a:cs typeface="Yu Gothic"/>
+              </a:rPr>
+              <a:t>git pull → 9 → 5（pull → restore）</a:t>
+            </a:r>
+          </a:p>
+        </p:txBody>
+      </p:sp>
+      <p:sp>
+        <p:nvSpPr>
+          <p:cNvPr id="18" name="Rounded Rectangle 17"/>
+          <p:cNvSpPr/>
+          <p:nvPr/>
+        </p:nvSpPr>
+        <p:spPr>
+          <a:xfrm>
+            <a:off x="548640" y="4654296"/>
+            <a:ext cx="4572000" cy="621792"/>
+          </a:xfrm>
+          <a:prstGeom prst="roundRect">
+            <a:avLst>
+              <a:gd name="adj" fmla="val 20000"/>
+            </a:avLst>
+          </a:prstGeom>
+          <a:solidFill>
+            <a:srgbClr val="FFFFFF"/>
+          </a:solidFill>
+          <a:ln>
+            <a:solidFill>
+              <a:srgbClr val="4A585C"/>
+            </a:solidFill>
+          </a:ln>
+        </p:spPr>
+        <p:style>
+          <a:lnRef idx="1">
+            <a:schemeClr val="accent1"/>
+          </a:lnRef>
+          <a:fillRef idx="3">
+            <a:schemeClr val="accent1"/>
+          </a:fillRef>
+          <a:effectRef idx="2">
+            <a:schemeClr val="accent1"/>
+          </a:effectRef>
+          <a:fontRef idx="minor">
+            <a:schemeClr val="lt1"/>
+          </a:fontRef>
+        </p:style>
+        <p:txBody>
+          <a:bodyPr rtlCol="0" anchor="ctr" wrap="square" tIns="91440"/>
+          <a:lstStyle/>
+          <a:p>
+            <a:pPr algn="ctr">
+              <a:spcBef>
+                <a:spcPts val="0"/>
+              </a:spcBef>
+              <a:spcAft>
+                <a:spcPts val="0"/>
+              </a:spcAft>
+            </a:pPr>
+            <a:r>
+              <a:rPr sz="1600" b="1">
+                <a:solidFill>
+                  <a:srgbClr val="1C282C"/>
+                </a:solidFill>
+                <a:latin typeface="Yu Gothic"/>
+                <a:ea typeface="Yu Gothic"/>
+                <a:cs typeface="Yu Gothic"/>
+              </a:rPr>
+              <a:t>保管状況を目で確認したい</a:t>
+            </a:r>
+          </a:p>
+        </p:txBody>
+      </p:sp>
+      <p:sp>
+        <p:nvSpPr>
+          <p:cNvPr id="19" name="Right Arrow 18"/>
+          <p:cNvSpPr/>
+          <p:nvPr/>
+        </p:nvSpPr>
+        <p:spPr>
+          <a:xfrm>
+            <a:off x="5212080" y="4782312"/>
+            <a:ext cx="502920" cy="365760"/>
+          </a:xfrm>
+          <a:prstGeom prst="rightArrow">
+            <a:avLst/>
+          </a:prstGeom>
+          <a:solidFill>
+            <a:srgbClr val="4A585C"/>
+          </a:solidFill>
+          <a:ln>
+            <a:noFill/>
+          </a:ln>
+        </p:spPr>
+        <p:style>
+          <a:lnRef idx="1">
+            <a:schemeClr val="accent1"/>
+          </a:lnRef>
+          <a:fillRef idx="3">
+            <a:schemeClr val="accent1"/>
+          </a:fillRef>
+          <a:effectRef idx="2">
+            <a:schemeClr val="accent1"/>
+          </a:effectRef>
+          <a:fontRef idx="minor">
+            <a:schemeClr val="lt1"/>
+          </a:fontRef>
+        </p:style>
+        <p:txBody>
+          <a:bodyPr rtlCol="0" anchor="ctr"/>
+          <a:lstStyle/>
+          <a:p>
+            <a:pPr algn="ctr"/>
+          </a:p>
+        </p:txBody>
+      </p:sp>
+      <p:sp>
+        <p:nvSpPr>
+          <p:cNvPr id="20" name="Rounded Rectangle 19"/>
+          <p:cNvSpPr/>
+          <p:nvPr/>
+        </p:nvSpPr>
+        <p:spPr>
+          <a:xfrm>
+            <a:off x="5852160" y="4654296"/>
+            <a:ext cx="5760720" cy="621792"/>
+          </a:xfrm>
+          <a:prstGeom prst="roundRect">
+            <a:avLst>
+              <a:gd name="adj" fmla="val 20000"/>
+            </a:avLst>
+          </a:prstGeom>
+          <a:solidFill>
+            <a:srgbClr val="4A585C"/>
+          </a:solidFill>
+          <a:ln>
+            <a:noFill/>
+          </a:ln>
+        </p:spPr>
+        <p:style>
+          <a:lnRef idx="1">
+            <a:schemeClr val="accent1"/>
+          </a:lnRef>
+          <a:fillRef idx="3">
+            <a:schemeClr val="accent1"/>
+          </a:fillRef>
+          <a:effectRef idx="2">
+            <a:schemeClr val="accent1"/>
+          </a:effectRef>
+          <a:fontRef idx="minor">
+            <a:schemeClr val="lt1"/>
+          </a:fontRef>
+        </p:style>
+        <p:txBody>
+          <a:bodyPr rtlCol="0" anchor="ctr" wrap="square" tIns="91440"/>
+          <a:lstStyle/>
+          <a:p>
+            <a:pPr algn="ctr">
+              <a:spcBef>
+                <a:spcPts val="0"/>
+              </a:spcBef>
+              <a:spcAft>
+                <a:spcPts val="0"/>
+              </a:spcAft>
+            </a:pPr>
+            <a:r>
+              <a:rPr sz="1500" b="1">
+                <a:solidFill>
+                  <a:srgbClr val="FFFFFF"/>
+                </a:solidFill>
+                <a:latin typeface="Yu Gothic"/>
+                <a:ea typeface="Yu Gothic"/>
+                <a:cs typeface="Yu Gothic"/>
+              </a:rPr>
+              <a:t>9 → 8（MinIO Console）→ pai-dvc</a:t>
+            </a:r>
+          </a:p>
+        </p:txBody>
+      </p:sp>
+      <p:sp>
+        <p:nvSpPr>
+          <p:cNvPr id="21" name="Rounded Rectangle 20"/>
+          <p:cNvSpPr/>
+          <p:nvPr/>
+        </p:nvSpPr>
+        <p:spPr>
+          <a:xfrm>
+            <a:off x="548640" y="5440680"/>
+            <a:ext cx="4572000" cy="621792"/>
+          </a:xfrm>
+          <a:prstGeom prst="roundRect">
+            <a:avLst>
+              <a:gd name="adj" fmla="val 20000"/>
+            </a:avLst>
+          </a:prstGeom>
+          <a:solidFill>
+            <a:srgbClr val="FFFFFF"/>
+          </a:solidFill>
+          <a:ln>
+            <a:solidFill>
+              <a:srgbClr val="4A585C"/>
+            </a:solidFill>
+          </a:ln>
+        </p:spPr>
+        <p:style>
+          <a:lnRef idx="1">
+            <a:schemeClr val="accent1"/>
+          </a:lnRef>
+          <a:fillRef idx="3">
+            <a:schemeClr val="accent1"/>
+          </a:fillRef>
+          <a:effectRef idx="2">
+            <a:schemeClr val="accent1"/>
+          </a:effectRef>
+          <a:fontRef idx="minor">
+            <a:schemeClr val="lt1"/>
+          </a:fontRef>
+        </p:style>
+        <p:txBody>
+          <a:bodyPr rtlCol="0" anchor="ctr" wrap="square" tIns="91440"/>
+          <a:lstStyle/>
+          <a:p>
+            <a:pPr algn="ctr">
+              <a:spcBef>
+                <a:spcPts val="0"/>
+              </a:spcBef>
+              <a:spcAft>
+                <a:spcPts val="0"/>
+              </a:spcAft>
+            </a:pPr>
+            <a:r>
+              <a:rPr sz="1600" b="1">
+                <a:solidFill>
+                  <a:srgbClr val="1C282C"/>
+                </a:solidFill>
+                <a:latin typeface="Yu Gothic"/>
+                <a:ea typeface="Yu Gothic"/>
+                <a:cs typeface="Yu Gothic"/>
+              </a:rPr>
+              <a:t>実機 Go2 に最良モデルを配りたい</a:t>
+            </a:r>
+          </a:p>
+        </p:txBody>
+      </p:sp>
+      <p:sp>
+        <p:nvSpPr>
+          <p:cNvPr id="22" name="Right Arrow 21"/>
+          <p:cNvSpPr/>
+          <p:nvPr/>
+        </p:nvSpPr>
+        <p:spPr>
+          <a:xfrm>
+            <a:off x="5212080" y="5568696"/>
+            <a:ext cx="502920" cy="365760"/>
+          </a:xfrm>
+          <a:prstGeom prst="rightArrow">
+            <a:avLst/>
+          </a:prstGeom>
+          <a:solidFill>
+            <a:srgbClr val="4A585C"/>
+          </a:solidFill>
+          <a:ln>
+            <a:noFill/>
+          </a:ln>
+        </p:spPr>
+        <p:style>
+          <a:lnRef idx="1">
+            <a:schemeClr val="accent1"/>
+          </a:lnRef>
+          <a:fillRef idx="3">
+            <a:schemeClr val="accent1"/>
+          </a:fillRef>
+          <a:effectRef idx="2">
+            <a:schemeClr val="accent1"/>
+          </a:effectRef>
+          <a:fontRef idx="minor">
+            <a:schemeClr val="lt1"/>
+          </a:fontRef>
+        </p:style>
+        <p:txBody>
+          <a:bodyPr rtlCol="0" anchor="ctr"/>
+          <a:lstStyle/>
+          <a:p>
+            <a:pPr algn="ctr"/>
+          </a:p>
+        </p:txBody>
+      </p:sp>
+      <p:sp>
+        <p:nvSpPr>
+          <p:cNvPr id="23" name="Rounded Rectangle 22"/>
+          <p:cNvSpPr/>
+          <p:nvPr/>
+        </p:nvSpPr>
+        <p:spPr>
+          <a:xfrm>
+            <a:off x="5852160" y="5440680"/>
+            <a:ext cx="5760720" cy="621792"/>
+          </a:xfrm>
+          <a:prstGeom prst="roundRect">
+            <a:avLst>
+              <a:gd name="adj" fmla="val 20000"/>
+            </a:avLst>
+          </a:prstGeom>
+          <a:solidFill>
+            <a:srgbClr val="4A585C"/>
+          </a:solidFill>
+          <a:ln>
+            <a:noFill/>
+          </a:ln>
+        </p:spPr>
+        <p:style>
+          <a:lnRef idx="1">
+            <a:schemeClr val="accent1"/>
+          </a:lnRef>
+          <a:fillRef idx="3">
+            <a:schemeClr val="accent1"/>
+          </a:fillRef>
+          <a:effectRef idx="2">
+            <a:schemeClr val="accent1"/>
+          </a:effectRef>
+          <a:fontRef idx="minor">
+            <a:schemeClr val="lt1"/>
+          </a:fontRef>
+        </p:style>
+        <p:txBody>
+          <a:bodyPr rtlCol="0" anchor="ctr" wrap="square" tIns="91440"/>
+          <a:lstStyle/>
+          <a:p>
+            <a:pPr algn="ctr">
+              <a:spcBef>
+                <a:spcPts val="0"/>
+              </a:spcBef>
+              <a:spcAft>
+                <a:spcPts val="0"/>
+              </a:spcAft>
+            </a:pPr>
+            <a:r>
+              <a:rPr sz="1500" b="1">
+                <a:solidFill>
+                  <a:srgbClr val="FFFFFF"/>
+                </a:solidFill>
+                <a:latin typeface="Yu Gothic"/>
+                <a:ea typeface="Yu Gothic"/>
+                <a:cs typeface="Yu Gothic"/>
+              </a:rPr>
+              <a:t>9 → 9（Mender Artifact）→ Hosted Mender</a:t>
+            </a:r>
+          </a:p>
+        </p:txBody>
+      </p:sp>
     </p:spTree>
   </p:cSld>
   <p:clrMapOvr>
@@ -5670,7 +12483,7 @@
                 <a:ea typeface="Yu Gothic"/>
                 <a:cs typeface="Yu Gothic"/>
               </a:rPr>
-              <a:t>MinIO の中身：DVC の content-addressed 保管</a:t>
+              <a:t>いつ何を使うか</a:t>
             </a:r>
           </a:p>
         </p:txBody>
@@ -5712,82 +12525,137 @@
                 <a:ea typeface="Yu Gothic"/>
                 <a:cs typeface="Yu Gothic"/>
               </a:rPr>
-              <a:t>pai-dvc / files / md5/ … ハッシュ名で実体を置く（Git には載せない）</a:t>
-            </a:r>
-          </a:p>
-        </p:txBody>
-      </p:sp>
-      <p:sp>
-        <p:nvSpPr>
-          <p:cNvPr id="6" name="Rounded Rectangle 5"/>
-          <p:cNvSpPr/>
-          <p:nvPr/>
-        </p:nvSpPr>
-        <p:spPr>
-          <a:xfrm>
-            <a:off x="457200" y="1417320"/>
-            <a:ext cx="11247120" cy="5029200"/>
-          </a:xfrm>
-          <a:prstGeom prst="roundRect">
-            <a:avLst>
-              <a:gd name="adj" fmla="val 4000"/>
-            </a:avLst>
-          </a:prstGeom>
-          <a:solidFill>
-            <a:srgbClr val="FFFFFF"/>
-          </a:solidFill>
-          <a:ln>
-            <a:solidFill>
-              <a:srgbClr val="E8E4DC"/>
-            </a:solidFill>
-          </a:ln>
-        </p:spPr>
-        <p:style>
-          <a:lnRef idx="1">
-            <a:schemeClr val="accent1"/>
-          </a:lnRef>
-          <a:fillRef idx="3">
-            <a:schemeClr val="accent1"/>
-          </a:fillRef>
-          <a:effectRef idx="2">
-            <a:schemeClr val="accent1"/>
-          </a:effectRef>
-          <a:fontRef idx="minor">
-            <a:schemeClr val="lt1"/>
-          </a:fontRef>
-        </p:style>
-        <p:txBody>
-          <a:bodyPr rtlCol="0" anchor="ctr"/>
-          <a:lstStyle/>
-          <a:p>
-            <a:pPr algn="ctr"/>
-          </a:p>
-        </p:txBody>
-      </p:sp>
-      <p:pic>
-        <p:nvPicPr>
-          <p:cNvPr id="7" name="Picture 6" descr="minio_pai_dvc_files.png"/>
-          <p:cNvPicPr>
-            <a:picLocks noChangeAspect="1"/>
-          </p:cNvPicPr>
-          <p:nvPr/>
-        </p:nvPicPr>
-        <p:blipFill>
-          <a:blip r:embed="rId2"/>
-          <a:stretch>
-            <a:fillRect/>
-          </a:stretch>
-        </p:blipFill>
-        <p:spPr>
-          <a:xfrm>
-            <a:off x="1773994" y="1508760"/>
-            <a:ext cx="8613531" cy="4846320"/>
+              <a:t>ホットパスでは使わず、区切り・引っ越し・提出で使う</a:t>
+            </a:r>
+          </a:p>
+        </p:txBody>
+      </p:sp>
+      <p:sp>
+        <p:nvSpPr>
+          <p:cNvPr id="6" name="TextBox 5"/>
+          <p:cNvSpPr txBox="1"/>
+          <p:nvPr/>
+        </p:nvSpPr>
+        <p:spPr>
+          <a:xfrm>
+            <a:off x="640080" y="1645920"/>
+            <a:ext cx="10972800" cy="4114800"/>
           </a:xfrm>
           <a:prstGeom prst="rect">
             <a:avLst/>
           </a:prstGeom>
-        </p:spPr>
-      </p:pic>
+          <a:noFill/>
+        </p:spPr>
+        <p:txBody>
+          <a:bodyPr wrap="square"/>
+          <a:lstStyle/>
+          <a:p>
+            <a:pPr algn="l">
+              <a:spcBef>
+                <a:spcPts val="0"/>
+              </a:spcBef>
+              <a:spcAft>
+                <a:spcPts val="1600"/>
+              </a:spcAft>
+            </a:pPr>
+            <a:r>
+              <a:rPr sz="2000" b="0">
+                <a:solidFill>
+                  <a:srgbClr val="1C282C"/>
+                </a:solidFill>
+                <a:latin typeface="Yu Gothic"/>
+                <a:ea typeface="Yu Gothic"/>
+                <a:cs typeface="Yu Gothic"/>
+              </a:rPr>
+              <a:t>1. 学習 → logs/&lt;stage&gt;/ppo_*.pt + metrics.jsonl + MLflow 記録</a:t>
+            </a:r>
+          </a:p>
+          <a:p>
+            <a:pPr algn="l">
+              <a:spcBef>
+                <a:spcPts val="0"/>
+              </a:spcBef>
+              <a:spcAft>
+                <a:spcPts val="1600"/>
+              </a:spcAft>
+            </a:pPr>
+            <a:r>
+              <a:rPr sz="2000" b="0">
+                <a:solidFill>
+                  <a:srgbClr val="1C282C"/>
+                </a:solidFill>
+                <a:latin typeface="Yu Gothic"/>
+                <a:ea typeface="Yu Gothic"/>
+                <a:cs typeface="Yu Gothic"/>
+              </a:rPr>
+              <a:t>2. 区切り → メニュー 9 → 3（最良）または 4（最新）で publish → push</a:t>
+            </a:r>
+          </a:p>
+          <a:p>
+            <a:pPr algn="l">
+              <a:spcBef>
+                <a:spcPts val="0"/>
+              </a:spcBef>
+              <a:spcAft>
+                <a:spcPts val="1600"/>
+              </a:spcAft>
+            </a:pPr>
+            <a:r>
+              <a:rPr sz="2000" b="0">
+                <a:solidFill>
+                  <a:srgbClr val="1C282C"/>
+                </a:solidFill>
+                <a:latin typeface="Yu Gothic"/>
+                <a:ea typeface="Yu Gothic"/>
+                <a:cs typeface="Yu Gothic"/>
+              </a:rPr>
+              <a:t>3. 確認 → MinIO Console の pai-dvc（実体） / Git の .dvc（ポインタ）</a:t>
+            </a:r>
+          </a:p>
+          <a:p>
+            <a:pPr algn="l">
+              <a:spcBef>
+                <a:spcPts val="0"/>
+              </a:spcBef>
+              <a:spcAft>
+                <a:spcPts val="1600"/>
+              </a:spcAft>
+            </a:pPr>
+            <a:r>
+              <a:rPr sz="2000" b="0">
+                <a:solidFill>
+                  <a:srgbClr val="1C282C"/>
+                </a:solidFill>
+                <a:latin typeface="Yu Gothic"/>
+                <a:ea typeface="Yu Gothic"/>
+                <a:cs typeface="Yu Gothic"/>
+              </a:rPr>
+              <a:t>4. 復元・推論 → pull → restore、または 9 → 6 で best.pt を play</a:t>
+            </a:r>
+          </a:p>
+          <a:p>
+            <a:pPr algn="l">
+              <a:spcBef>
+                <a:spcPts val="0"/>
+              </a:spcBef>
+              <a:spcAft>
+                <a:spcPts val="1600"/>
+              </a:spcAft>
+            </a:pPr>
+            <a:r>
+              <a:rPr sz="2000" b="0">
+                <a:solidFill>
+                  <a:srgbClr val="1C282C"/>
+                </a:solidFill>
+                <a:latin typeface="Yu Gothic"/>
+                <a:ea typeface="Yu Gothic"/>
+                <a:cs typeface="Yu Gothic"/>
+              </a:rPr>
+              <a:t>5. 曲線確認 → MLflow UI（実験ノート）。重み本体は DVC/MinIO</a:t>
+            </a:r>
+          </a:p>
+        </p:txBody>
+      </p:sp>
     </p:spTree>
   </p:cSld>
   <p:clrMapOvr>
@@ -5929,7 +12797,7 @@
                 <a:ea typeface="Yu Gothic"/>
                 <a:cs typeface="Yu Gothic"/>
               </a:rPr>
-              <a:t>DVC：ポインタと最良選定</a:t>
+              <a:t>MinIO Console：ログイン</a:t>
             </a:r>
           </a:p>
         </p:txBody>
@@ -5971,7 +12839,7 @@
                 <a:ea typeface="Yu Gothic"/>
                 <a:cs typeface="Yu Gothic"/>
               </a:rPr>
-              <a:t>Git には .dvc、実体は MinIO。publish --select best で metrics から選ぶ</a:t>
+              <a:t>http://127.0.0.1:9001   user / pass = minioadmin（.env と同じ）</a:t>
             </a:r>
           </a:p>
         </p:txBody>
@@ -5984,8 +12852,8 @@
         </p:nvSpPr>
         <p:spPr>
           <a:xfrm>
-            <a:off x="457200" y="1417320"/>
-            <a:ext cx="6766560" cy="4754880"/>
+            <a:off x="1097280" y="1463040"/>
+            <a:ext cx="9875520" cy="4937760"/>
           </a:xfrm>
           <a:prstGeom prst="roundRect">
             <a:avLst>
@@ -6025,7 +12893,7 @@
       </p:sp>
       <p:pic>
         <p:nvPicPr>
-          <p:cNvPr id="7" name="Picture 6" descr="dvc_status.png"/>
+          <p:cNvPr id="7" name="Picture 6" descr="minio_login.png"/>
           <p:cNvPicPr>
             <a:picLocks noChangeAspect="1"/>
           </p:cNvPicPr>
@@ -6039,266 +12907,14 @@
         </p:blipFill>
         <p:spPr>
           <a:xfrm>
-            <a:off x="548640" y="2537875"/>
-            <a:ext cx="6583680" cy="2513768"/>
+            <a:off x="1809534" y="1554480"/>
+            <a:ext cx="8451011" cy="4754880"/>
           </a:xfrm>
           <a:prstGeom prst="rect">
             <a:avLst/>
           </a:prstGeom>
         </p:spPr>
       </p:pic>
-      <p:sp>
-        <p:nvSpPr>
-          <p:cNvPr id="8" name="TextBox 7"/>
-          <p:cNvSpPr txBox="1"/>
-          <p:nvPr/>
-        </p:nvSpPr>
-        <p:spPr>
-          <a:xfrm>
-            <a:off x="7498079" y="1645920"/>
-            <a:ext cx="4206240" cy="4389120"/>
-          </a:xfrm>
-          <a:prstGeom prst="rect">
-            <a:avLst/>
-          </a:prstGeom>
-          <a:noFill/>
-        </p:spPr>
-        <p:txBody>
-          <a:bodyPr wrap="square"/>
-          <a:lstStyle/>
-          <a:p>
-            <a:pPr algn="l">
-              <a:spcBef>
-                <a:spcPts val="0"/>
-              </a:spcBef>
-              <a:spcAft>
-                <a:spcPts val="600"/>
-              </a:spcAft>
-            </a:pPr>
-            <a:r>
-              <a:rPr sz="1500" b="0">
-                <a:solidFill>
-                  <a:srgbClr val="1C282C"/>
-                </a:solidFill>
-                <a:latin typeface="Yu Gothic"/>
-                <a:ea typeface="Yu Gothic"/>
-                <a:cs typeface="Yu Gothic"/>
-              </a:rPr>
-              <a:t>メニュー 9</a:t>
-            </a:r>
-          </a:p>
-          <a:p>
-            <a:pPr algn="l">
-              <a:spcBef>
-                <a:spcPts val="0"/>
-              </a:spcBef>
-              <a:spcAft>
-                <a:spcPts val="600"/>
-              </a:spcAft>
-            </a:pPr>
-            <a:r>
-              <a:rPr sz="1500" b="0">
-                <a:solidFill>
-                  <a:srgbClr val="1C282C"/>
-                </a:solidFill>
-                <a:latin typeface="Yu Gothic"/>
-                <a:ea typeface="Yu Gothic"/>
-                <a:cs typeface="Yu Gothic"/>
-              </a:rPr>
-              <a:t>3  最良を publish → push</a:t>
-            </a:r>
-          </a:p>
-          <a:p>
-            <a:pPr algn="l">
-              <a:spcBef>
-                <a:spcPts val="0"/>
-              </a:spcBef>
-              <a:spcAft>
-                <a:spcPts val="600"/>
-              </a:spcAft>
-            </a:pPr>
-            <a:r>
-              <a:rPr sz="1500" b="0">
-                <a:solidFill>
-                  <a:srgbClr val="1C282C"/>
-                </a:solidFill>
-                <a:latin typeface="Yu Gothic"/>
-                <a:ea typeface="Yu Gothic"/>
-                <a:cs typeface="Yu Gothic"/>
-              </a:rPr>
-              <a:t>4  最新を publish → push</a:t>
-            </a:r>
-          </a:p>
-          <a:p>
-            <a:pPr algn="l">
-              <a:spcBef>
-                <a:spcPts val="0"/>
-              </a:spcBef>
-              <a:spcAft>
-                <a:spcPts val="600"/>
-              </a:spcAft>
-            </a:pPr>
-            <a:r>
-              <a:rPr sz="1500" b="0">
-                <a:solidFill>
-                  <a:srgbClr val="1C282C"/>
-                </a:solidFill>
-                <a:latin typeface="Yu Gothic"/>
-                <a:ea typeface="Yu Gothic"/>
-                <a:cs typeface="Yu Gothic"/>
-              </a:rPr>
-              <a:t>6  最良で推論（best.pt）</a:t>
-            </a:r>
-          </a:p>
-          <a:p>
-            <a:pPr algn="l">
-              <a:spcBef>
-                <a:spcPts val="0"/>
-              </a:spcBef>
-              <a:spcAft>
-                <a:spcPts val="600"/>
-              </a:spcAft>
-            </a:pPr>
-            <a:r>
-              <a:rPr sz="1500" b="0">
-                <a:solidFill>
-                  <a:srgbClr val="1C282C"/>
-                </a:solidFill>
-                <a:latin typeface="Yu Gothic"/>
-                <a:ea typeface="Yu Gothic"/>
-                <a:cs typeface="Yu Gothic"/>
-              </a:rPr>
-              <a:t/>
-            </a:r>
-          </a:p>
-          <a:p>
-            <a:pPr algn="l">
-              <a:spcBef>
-                <a:spcPts val="0"/>
-              </a:spcBef>
-              <a:spcAft>
-                <a:spcPts val="600"/>
-              </a:spcAft>
-            </a:pPr>
-            <a:r>
-              <a:rPr sz="1500" b="0">
-                <a:solidFill>
-                  <a:srgbClr val="1C282C"/>
-                </a:solidFill>
-                <a:latin typeface="Yu Gothic"/>
-                <a:ea typeface="Yu Gothic"/>
-                <a:cs typeface="Yu Gothic"/>
-              </a:rPr>
-              <a:t>CLI 例</a:t>
-            </a:r>
-          </a:p>
-          <a:p>
-            <a:pPr algn="l">
-              <a:spcBef>
-                <a:spcPts val="0"/>
-              </a:spcBef>
-              <a:spcAft>
-                <a:spcPts val="600"/>
-              </a:spcAft>
-            </a:pPr>
-            <a:r>
-              <a:rPr sz="1500" b="0">
-                <a:solidFill>
-                  <a:srgbClr val="1C282C"/>
-                </a:solidFill>
-                <a:latin typeface="Yu Gothic"/>
-                <a:ea typeface="Yu Gothic"/>
-                <a:cs typeface="Yu Gothic"/>
-              </a:rPr>
-              <a:t>dvc_sync.py publish \</a:t>
-            </a:r>
-          </a:p>
-          <a:p>
-            <a:pPr algn="l">
-              <a:spcBef>
-                <a:spcPts val="0"/>
-              </a:spcBef>
-              <a:spcAft>
-                <a:spcPts val="600"/>
-              </a:spcAft>
-            </a:pPr>
-            <a:r>
-              <a:rPr sz="1500" b="0">
-                <a:solidFill>
-                  <a:srgbClr val="1C282C"/>
-                </a:solidFill>
-                <a:latin typeface="Yu Gothic"/>
-                <a:ea typeface="Yu Gothic"/>
-                <a:cs typeface="Yu Gothic"/>
-              </a:rPr>
-              <a:t>  --log-dir logs\... \</a:t>
-            </a:r>
-          </a:p>
-          <a:p>
-            <a:pPr algn="l">
-              <a:spcBef>
-                <a:spcPts val="0"/>
-              </a:spcBef>
-              <a:spcAft>
-                <a:spcPts val="600"/>
-              </a:spcAft>
-            </a:pPr>
-            <a:r>
-              <a:rPr sz="1500" b="0">
-                <a:solidFill>
-                  <a:srgbClr val="1C282C"/>
-                </a:solidFill>
-                <a:latin typeface="Yu Gothic"/>
-                <a:ea typeface="Yu Gothic"/>
-                <a:cs typeface="Yu Gothic"/>
-              </a:rPr>
-              <a:t>  --select best --push</a:t>
-            </a:r>
-          </a:p>
-          <a:p>
-            <a:pPr algn="l">
-              <a:spcBef>
-                <a:spcPts val="0"/>
-              </a:spcBef>
-              <a:spcAft>
-                <a:spcPts val="600"/>
-              </a:spcAft>
-            </a:pPr>
-            <a:r>
-              <a:rPr sz="1500" b="0">
-                <a:solidFill>
-                  <a:srgbClr val="1C282C"/>
-                </a:solidFill>
-                <a:latin typeface="Yu Gothic"/>
-                <a:ea typeface="Yu Gothic"/>
-                <a:cs typeface="Yu Gothic"/>
-              </a:rPr>
-              <a:t/>
-            </a:r>
-          </a:p>
-          <a:p>
-            <a:pPr algn="l">
-              <a:spcBef>
-                <a:spcPts val="0"/>
-              </a:spcBef>
-              <a:spcAft>
-                <a:spcPts val="600"/>
-              </a:spcAft>
-            </a:pPr>
-            <a:r>
-              <a:rPr sz="1500" b="0">
-                <a:solidFill>
-                  <a:srgbClr val="1C282C"/>
-                </a:solidFill>
-                <a:latin typeface="Yu Gothic"/>
-                <a:ea typeface="Yu Gothic"/>
-                <a:cs typeface="Yu Gothic"/>
-              </a:rPr>
-              <a:t>resolve で best.pt のパス表示</a:t>
-            </a:r>
-          </a:p>
-        </p:txBody>
-      </p:sp>
     </p:spTree>
   </p:cSld>
   <p:clrMapOvr>
@@ -6440,7 +13056,7 @@
                 <a:ea typeface="Yu Gothic"/>
                 <a:cs typeface="Yu Gothic"/>
               </a:rPr>
-              <a:t>MLflow：実験ノート（実画面）</a:t>
+              <a:t>MinIO：バケット一覧（実画面）</a:t>
             </a:r>
           </a:p>
         </p:txBody>
@@ -6482,7 +13098,7 @@
                 <a:ea typeface="Yu Gothic"/>
                 <a:cs typeface="Yu Gothic"/>
               </a:rPr>
-              <a:t>起動: mlflow ui --backend-store-uri sqlite:///logs/mlflow/mlflow.db</a:t>
+              <a:t>pai-dvc = DVC の重み倉庫　／　pai-mlflow = MLflow artifact 用</a:t>
             </a:r>
           </a:p>
         </p:txBody>
@@ -6536,7 +13152,7 @@
       </p:sp>
       <p:pic>
         <p:nvPicPr>
-          <p:cNvPr id="7" name="Picture 6" descr="mlflow_home.png"/>
+          <p:cNvPr id="7" name="Picture 6" descr="minio_pai_dvc.png"/>
           <p:cNvPicPr>
             <a:picLocks noChangeAspect="1"/>
           </p:cNvPicPr>
@@ -6699,7 +13315,7 @@
                 <a:ea typeface="Yu Gothic"/>
                 <a:cs typeface="Yu Gothic"/>
               </a:rPr>
-              <a:t>MLflow：pick-and-carry の Runs</a:t>
+              <a:t>MinIO の中身：DVC の content-addressed 保管</a:t>
             </a:r>
           </a:p>
         </p:txBody>
@@ -6741,7 +13357,7 @@
                 <a:ea typeface="Yu Gothic"/>
                 <a:cs typeface="Yu Gothic"/>
               </a:rPr>
-              <a:t>曲線・パラメータ比較はここ。大きい .pt の共有は DVC/MinIO 側</a:t>
+              <a:t>pai-dvc / files / md5/ … ハッシュ名で実体を置く（Git には載せない）</a:t>
             </a:r>
           </a:p>
         </p:txBody>
@@ -6795,7 +13411,7 @@
       </p:sp>
       <p:pic>
         <p:nvPicPr>
-          <p:cNvPr id="7" name="Picture 6" descr="mlflow_experiment.png"/>
+          <p:cNvPr id="7" name="Picture 6" descr="minio_pai_dvc_files.png"/>
           <p:cNvPicPr>
             <a:picLocks noChangeAspect="1"/>
           </p:cNvPicPr>
